--- a/public/materials/backend/node-json-api.pptx
+++ b/public/materials/backend/node-json-api.pptx
@@ -2,20 +2,27 @@
 <file path=ppt/presentation.xml><?xml version="1.0" encoding="utf-8"?>
 <p:presentation xmlns:p="http://schemas.openxmlformats.org/presentationml/2006/main">
   <p:sldMasterIdLst>
-    <p:sldMasterId xmlns:r="http://schemas.openxmlformats.org/officeDocument/2006/relationships" id="2147483648" r:id="R1bc709a9b84c4995"/>
+    <p:sldMasterId xmlns:r="http://schemas.openxmlformats.org/officeDocument/2006/relationships" id="2147483648" r:id="Ra90d8840164043e9"/>
   </p:sldMasterIdLst>
   <p:notesMasterIdLst>
-    <p:notesMasterId xmlns:r="http://schemas.openxmlformats.org/officeDocument/2006/relationships" r:id="R5ad97bf9e87b4600"/>
+    <p:notesMasterId xmlns:r="http://schemas.openxmlformats.org/officeDocument/2006/relationships" r:id="R3d6f65e7a522469b"/>
   </p:notesMasterIdLst>
   <p:sldIdLst>
-    <p:sldId xmlns:r="http://schemas.openxmlformats.org/officeDocument/2006/relationships" id="256" r:id="R5169e2a6a27045b7"/>
-    <p:sldId xmlns:r="http://schemas.openxmlformats.org/officeDocument/2006/relationships" id="257" r:id="R502a4d7462354b29"/>
-    <p:sldId xmlns:r="http://schemas.openxmlformats.org/officeDocument/2006/relationships" id="258" r:id="R869e693685a6431d"/>
-    <p:sldId xmlns:r="http://schemas.openxmlformats.org/officeDocument/2006/relationships" id="259" r:id="Rbeb11576fb304a2f"/>
-    <p:sldId xmlns:r="http://schemas.openxmlformats.org/officeDocument/2006/relationships" id="260" r:id="Rc924796a06cc4500"/>
-    <p:sldId xmlns:r="http://schemas.openxmlformats.org/officeDocument/2006/relationships" id="261" r:id="Rd9e5a44383b14eb0"/>
-    <p:sldId xmlns:r="http://schemas.openxmlformats.org/officeDocument/2006/relationships" id="262" r:id="Rac6b2d9261014da8"/>
-    <p:sldId xmlns:r="http://schemas.openxmlformats.org/officeDocument/2006/relationships" id="263" r:id="R105d43092bf6495d"/>
+    <p:sldId xmlns:r="http://schemas.openxmlformats.org/officeDocument/2006/relationships" id="256" r:id="Rc086749b697d4947"/>
+    <p:sldId xmlns:r="http://schemas.openxmlformats.org/officeDocument/2006/relationships" id="257" r:id="Re2d5527e9ad64bd6"/>
+    <p:sldId xmlns:r="http://schemas.openxmlformats.org/officeDocument/2006/relationships" id="258" r:id="R9ddc05a8632c4a38"/>
+    <p:sldId xmlns:r="http://schemas.openxmlformats.org/officeDocument/2006/relationships" id="259" r:id="R62d3987906794362"/>
+    <p:sldId xmlns:r="http://schemas.openxmlformats.org/officeDocument/2006/relationships" id="260" r:id="Rf50699da7fd44b63"/>
+    <p:sldId xmlns:r="http://schemas.openxmlformats.org/officeDocument/2006/relationships" id="261" r:id="R53474fffbfcd40e7"/>
+    <p:sldId xmlns:r="http://schemas.openxmlformats.org/officeDocument/2006/relationships" id="262" r:id="R3ab93cf12d1e4e91"/>
+    <p:sldId xmlns:r="http://schemas.openxmlformats.org/officeDocument/2006/relationships" id="263" r:id="R08abceca480d441a"/>
+    <p:sldId xmlns:r="http://schemas.openxmlformats.org/officeDocument/2006/relationships" id="264" r:id="R81ea2b497ddf4d19"/>
+    <p:sldId xmlns:r="http://schemas.openxmlformats.org/officeDocument/2006/relationships" id="265" r:id="Rc6a0ad1cf60e4fd3"/>
+    <p:sldId xmlns:r="http://schemas.openxmlformats.org/officeDocument/2006/relationships" id="266" r:id="Rfd4d95907fbd46e1"/>
+    <p:sldId xmlns:r="http://schemas.openxmlformats.org/officeDocument/2006/relationships" id="267" r:id="R6be05e832b9a465e"/>
+    <p:sldId xmlns:r="http://schemas.openxmlformats.org/officeDocument/2006/relationships" id="268" r:id="R788f403ad7084a95"/>
+    <p:sldId xmlns:r="http://schemas.openxmlformats.org/officeDocument/2006/relationships" id="269" r:id="Rbd311e9198b94c14"/>
+    <p:sldId xmlns:r="http://schemas.openxmlformats.org/officeDocument/2006/relationships" id="270" r:id="R0e6e2a0de8ec4b8a"/>
   </p:sldIdLst>
   <p:sldSz cx="12192000" cy="6858000"/>
   <p:notesSz cx="6858000" cy="9144000"/>
@@ -475,6 +482,402 @@
 </p:notes>
 </file>
 
+<file path=ppt/notesSlides/notesSlide10.xml><?xml version="1.0" encoding="utf-8"?>
+<p:notes xmlns:p="http://schemas.openxmlformats.org/presentationml/2006/main">
+  <p:cSld>
+    <p:spTree>
+      <p:nvGrpSpPr>
+        <p:cNvPr id="1" name=""/>
+        <p:cNvGrpSpPr/>
+        <p:nvPr/>
+      </p:nvGrpSpPr>
+      <p:grpSpPr>
+        <a:xfrm xmlns:a="http://schemas.openxmlformats.org/drawingml/2006/main"/>
+      </p:grpSpPr>
+      <p:sp>
+        <p:nvSpPr>
+          <p:cNvPr id="2" name="Slide Image Placeholder 1"/>
+          <p:cNvSpPr>
+            <a:spLocks xmlns:a="http://schemas.openxmlformats.org/drawingml/2006/main" noGrp="1"/>
+          </p:cNvSpPr>
+          <p:nvPr>
+            <p:ph type="sldImg" idx="0"/>
+          </p:nvPr>
+        </p:nvSpPr>
+        <p:spPr/>
+      </p:sp>
+      <p:sp>
+        <p:nvSpPr>
+          <p:cNvPr id="3" name="Notes Placeholder 2"/>
+          <p:cNvSpPr>
+            <a:spLocks xmlns:a="http://schemas.openxmlformats.org/drawingml/2006/main" noGrp="1"/>
+          </p:cNvSpPr>
+          <p:nvPr>
+            <p:ph type="body" idx="1"/>
+          </p:nvPr>
+        </p:nvSpPr>
+        <p:spPr/>
+        <p:txBody>
+          <a:bodyPr xmlns:a="http://schemas.openxmlformats.org/drawingml/2006/main"/>
+          <a:lstStyle xmlns:a="http://schemas.openxmlformats.org/drawingml/2006/main"/>
+          <a:p xmlns:a="http://schemas.openxmlformats.org/drawingml/2006/main"/>
+        </p:txBody>
+      </p:sp>
+      <p:sp>
+        <p:nvSpPr>
+          <p:cNvPr id="4" name="Slide Number Placeholder 3"/>
+          <p:cNvSpPr>
+            <a:spLocks xmlns:a="http://schemas.openxmlformats.org/drawingml/2006/main" noGrp="1"/>
+          </p:cNvSpPr>
+          <p:nvPr>
+            <p:ph type="sldNum" idx="5"/>
+          </p:nvPr>
+        </p:nvSpPr>
+        <p:spPr/>
+        <p:txBody>
+          <a:bodyPr xmlns:a="http://schemas.openxmlformats.org/drawingml/2006/main"/>
+          <a:lstStyle xmlns:a="http://schemas.openxmlformats.org/drawingml/2006/main"/>
+          <a:p xmlns:a="http://schemas.openxmlformats.org/drawingml/2006/main"/>
+        </p:txBody>
+      </p:sp>
+    </p:spTree>
+  </p:cSld>
+  <p:clrMapOvr>
+    <a:masterClrMapping xmlns:a="http://schemas.openxmlformats.org/drawingml/2006/main"/>
+  </p:clrMapOvr>
+</p:notes>
+</file>
+
+<file path=ppt/notesSlides/notesSlide11.xml><?xml version="1.0" encoding="utf-8"?>
+<p:notes xmlns:p="http://schemas.openxmlformats.org/presentationml/2006/main">
+  <p:cSld>
+    <p:spTree>
+      <p:nvGrpSpPr>
+        <p:cNvPr id="1" name=""/>
+        <p:cNvGrpSpPr/>
+        <p:nvPr/>
+      </p:nvGrpSpPr>
+      <p:grpSpPr>
+        <a:xfrm xmlns:a="http://schemas.openxmlformats.org/drawingml/2006/main"/>
+      </p:grpSpPr>
+      <p:sp>
+        <p:nvSpPr>
+          <p:cNvPr id="2" name="Slide Image Placeholder 1"/>
+          <p:cNvSpPr>
+            <a:spLocks xmlns:a="http://schemas.openxmlformats.org/drawingml/2006/main" noGrp="1"/>
+          </p:cNvSpPr>
+          <p:nvPr>
+            <p:ph type="sldImg" idx="0"/>
+          </p:nvPr>
+        </p:nvSpPr>
+        <p:spPr/>
+      </p:sp>
+      <p:sp>
+        <p:nvSpPr>
+          <p:cNvPr id="3" name="Notes Placeholder 2"/>
+          <p:cNvSpPr>
+            <a:spLocks xmlns:a="http://schemas.openxmlformats.org/drawingml/2006/main" noGrp="1"/>
+          </p:cNvSpPr>
+          <p:nvPr>
+            <p:ph type="body" idx="1"/>
+          </p:nvPr>
+        </p:nvSpPr>
+        <p:spPr/>
+        <p:txBody>
+          <a:bodyPr xmlns:a="http://schemas.openxmlformats.org/drawingml/2006/main"/>
+          <a:lstStyle xmlns:a="http://schemas.openxmlformats.org/drawingml/2006/main"/>
+          <a:p xmlns:a="http://schemas.openxmlformats.org/drawingml/2006/main"/>
+        </p:txBody>
+      </p:sp>
+      <p:sp>
+        <p:nvSpPr>
+          <p:cNvPr id="4" name="Slide Number Placeholder 3"/>
+          <p:cNvSpPr>
+            <a:spLocks xmlns:a="http://schemas.openxmlformats.org/drawingml/2006/main" noGrp="1"/>
+          </p:cNvSpPr>
+          <p:nvPr>
+            <p:ph type="sldNum" idx="5"/>
+          </p:nvPr>
+        </p:nvSpPr>
+        <p:spPr/>
+        <p:txBody>
+          <a:bodyPr xmlns:a="http://schemas.openxmlformats.org/drawingml/2006/main"/>
+          <a:lstStyle xmlns:a="http://schemas.openxmlformats.org/drawingml/2006/main"/>
+          <a:p xmlns:a="http://schemas.openxmlformats.org/drawingml/2006/main"/>
+        </p:txBody>
+      </p:sp>
+    </p:spTree>
+  </p:cSld>
+  <p:clrMapOvr>
+    <a:masterClrMapping xmlns:a="http://schemas.openxmlformats.org/drawingml/2006/main"/>
+  </p:clrMapOvr>
+</p:notes>
+</file>
+
+<file path=ppt/notesSlides/notesSlide12.xml><?xml version="1.0" encoding="utf-8"?>
+<p:notes xmlns:p="http://schemas.openxmlformats.org/presentationml/2006/main">
+  <p:cSld>
+    <p:spTree>
+      <p:nvGrpSpPr>
+        <p:cNvPr id="1" name=""/>
+        <p:cNvGrpSpPr/>
+        <p:nvPr/>
+      </p:nvGrpSpPr>
+      <p:grpSpPr>
+        <a:xfrm xmlns:a="http://schemas.openxmlformats.org/drawingml/2006/main"/>
+      </p:grpSpPr>
+      <p:sp>
+        <p:nvSpPr>
+          <p:cNvPr id="2" name="Slide Image Placeholder 1"/>
+          <p:cNvSpPr>
+            <a:spLocks xmlns:a="http://schemas.openxmlformats.org/drawingml/2006/main" noGrp="1"/>
+          </p:cNvSpPr>
+          <p:nvPr>
+            <p:ph type="sldImg" idx="0"/>
+          </p:nvPr>
+        </p:nvSpPr>
+        <p:spPr/>
+      </p:sp>
+      <p:sp>
+        <p:nvSpPr>
+          <p:cNvPr id="3" name="Notes Placeholder 2"/>
+          <p:cNvSpPr>
+            <a:spLocks xmlns:a="http://schemas.openxmlformats.org/drawingml/2006/main" noGrp="1"/>
+          </p:cNvSpPr>
+          <p:nvPr>
+            <p:ph type="body" idx="1"/>
+          </p:nvPr>
+        </p:nvSpPr>
+        <p:spPr/>
+        <p:txBody>
+          <a:bodyPr xmlns:a="http://schemas.openxmlformats.org/drawingml/2006/main"/>
+          <a:lstStyle xmlns:a="http://schemas.openxmlformats.org/drawingml/2006/main"/>
+          <a:p xmlns:a="http://schemas.openxmlformats.org/drawingml/2006/main"/>
+        </p:txBody>
+      </p:sp>
+      <p:sp>
+        <p:nvSpPr>
+          <p:cNvPr id="4" name="Slide Number Placeholder 3"/>
+          <p:cNvSpPr>
+            <a:spLocks xmlns:a="http://schemas.openxmlformats.org/drawingml/2006/main" noGrp="1"/>
+          </p:cNvSpPr>
+          <p:nvPr>
+            <p:ph type="sldNum" idx="5"/>
+          </p:nvPr>
+        </p:nvSpPr>
+        <p:spPr/>
+        <p:txBody>
+          <a:bodyPr xmlns:a="http://schemas.openxmlformats.org/drawingml/2006/main"/>
+          <a:lstStyle xmlns:a="http://schemas.openxmlformats.org/drawingml/2006/main"/>
+          <a:p xmlns:a="http://schemas.openxmlformats.org/drawingml/2006/main"/>
+        </p:txBody>
+      </p:sp>
+    </p:spTree>
+  </p:cSld>
+  <p:clrMapOvr>
+    <a:masterClrMapping xmlns:a="http://schemas.openxmlformats.org/drawingml/2006/main"/>
+  </p:clrMapOvr>
+</p:notes>
+</file>
+
+<file path=ppt/notesSlides/notesSlide13.xml><?xml version="1.0" encoding="utf-8"?>
+<p:notes xmlns:p="http://schemas.openxmlformats.org/presentationml/2006/main">
+  <p:cSld>
+    <p:spTree>
+      <p:nvGrpSpPr>
+        <p:cNvPr id="1" name=""/>
+        <p:cNvGrpSpPr/>
+        <p:nvPr/>
+      </p:nvGrpSpPr>
+      <p:grpSpPr>
+        <a:xfrm xmlns:a="http://schemas.openxmlformats.org/drawingml/2006/main"/>
+      </p:grpSpPr>
+      <p:sp>
+        <p:nvSpPr>
+          <p:cNvPr id="2" name="Slide Image Placeholder 1"/>
+          <p:cNvSpPr>
+            <a:spLocks xmlns:a="http://schemas.openxmlformats.org/drawingml/2006/main" noGrp="1"/>
+          </p:cNvSpPr>
+          <p:nvPr>
+            <p:ph type="sldImg" idx="0"/>
+          </p:nvPr>
+        </p:nvSpPr>
+        <p:spPr/>
+      </p:sp>
+      <p:sp>
+        <p:nvSpPr>
+          <p:cNvPr id="3" name="Notes Placeholder 2"/>
+          <p:cNvSpPr>
+            <a:spLocks xmlns:a="http://schemas.openxmlformats.org/drawingml/2006/main" noGrp="1"/>
+          </p:cNvSpPr>
+          <p:nvPr>
+            <p:ph type="body" idx="1"/>
+          </p:nvPr>
+        </p:nvSpPr>
+        <p:spPr/>
+        <p:txBody>
+          <a:bodyPr xmlns:a="http://schemas.openxmlformats.org/drawingml/2006/main"/>
+          <a:lstStyle xmlns:a="http://schemas.openxmlformats.org/drawingml/2006/main"/>
+          <a:p xmlns:a="http://schemas.openxmlformats.org/drawingml/2006/main"/>
+        </p:txBody>
+      </p:sp>
+      <p:sp>
+        <p:nvSpPr>
+          <p:cNvPr id="4" name="Slide Number Placeholder 3"/>
+          <p:cNvSpPr>
+            <a:spLocks xmlns:a="http://schemas.openxmlformats.org/drawingml/2006/main" noGrp="1"/>
+          </p:cNvSpPr>
+          <p:nvPr>
+            <p:ph type="sldNum" idx="5"/>
+          </p:nvPr>
+        </p:nvSpPr>
+        <p:spPr/>
+        <p:txBody>
+          <a:bodyPr xmlns:a="http://schemas.openxmlformats.org/drawingml/2006/main"/>
+          <a:lstStyle xmlns:a="http://schemas.openxmlformats.org/drawingml/2006/main"/>
+          <a:p xmlns:a="http://schemas.openxmlformats.org/drawingml/2006/main"/>
+        </p:txBody>
+      </p:sp>
+    </p:spTree>
+  </p:cSld>
+  <p:clrMapOvr>
+    <a:masterClrMapping xmlns:a="http://schemas.openxmlformats.org/drawingml/2006/main"/>
+  </p:clrMapOvr>
+</p:notes>
+</file>
+
+<file path=ppt/notesSlides/notesSlide14.xml><?xml version="1.0" encoding="utf-8"?>
+<p:notes xmlns:p="http://schemas.openxmlformats.org/presentationml/2006/main">
+  <p:cSld>
+    <p:spTree>
+      <p:nvGrpSpPr>
+        <p:cNvPr id="1" name=""/>
+        <p:cNvGrpSpPr/>
+        <p:nvPr/>
+      </p:nvGrpSpPr>
+      <p:grpSpPr>
+        <a:xfrm xmlns:a="http://schemas.openxmlformats.org/drawingml/2006/main"/>
+      </p:grpSpPr>
+      <p:sp>
+        <p:nvSpPr>
+          <p:cNvPr id="2" name="Slide Image Placeholder 1"/>
+          <p:cNvSpPr>
+            <a:spLocks xmlns:a="http://schemas.openxmlformats.org/drawingml/2006/main" noGrp="1"/>
+          </p:cNvSpPr>
+          <p:nvPr>
+            <p:ph type="sldImg" idx="0"/>
+          </p:nvPr>
+        </p:nvSpPr>
+        <p:spPr/>
+      </p:sp>
+      <p:sp>
+        <p:nvSpPr>
+          <p:cNvPr id="3" name="Notes Placeholder 2"/>
+          <p:cNvSpPr>
+            <a:spLocks xmlns:a="http://schemas.openxmlformats.org/drawingml/2006/main" noGrp="1"/>
+          </p:cNvSpPr>
+          <p:nvPr>
+            <p:ph type="body" idx="1"/>
+          </p:nvPr>
+        </p:nvSpPr>
+        <p:spPr/>
+        <p:txBody>
+          <a:bodyPr xmlns:a="http://schemas.openxmlformats.org/drawingml/2006/main"/>
+          <a:lstStyle xmlns:a="http://schemas.openxmlformats.org/drawingml/2006/main"/>
+          <a:p xmlns:a="http://schemas.openxmlformats.org/drawingml/2006/main"/>
+        </p:txBody>
+      </p:sp>
+      <p:sp>
+        <p:nvSpPr>
+          <p:cNvPr id="4" name="Slide Number Placeholder 3"/>
+          <p:cNvSpPr>
+            <a:spLocks xmlns:a="http://schemas.openxmlformats.org/drawingml/2006/main" noGrp="1"/>
+          </p:cNvSpPr>
+          <p:nvPr>
+            <p:ph type="sldNum" idx="5"/>
+          </p:nvPr>
+        </p:nvSpPr>
+        <p:spPr/>
+        <p:txBody>
+          <a:bodyPr xmlns:a="http://schemas.openxmlformats.org/drawingml/2006/main"/>
+          <a:lstStyle xmlns:a="http://schemas.openxmlformats.org/drawingml/2006/main"/>
+          <a:p xmlns:a="http://schemas.openxmlformats.org/drawingml/2006/main"/>
+        </p:txBody>
+      </p:sp>
+    </p:spTree>
+  </p:cSld>
+  <p:clrMapOvr>
+    <a:masterClrMapping xmlns:a="http://schemas.openxmlformats.org/drawingml/2006/main"/>
+  </p:clrMapOvr>
+</p:notes>
+</file>
+
+<file path=ppt/notesSlides/notesSlide15.xml><?xml version="1.0" encoding="utf-8"?>
+<p:notes xmlns:p="http://schemas.openxmlformats.org/presentationml/2006/main">
+  <p:cSld>
+    <p:spTree>
+      <p:nvGrpSpPr>
+        <p:cNvPr id="1" name=""/>
+        <p:cNvGrpSpPr/>
+        <p:nvPr/>
+      </p:nvGrpSpPr>
+      <p:grpSpPr>
+        <a:xfrm xmlns:a="http://schemas.openxmlformats.org/drawingml/2006/main"/>
+      </p:grpSpPr>
+      <p:sp>
+        <p:nvSpPr>
+          <p:cNvPr id="2" name="Slide Image Placeholder 1"/>
+          <p:cNvSpPr>
+            <a:spLocks xmlns:a="http://schemas.openxmlformats.org/drawingml/2006/main" noGrp="1"/>
+          </p:cNvSpPr>
+          <p:nvPr>
+            <p:ph type="sldImg" idx="0"/>
+          </p:nvPr>
+        </p:nvSpPr>
+        <p:spPr/>
+      </p:sp>
+      <p:sp>
+        <p:nvSpPr>
+          <p:cNvPr id="3" name="Notes Placeholder 2"/>
+          <p:cNvSpPr>
+            <a:spLocks xmlns:a="http://schemas.openxmlformats.org/drawingml/2006/main" noGrp="1"/>
+          </p:cNvSpPr>
+          <p:nvPr>
+            <p:ph type="body" idx="1"/>
+          </p:nvPr>
+        </p:nvSpPr>
+        <p:spPr/>
+        <p:txBody>
+          <a:bodyPr xmlns:a="http://schemas.openxmlformats.org/drawingml/2006/main"/>
+          <a:lstStyle xmlns:a="http://schemas.openxmlformats.org/drawingml/2006/main"/>
+          <a:p xmlns:a="http://schemas.openxmlformats.org/drawingml/2006/main"/>
+        </p:txBody>
+      </p:sp>
+      <p:sp>
+        <p:nvSpPr>
+          <p:cNvPr id="4" name="Slide Number Placeholder 3"/>
+          <p:cNvSpPr>
+            <a:spLocks xmlns:a="http://schemas.openxmlformats.org/drawingml/2006/main" noGrp="1"/>
+          </p:cNvSpPr>
+          <p:nvPr>
+            <p:ph type="sldNum" idx="5"/>
+          </p:nvPr>
+        </p:nvSpPr>
+        <p:spPr/>
+        <p:txBody>
+          <a:bodyPr xmlns:a="http://schemas.openxmlformats.org/drawingml/2006/main"/>
+          <a:lstStyle xmlns:a="http://schemas.openxmlformats.org/drawingml/2006/main"/>
+          <a:p xmlns:a="http://schemas.openxmlformats.org/drawingml/2006/main"/>
+        </p:txBody>
+      </p:sp>
+    </p:spTree>
+  </p:cSld>
+  <p:clrMapOvr>
+    <a:masterClrMapping xmlns:a="http://schemas.openxmlformats.org/drawingml/2006/main"/>
+  </p:clrMapOvr>
+</p:notes>
+</file>
+
 <file path=ppt/notesSlides/notesSlide2.xml><?xml version="1.0" encoding="utf-8"?>
 <p:notes xmlns:p="http://schemas.openxmlformats.org/presentationml/2006/main">
   <p:cSld>
@@ -872,6 +1275,72 @@
 </file>
 
 <file path=ppt/notesSlides/notesSlide8.xml><?xml version="1.0" encoding="utf-8"?>
+<p:notes xmlns:p="http://schemas.openxmlformats.org/presentationml/2006/main">
+  <p:cSld>
+    <p:spTree>
+      <p:nvGrpSpPr>
+        <p:cNvPr id="1" name=""/>
+        <p:cNvGrpSpPr/>
+        <p:nvPr/>
+      </p:nvGrpSpPr>
+      <p:grpSpPr>
+        <a:xfrm xmlns:a="http://schemas.openxmlformats.org/drawingml/2006/main"/>
+      </p:grpSpPr>
+      <p:sp>
+        <p:nvSpPr>
+          <p:cNvPr id="2" name="Slide Image Placeholder 1"/>
+          <p:cNvSpPr>
+            <a:spLocks xmlns:a="http://schemas.openxmlformats.org/drawingml/2006/main" noGrp="1"/>
+          </p:cNvSpPr>
+          <p:nvPr>
+            <p:ph type="sldImg" idx="0"/>
+          </p:nvPr>
+        </p:nvSpPr>
+        <p:spPr/>
+      </p:sp>
+      <p:sp>
+        <p:nvSpPr>
+          <p:cNvPr id="3" name="Notes Placeholder 2"/>
+          <p:cNvSpPr>
+            <a:spLocks xmlns:a="http://schemas.openxmlformats.org/drawingml/2006/main" noGrp="1"/>
+          </p:cNvSpPr>
+          <p:nvPr>
+            <p:ph type="body" idx="1"/>
+          </p:nvPr>
+        </p:nvSpPr>
+        <p:spPr/>
+        <p:txBody>
+          <a:bodyPr xmlns:a="http://schemas.openxmlformats.org/drawingml/2006/main"/>
+          <a:lstStyle xmlns:a="http://schemas.openxmlformats.org/drawingml/2006/main"/>
+          <a:p xmlns:a="http://schemas.openxmlformats.org/drawingml/2006/main"/>
+        </p:txBody>
+      </p:sp>
+      <p:sp>
+        <p:nvSpPr>
+          <p:cNvPr id="4" name="Slide Number Placeholder 3"/>
+          <p:cNvSpPr>
+            <a:spLocks xmlns:a="http://schemas.openxmlformats.org/drawingml/2006/main" noGrp="1"/>
+          </p:cNvSpPr>
+          <p:nvPr>
+            <p:ph type="sldNum" idx="5"/>
+          </p:nvPr>
+        </p:nvSpPr>
+        <p:spPr/>
+        <p:txBody>
+          <a:bodyPr xmlns:a="http://schemas.openxmlformats.org/drawingml/2006/main"/>
+          <a:lstStyle xmlns:a="http://schemas.openxmlformats.org/drawingml/2006/main"/>
+          <a:p xmlns:a="http://schemas.openxmlformats.org/drawingml/2006/main"/>
+        </p:txBody>
+      </p:sp>
+    </p:spTree>
+  </p:cSld>
+  <p:clrMapOvr>
+    <a:masterClrMapping xmlns:a="http://schemas.openxmlformats.org/drawingml/2006/main"/>
+  </p:clrMapOvr>
+</p:notes>
+</file>
+
+<file path=ppt/notesSlides/notesSlide9.xml><?xml version="1.0" encoding="utf-8"?>
 <p:notes xmlns:p="http://schemas.openxmlformats.org/presentationml/2006/main">
   <p:cSld>
     <p:spTree>
@@ -975,7 +1444,7 @@
   </p:cSld>
   <p:clrMap bg1="lt1" tx1="dk1" bg2="lt2" tx2="dk2" accent1="accent1" accent2="accent2" accent3="accent3" accent4="accent4" accent5="accent5" accent6="accent6" hlink="hlink" folHlink="folHlink"/>
   <p:sldLayoutIdLst>
-    <p:sldLayoutId xmlns:r="http://schemas.openxmlformats.org/officeDocument/2006/relationships" id="2147483649" r:id="R101fb57db77d4858"/>
+    <p:sldLayoutId xmlns:r="http://schemas.openxmlformats.org/officeDocument/2006/relationships" id="2147483649" r:id="Reaa7e10dfd064ecf"/>
   </p:sldLayoutIdLst>
   <p:txStyles>
     <p:titleStyle>
@@ -1526,7 +1995,7 @@
           <p:cNvPr id="9" name="">
             <a:extLst xmlns:a="http://schemas.openxmlformats.org/drawingml/2006/main">
               <a:ext uri="{FF2B5EF4-FFF2-40B4-BE49-F238E27FC236}">
-                <a16:creationId xmlns:a16="http://schemas.microsoft.com/office/drawing/2014/main" id="{F7FC7A42-CFE5-47E1-9475-91DA254320AE}"/>
+                <a16:creationId xmlns:a16="http://schemas.microsoft.com/office/drawing/2014/main" id="{233DBA7B-DF70-47F9-B52E-040BFD161503}"/>
               </a:ext>
             </a:extLst>
           </p:cNvPr>
@@ -1557,7 +2026,7 @@
           <p:cNvPr id="2" name="">
             <a:extLst xmlns:a="http://schemas.openxmlformats.org/drawingml/2006/main">
               <a:ext uri="{FF2B5EF4-FFF2-40B4-BE49-F238E27FC236}">
-                <a16:creationId xmlns:a16="http://schemas.microsoft.com/office/drawing/2014/main" id="{35260BDE-0782-4B12-B9F5-912CAC0BA9BA}"/>
+                <a16:creationId xmlns:a16="http://schemas.microsoft.com/office/drawing/2014/main" id="{BA8A5303-4CE9-470E-B1DA-B0B50B9CD095}"/>
               </a:ext>
             </a:extLst>
           </p:cNvPr>
@@ -1607,7 +2076,7 @@
           <p:cNvPr id="3" name="">
             <a:extLst xmlns:a="http://schemas.openxmlformats.org/drawingml/2006/main">
               <a:ext uri="{FF2B5EF4-FFF2-40B4-BE49-F238E27FC236}">
-                <a16:creationId xmlns:a16="http://schemas.microsoft.com/office/drawing/2014/main" id="{DE09A33E-0114-498E-A3DF-FD94D2CE071C}"/>
+                <a16:creationId xmlns:a16="http://schemas.microsoft.com/office/drawing/2014/main" id="{5A2A251D-125F-4157-8DAF-8B3B53BF1B1B}"/>
               </a:ext>
             </a:extLst>
           </p:cNvPr>
@@ -1657,7 +2126,7 @@
           <p:cNvPr id="4" name="">
             <a:extLst xmlns:a="http://schemas.openxmlformats.org/drawingml/2006/main">
               <a:ext uri="{FF2B5EF4-FFF2-40B4-BE49-F238E27FC236}">
-                <a16:creationId xmlns:a16="http://schemas.microsoft.com/office/drawing/2014/main" id="{1E5E2F4B-A6C6-4415-99CF-A84015664135}"/>
+                <a16:creationId xmlns:a16="http://schemas.microsoft.com/office/drawing/2014/main" id="{2600CB1E-2C47-4D2D-8640-2C01C344CB13}"/>
               </a:ext>
             </a:extLst>
           </p:cNvPr>
@@ -1707,7 +2176,7 @@
           <p:cNvPr id="5" name="">
             <a:extLst xmlns:a="http://schemas.openxmlformats.org/drawingml/2006/main">
               <a:ext uri="{FF2B5EF4-FFF2-40B4-BE49-F238E27FC236}">
-                <a16:creationId xmlns:a16="http://schemas.microsoft.com/office/drawing/2014/main" id="{1F2CA981-2994-480C-B8F9-1D870A68F1D3}"/>
+                <a16:creationId xmlns:a16="http://schemas.microsoft.com/office/drawing/2014/main" id="{C0447A50-AC7A-4EC1-B920-7FFAF4399A53}"/>
               </a:ext>
             </a:extLst>
           </p:cNvPr>
@@ -1740,7 +2209,7 @@
           <p:cNvPr id="6" name="">
             <a:extLst xmlns:a="http://schemas.openxmlformats.org/drawingml/2006/main">
               <a:ext uri="{FF2B5EF4-FFF2-40B4-BE49-F238E27FC236}">
-                <a16:creationId xmlns:a16="http://schemas.microsoft.com/office/drawing/2014/main" id="{0D97F47C-94B8-49E0-8144-DFF058C61744}"/>
+                <a16:creationId xmlns:a16="http://schemas.microsoft.com/office/drawing/2014/main" id="{AAFC88CA-B1EF-48B0-8D2E-0B15907453C1}"/>
               </a:ext>
             </a:extLst>
           </p:cNvPr>
@@ -1794,7 +2263,7 @@
           <p:nvPr/>
         </p:nvPicPr>
         <p:blipFill>
-          <a:blip xmlns:r="http://schemas.openxmlformats.org/officeDocument/2006/relationships" xmlns:a="http://schemas.openxmlformats.org/drawingml/2006/main" r:embed="R93dddf93b21b4237"/>
+          <a:blip xmlns:r="http://schemas.openxmlformats.org/officeDocument/2006/relationships" xmlns:a="http://schemas.openxmlformats.org/drawingml/2006/main" r:embed="Rbc2f0d3b8c304124"/>
           <a:srcRect xmlns:a="http://schemas.openxmlformats.org/drawingml/2006/main" l="17949" t="0" r="17949" b="0"/>
           <a:stretch xmlns:a="http://schemas.openxmlformats.org/drawingml/2006/main">
             <a:fillRect l="0" t="0" r="0" b="0"/>
@@ -1817,7 +2286,7 @@
           <p:cNvPr id="8" name="">
             <a:extLst xmlns:a="http://schemas.openxmlformats.org/drawingml/2006/main">
               <a:ext uri="{FF2B5EF4-FFF2-40B4-BE49-F238E27FC236}">
-                <a16:creationId xmlns:a16="http://schemas.microsoft.com/office/drawing/2014/main" id="{45DE99AD-C441-4317-99DD-20E6F2DFF066}"/>
+                <a16:creationId xmlns:a16="http://schemas.microsoft.com/office/drawing/2014/main" id="{1E6A2650-58AF-4E6A-AED6-F1DFB260B309}"/>
               </a:ext>
             </a:extLst>
           </p:cNvPr>
@@ -1865,7 +2334,3030 @@
     </p:spTree>
     <p:extLst>
       <p:ext uri="{BB962C8B-B14F-4D97-AF65-F5344CB8AC3E}">
-        <p14:creationId xmlns:p14="http://schemas.microsoft.com/office/powerpoint/2010/main" val="250453353"/>
+        <p14:creationId xmlns:p14="http://schemas.microsoft.com/office/powerpoint/2010/main" val="1360370696"/>
+      </p:ext>
+    </p:extLst>
+  </p:cSld>
+</p:sld>
+</file>
+
+<file path=ppt/slides/slide10.xml><?xml version="1.0" encoding="utf-8"?>
+<p:sld xmlns:p="http://schemas.openxmlformats.org/presentationml/2006/main">
+  <p:cSld>
+    <p:bg>
+      <p:bgPr>
+        <a:solidFill xmlns:a="http://schemas.openxmlformats.org/drawingml/2006/main">
+          <a:srgbClr val="FFFCF8"/>
+        </a:solidFill>
+      </p:bgPr>
+    </p:bg>
+    <p:spTree>
+      <p:nvGrpSpPr>
+        <p:cNvPr id="1" name=""/>
+        <p:cNvGrpSpPr/>
+        <p:nvPr/>
+      </p:nvGrpSpPr>
+      <p:grpSpPr>
+        <a:xfrm xmlns:a="http://schemas.openxmlformats.org/drawingml/2006/main"/>
+      </p:grpSpPr>
+      <p:sp>
+        <p:nvSpPr>
+          <p:cNvPr id="16" name="">
+            <a:extLst xmlns:a="http://schemas.openxmlformats.org/drawingml/2006/main">
+              <a:ext uri="{FF2B5EF4-FFF2-40B4-BE49-F238E27FC236}">
+                <a16:creationId xmlns:a16="http://schemas.microsoft.com/office/drawing/2014/main" id="{5EC47661-5CE7-44EC-B3BC-968925BCA641}"/>
+              </a:ext>
+            </a:extLst>
+          </p:cNvPr>
+          <p:cNvSpPr>
+            <a:spLocks xmlns:a="http://schemas.openxmlformats.org/drawingml/2006/main" noGrp="1"/>
+          </p:cNvSpPr>
+          <p:nvPr/>
+        </p:nvSpPr>
+        <p:spPr>
+          <a:xfrm xmlns:a="http://schemas.openxmlformats.org/drawingml/2006/main">
+            <a:off x="0" y="0"/>
+            <a:ext cx="171450" cy="6858000"/>
+          </a:xfrm>
+          <a:prstGeom xmlns:a="http://schemas.openxmlformats.org/drawingml/2006/main" prst="rect">
+            <a:avLst/>
+          </a:prstGeom>
+          <a:solidFill xmlns:a="http://schemas.openxmlformats.org/drawingml/2006/main">
+            <a:srgbClr val="6657E8"/>
+          </a:solidFill>
+          <a:ln xmlns:a="http://schemas.openxmlformats.org/drawingml/2006/main" w="0">
+            <a:noFill/>
+            <a:prstDash val="solid"/>
+          </a:ln>
+        </p:spPr>
+      </p:sp>
+      <p:sp>
+        <p:nvSpPr>
+          <p:cNvPr id="2" name="">
+            <a:extLst xmlns:a="http://schemas.openxmlformats.org/drawingml/2006/main">
+              <a:ext uri="{FF2B5EF4-FFF2-40B4-BE49-F238E27FC236}">
+                <a16:creationId xmlns:a16="http://schemas.microsoft.com/office/drawing/2014/main" id="{9BAD6BD6-B861-488E-81A0-CE9AB2186BD1}"/>
+              </a:ext>
+            </a:extLst>
+          </p:cNvPr>
+          <p:cNvSpPr>
+            <a:spLocks xmlns:a="http://schemas.openxmlformats.org/drawingml/2006/main" noGrp="1"/>
+          </p:cNvSpPr>
+          <p:nvPr/>
+        </p:nvSpPr>
+        <p:spPr>
+          <a:xfrm xmlns:a="http://schemas.openxmlformats.org/drawingml/2006/main">
+            <a:off x="647700" y="457200"/>
+            <a:ext cx="10096500" cy="552450"/>
+          </a:xfrm>
+          <a:prstGeom xmlns:a="http://schemas.openxmlformats.org/drawingml/2006/main" prst="rect">
+            <a:avLst/>
+          </a:prstGeom>
+          <a:noFill xmlns:a="http://schemas.openxmlformats.org/drawingml/2006/main"/>
+          <a:ln xmlns:a="http://schemas.openxmlformats.org/drawingml/2006/main" w="0">
+            <a:noFill/>
+            <a:prstDash val="solid"/>
+          </a:ln>
+        </p:spPr>
+        <p:txBody>
+          <a:bodyPr xmlns:a="http://schemas.openxmlformats.org/drawingml/2006/main"/>
+          <a:lstStyle xmlns:a="http://schemas.openxmlformats.org/drawingml/2006/main"/>
+          <a:p xmlns:a="http://schemas.openxmlformats.org/drawingml/2006/main">
+            <a:pPr>
+              <a:defRPr sz="2700" b="1">
+                <a:solidFill>
+                  <a:srgbClr val="182235"/>
+                </a:solidFill>
+              </a:defRPr>
+            </a:pPr>
+            <a:r>
+              <a:rPr sz="2700" b="1">
+                <a:solidFill>
+                  <a:srgbClr val="182235"/>
+                </a:solidFill>
+              </a:rPr>
+              <a:t>준비가 끝나면 실습이 훨씬 편해집니다</a:t>
+            </a:r>
+          </a:p>
+        </p:txBody>
+      </p:sp>
+      <p:sp>
+        <p:nvSpPr>
+          <p:cNvPr id="3" name="">
+            <a:extLst xmlns:a="http://schemas.openxmlformats.org/drawingml/2006/main">
+              <a:ext uri="{FF2B5EF4-FFF2-40B4-BE49-F238E27FC236}">
+                <a16:creationId xmlns:a16="http://schemas.microsoft.com/office/drawing/2014/main" id="{89EE979B-AEE4-4A5E-9854-9A5CB19EEFCB}"/>
+              </a:ext>
+            </a:extLst>
+          </p:cNvPr>
+          <p:cNvSpPr>
+            <a:spLocks xmlns:a="http://schemas.openxmlformats.org/drawingml/2006/main" noGrp="1"/>
+          </p:cNvSpPr>
+          <p:nvPr/>
+        </p:nvSpPr>
+        <p:spPr>
+          <a:xfrm xmlns:a="http://schemas.openxmlformats.org/drawingml/2006/main">
+            <a:off x="666750" y="6419850"/>
+            <a:ext cx="10096500" cy="209550"/>
+          </a:xfrm>
+          <a:prstGeom xmlns:a="http://schemas.openxmlformats.org/drawingml/2006/main" prst="rect">
+            <a:avLst/>
+          </a:prstGeom>
+          <a:noFill xmlns:a="http://schemas.openxmlformats.org/drawingml/2006/main"/>
+          <a:ln xmlns:a="http://schemas.openxmlformats.org/drawingml/2006/main" w="0">
+            <a:noFill/>
+            <a:prstDash val="solid"/>
+          </a:ln>
+        </p:spPr>
+        <p:txBody>
+          <a:bodyPr xmlns:a="http://schemas.openxmlformats.org/drawingml/2006/main"/>
+          <a:lstStyle xmlns:a="http://schemas.openxmlformats.org/drawingml/2006/main"/>
+          <a:p xmlns:a="http://schemas.openxmlformats.org/drawingml/2006/main">
+            <a:pPr>
+              <a:defRPr sz="975">
+                <a:solidFill>
+                  <a:srgbClr val="657083"/>
+                </a:solidFill>
+              </a:defRPr>
+            </a:pPr>
+            <a:r>
+              <a:rPr sz="975">
+                <a:solidFill>
+                  <a:srgbClr val="657083"/>
+                </a:solidFill>
+              </a:rPr>
+              <a:t>EDU 웹개발 교육 플랫폼  ·  10</a:t>
+            </a:r>
+          </a:p>
+        </p:txBody>
+      </p:sp>
+      <p:sp>
+        <p:nvSpPr>
+          <p:cNvPr id="4" name="">
+            <a:extLst xmlns:a="http://schemas.openxmlformats.org/drawingml/2006/main">
+              <a:ext uri="{FF2B5EF4-FFF2-40B4-BE49-F238E27FC236}">
+                <a16:creationId xmlns:a16="http://schemas.microsoft.com/office/drawing/2014/main" id="{3731EEED-2711-4020-A12C-6F2C9D46F95A}"/>
+              </a:ext>
+            </a:extLst>
+          </p:cNvPr>
+          <p:cNvSpPr>
+            <a:spLocks xmlns:a="http://schemas.openxmlformats.org/drawingml/2006/main" noGrp="1"/>
+          </p:cNvSpPr>
+          <p:nvPr/>
+        </p:nvSpPr>
+        <p:spPr>
+          <a:xfrm xmlns:a="http://schemas.openxmlformats.org/drawingml/2006/main">
+            <a:off x="742950" y="1428750"/>
+            <a:ext cx="514350" cy="514350"/>
+          </a:xfrm>
+          <a:prstGeom xmlns:a="http://schemas.openxmlformats.org/drawingml/2006/main" prst="roundRect">
+            <a:avLst>
+              <a:gd name="adj" fmla="val 22222"/>
+            </a:avLst>
+          </a:prstGeom>
+          <a:solidFill xmlns:a="http://schemas.openxmlformats.org/drawingml/2006/main">
+            <a:srgbClr val="EEEAFE"/>
+          </a:solidFill>
+          <a:ln xmlns:a="http://schemas.openxmlformats.org/drawingml/2006/main" w="0">
+            <a:noFill/>
+            <a:prstDash val="solid"/>
+          </a:ln>
+        </p:spPr>
+      </p:sp>
+      <p:sp>
+        <p:nvSpPr>
+          <p:cNvPr id="5" name="">
+            <a:extLst xmlns:a="http://schemas.openxmlformats.org/drawingml/2006/main">
+              <a:ext uri="{FF2B5EF4-FFF2-40B4-BE49-F238E27FC236}">
+                <a16:creationId xmlns:a16="http://schemas.microsoft.com/office/drawing/2014/main" id="{A10ED8F0-05E8-4F30-8D5B-4BD01825EB1E}"/>
+              </a:ext>
+            </a:extLst>
+          </p:cNvPr>
+          <p:cNvSpPr>
+            <a:spLocks xmlns:a="http://schemas.openxmlformats.org/drawingml/2006/main" noGrp="1"/>
+          </p:cNvSpPr>
+          <p:nvPr/>
+        </p:nvSpPr>
+        <p:spPr>
+          <a:xfrm xmlns:a="http://schemas.openxmlformats.org/drawingml/2006/main">
+            <a:off x="742950" y="1524000"/>
+            <a:ext cx="514350" cy="304800"/>
+          </a:xfrm>
+          <a:prstGeom xmlns:a="http://schemas.openxmlformats.org/drawingml/2006/main" prst="rect">
+            <a:avLst/>
+          </a:prstGeom>
+          <a:noFill xmlns:a="http://schemas.openxmlformats.org/drawingml/2006/main"/>
+          <a:ln xmlns:a="http://schemas.openxmlformats.org/drawingml/2006/main" w="0">
+            <a:noFill/>
+            <a:prstDash val="solid"/>
+          </a:ln>
+        </p:spPr>
+        <p:txBody>
+          <a:bodyPr xmlns:a="http://schemas.openxmlformats.org/drawingml/2006/main"/>
+          <a:lstStyle xmlns:a="http://schemas.openxmlformats.org/drawingml/2006/main"/>
+          <a:p xmlns:a="http://schemas.openxmlformats.org/drawingml/2006/main">
+            <a:pPr algn="ctr">
+              <a:defRPr sz="1500" b="1">
+                <a:solidFill>
+                  <a:srgbClr val="57C7A5"/>
+                </a:solidFill>
+              </a:defRPr>
+            </a:pPr>
+            <a:r>
+              <a:rPr sz="1500" b="1">
+                <a:solidFill>
+                  <a:srgbClr val="57C7A5"/>
+                </a:solidFill>
+              </a:rPr>
+              <a:t>1</a:t>
+            </a:r>
+          </a:p>
+        </p:txBody>
+      </p:sp>
+      <p:sp>
+        <p:nvSpPr>
+          <p:cNvPr id="6" name="">
+            <a:extLst xmlns:a="http://schemas.openxmlformats.org/drawingml/2006/main">
+              <a:ext uri="{FF2B5EF4-FFF2-40B4-BE49-F238E27FC236}">
+                <a16:creationId xmlns:a16="http://schemas.microsoft.com/office/drawing/2014/main" id="{CFD8FE7E-6993-46C9-ACDB-6A814235B68E}"/>
+              </a:ext>
+            </a:extLst>
+          </p:cNvPr>
+          <p:cNvSpPr>
+            <a:spLocks xmlns:a="http://schemas.openxmlformats.org/drawingml/2006/main" noGrp="1"/>
+          </p:cNvSpPr>
+          <p:nvPr/>
+        </p:nvSpPr>
+        <p:spPr>
+          <a:xfrm xmlns:a="http://schemas.openxmlformats.org/drawingml/2006/main">
+            <a:off x="1485900" y="1466850"/>
+            <a:ext cx="9239250" cy="619125"/>
+          </a:xfrm>
+          <a:prstGeom xmlns:a="http://schemas.openxmlformats.org/drawingml/2006/main" prst="rect">
+            <a:avLst/>
+          </a:prstGeom>
+          <a:noFill xmlns:a="http://schemas.openxmlformats.org/drawingml/2006/main"/>
+          <a:ln xmlns:a="http://schemas.openxmlformats.org/drawingml/2006/main" w="0">
+            <a:noFill/>
+            <a:prstDash val="solid"/>
+          </a:ln>
+        </p:spPr>
+        <p:txBody>
+          <a:bodyPr xmlns:a="http://schemas.openxmlformats.org/drawingml/2006/main"/>
+          <a:lstStyle xmlns:a="http://schemas.openxmlformats.org/drawingml/2006/main"/>
+          <a:p xmlns:a="http://schemas.openxmlformats.org/drawingml/2006/main">
+            <a:pPr>
+              <a:defRPr sz="1800">
+                <a:solidFill>
+                  <a:srgbClr val="182235"/>
+                </a:solidFill>
+              </a:defRPr>
+            </a:pPr>
+            <a:r>
+              <a:rPr sz="1800">
+                <a:solidFill>
+                  <a:srgbClr val="182235"/>
+                </a:solidFill>
+              </a:rPr>
+              <a:t>Node.js 22 LTS</a:t>
+            </a:r>
+          </a:p>
+        </p:txBody>
+      </p:sp>
+      <p:sp>
+        <p:nvSpPr>
+          <p:cNvPr id="7" name="">
+            <a:extLst xmlns:a="http://schemas.openxmlformats.org/drawingml/2006/main">
+              <a:ext uri="{FF2B5EF4-FFF2-40B4-BE49-F238E27FC236}">
+                <a16:creationId xmlns:a16="http://schemas.microsoft.com/office/drawing/2014/main" id="{84591358-D41E-4D52-9DD5-D6EA73520EFF}"/>
+              </a:ext>
+            </a:extLst>
+          </p:cNvPr>
+          <p:cNvSpPr>
+            <a:spLocks xmlns:a="http://schemas.openxmlformats.org/drawingml/2006/main" noGrp="1"/>
+          </p:cNvSpPr>
+          <p:nvPr/>
+        </p:nvSpPr>
+        <p:spPr>
+          <a:xfrm xmlns:a="http://schemas.openxmlformats.org/drawingml/2006/main">
+            <a:off x="742950" y="2400300"/>
+            <a:ext cx="514350" cy="514350"/>
+          </a:xfrm>
+          <a:prstGeom xmlns:a="http://schemas.openxmlformats.org/drawingml/2006/main" prst="roundRect">
+            <a:avLst>
+              <a:gd name="adj" fmla="val 22222"/>
+            </a:avLst>
+          </a:prstGeom>
+          <a:solidFill xmlns:a="http://schemas.openxmlformats.org/drawingml/2006/main">
+            <a:srgbClr val="EAF8F3"/>
+          </a:solidFill>
+          <a:ln xmlns:a="http://schemas.openxmlformats.org/drawingml/2006/main" w="0">
+            <a:noFill/>
+            <a:prstDash val="solid"/>
+          </a:ln>
+        </p:spPr>
+      </p:sp>
+      <p:sp>
+        <p:nvSpPr>
+          <p:cNvPr id="8" name="">
+            <a:extLst xmlns:a="http://schemas.openxmlformats.org/drawingml/2006/main">
+              <a:ext uri="{FF2B5EF4-FFF2-40B4-BE49-F238E27FC236}">
+                <a16:creationId xmlns:a16="http://schemas.microsoft.com/office/drawing/2014/main" id="{FCC119BF-DA81-4318-A10B-A5380EC4C973}"/>
+              </a:ext>
+            </a:extLst>
+          </p:cNvPr>
+          <p:cNvSpPr>
+            <a:spLocks xmlns:a="http://schemas.openxmlformats.org/drawingml/2006/main" noGrp="1"/>
+          </p:cNvSpPr>
+          <p:nvPr/>
+        </p:nvSpPr>
+        <p:spPr>
+          <a:xfrm xmlns:a="http://schemas.openxmlformats.org/drawingml/2006/main">
+            <a:off x="742950" y="2495550"/>
+            <a:ext cx="514350" cy="304800"/>
+          </a:xfrm>
+          <a:prstGeom xmlns:a="http://schemas.openxmlformats.org/drawingml/2006/main" prst="rect">
+            <a:avLst/>
+          </a:prstGeom>
+          <a:noFill xmlns:a="http://schemas.openxmlformats.org/drawingml/2006/main"/>
+          <a:ln xmlns:a="http://schemas.openxmlformats.org/drawingml/2006/main" w="0">
+            <a:noFill/>
+            <a:prstDash val="solid"/>
+          </a:ln>
+        </p:spPr>
+        <p:txBody>
+          <a:bodyPr xmlns:a="http://schemas.openxmlformats.org/drawingml/2006/main"/>
+          <a:lstStyle xmlns:a="http://schemas.openxmlformats.org/drawingml/2006/main"/>
+          <a:p xmlns:a="http://schemas.openxmlformats.org/drawingml/2006/main">
+            <a:pPr algn="ctr">
+              <a:defRPr sz="1500" b="1">
+                <a:solidFill>
+                  <a:srgbClr val="57C7A5"/>
+                </a:solidFill>
+              </a:defRPr>
+            </a:pPr>
+            <a:r>
+              <a:rPr sz="1500" b="1">
+                <a:solidFill>
+                  <a:srgbClr val="57C7A5"/>
+                </a:solidFill>
+              </a:rPr>
+              <a:t>2</a:t>
+            </a:r>
+          </a:p>
+        </p:txBody>
+      </p:sp>
+      <p:sp>
+        <p:nvSpPr>
+          <p:cNvPr id="9" name="">
+            <a:extLst xmlns:a="http://schemas.openxmlformats.org/drawingml/2006/main">
+              <a:ext uri="{FF2B5EF4-FFF2-40B4-BE49-F238E27FC236}">
+                <a16:creationId xmlns:a16="http://schemas.microsoft.com/office/drawing/2014/main" id="{DD251D62-E949-465E-9267-29922E7AA142}"/>
+              </a:ext>
+            </a:extLst>
+          </p:cNvPr>
+          <p:cNvSpPr>
+            <a:spLocks xmlns:a="http://schemas.openxmlformats.org/drawingml/2006/main" noGrp="1"/>
+          </p:cNvSpPr>
+          <p:nvPr/>
+        </p:nvSpPr>
+        <p:spPr>
+          <a:xfrm xmlns:a="http://schemas.openxmlformats.org/drawingml/2006/main">
+            <a:off x="1485900" y="2438400"/>
+            <a:ext cx="9239250" cy="619125"/>
+          </a:xfrm>
+          <a:prstGeom xmlns:a="http://schemas.openxmlformats.org/drawingml/2006/main" prst="rect">
+            <a:avLst/>
+          </a:prstGeom>
+          <a:noFill xmlns:a="http://schemas.openxmlformats.org/drawingml/2006/main"/>
+          <a:ln xmlns:a="http://schemas.openxmlformats.org/drawingml/2006/main" w="0">
+            <a:noFill/>
+            <a:prstDash val="solid"/>
+          </a:ln>
+        </p:spPr>
+        <p:txBody>
+          <a:bodyPr xmlns:a="http://schemas.openxmlformats.org/drawingml/2006/main"/>
+          <a:lstStyle xmlns:a="http://schemas.openxmlformats.org/drawingml/2006/main"/>
+          <a:p xmlns:a="http://schemas.openxmlformats.org/drawingml/2006/main">
+            <a:pPr>
+              <a:defRPr sz="1800">
+                <a:solidFill>
+                  <a:srgbClr val="182235"/>
+                </a:solidFill>
+              </a:defRPr>
+            </a:pPr>
+            <a:r>
+              <a:rPr sz="1800">
+                <a:solidFill>
+                  <a:srgbClr val="182235"/>
+                </a:solidFill>
+              </a:rPr>
+              <a:t>npm 프로젝트</a:t>
+            </a:r>
+          </a:p>
+        </p:txBody>
+      </p:sp>
+      <p:sp>
+        <p:nvSpPr>
+          <p:cNvPr id="10" name="">
+            <a:extLst xmlns:a="http://schemas.openxmlformats.org/drawingml/2006/main">
+              <a:ext uri="{FF2B5EF4-FFF2-40B4-BE49-F238E27FC236}">
+                <a16:creationId xmlns:a16="http://schemas.microsoft.com/office/drawing/2014/main" id="{6A04830E-7227-4A78-B869-8CA6CCF20149}"/>
+              </a:ext>
+            </a:extLst>
+          </p:cNvPr>
+          <p:cNvSpPr>
+            <a:spLocks xmlns:a="http://schemas.openxmlformats.org/drawingml/2006/main" noGrp="1"/>
+          </p:cNvSpPr>
+          <p:nvPr/>
+        </p:nvSpPr>
+        <p:spPr>
+          <a:xfrm xmlns:a="http://schemas.openxmlformats.org/drawingml/2006/main">
+            <a:off x="742950" y="3371850"/>
+            <a:ext cx="514350" cy="514350"/>
+          </a:xfrm>
+          <a:prstGeom xmlns:a="http://schemas.openxmlformats.org/drawingml/2006/main" prst="roundRect">
+            <a:avLst>
+              <a:gd name="adj" fmla="val 22222"/>
+            </a:avLst>
+          </a:prstGeom>
+          <a:solidFill xmlns:a="http://schemas.openxmlformats.org/drawingml/2006/main">
+            <a:srgbClr val="EEEAFE"/>
+          </a:solidFill>
+          <a:ln xmlns:a="http://schemas.openxmlformats.org/drawingml/2006/main" w="0">
+            <a:noFill/>
+            <a:prstDash val="solid"/>
+          </a:ln>
+        </p:spPr>
+      </p:sp>
+      <p:sp>
+        <p:nvSpPr>
+          <p:cNvPr id="11" name="">
+            <a:extLst xmlns:a="http://schemas.openxmlformats.org/drawingml/2006/main">
+              <a:ext uri="{FF2B5EF4-FFF2-40B4-BE49-F238E27FC236}">
+                <a16:creationId xmlns:a16="http://schemas.microsoft.com/office/drawing/2014/main" id="{12D98088-34D0-4736-8BE2-552E7A6AF1B0}"/>
+              </a:ext>
+            </a:extLst>
+          </p:cNvPr>
+          <p:cNvSpPr>
+            <a:spLocks xmlns:a="http://schemas.openxmlformats.org/drawingml/2006/main" noGrp="1"/>
+          </p:cNvSpPr>
+          <p:nvPr/>
+        </p:nvSpPr>
+        <p:spPr>
+          <a:xfrm xmlns:a="http://schemas.openxmlformats.org/drawingml/2006/main">
+            <a:off x="742950" y="3467100"/>
+            <a:ext cx="514350" cy="304800"/>
+          </a:xfrm>
+          <a:prstGeom xmlns:a="http://schemas.openxmlformats.org/drawingml/2006/main" prst="rect">
+            <a:avLst/>
+          </a:prstGeom>
+          <a:noFill xmlns:a="http://schemas.openxmlformats.org/drawingml/2006/main"/>
+          <a:ln xmlns:a="http://schemas.openxmlformats.org/drawingml/2006/main" w="0">
+            <a:noFill/>
+            <a:prstDash val="solid"/>
+          </a:ln>
+        </p:spPr>
+        <p:txBody>
+          <a:bodyPr xmlns:a="http://schemas.openxmlformats.org/drawingml/2006/main"/>
+          <a:lstStyle xmlns:a="http://schemas.openxmlformats.org/drawingml/2006/main"/>
+          <a:p xmlns:a="http://schemas.openxmlformats.org/drawingml/2006/main">
+            <a:pPr algn="ctr">
+              <a:defRPr sz="1500" b="1">
+                <a:solidFill>
+                  <a:srgbClr val="57C7A5"/>
+                </a:solidFill>
+              </a:defRPr>
+            </a:pPr>
+            <a:r>
+              <a:rPr sz="1500" b="1">
+                <a:solidFill>
+                  <a:srgbClr val="57C7A5"/>
+                </a:solidFill>
+              </a:rPr>
+              <a:t>3</a:t>
+            </a:r>
+          </a:p>
+        </p:txBody>
+      </p:sp>
+      <p:sp>
+        <p:nvSpPr>
+          <p:cNvPr id="12" name="">
+            <a:extLst xmlns:a="http://schemas.openxmlformats.org/drawingml/2006/main">
+              <a:ext uri="{FF2B5EF4-FFF2-40B4-BE49-F238E27FC236}">
+                <a16:creationId xmlns:a16="http://schemas.microsoft.com/office/drawing/2014/main" id="{970A4611-B9DC-4D60-8C71-205F0EDB09C1}"/>
+              </a:ext>
+            </a:extLst>
+          </p:cNvPr>
+          <p:cNvSpPr>
+            <a:spLocks xmlns:a="http://schemas.openxmlformats.org/drawingml/2006/main" noGrp="1"/>
+          </p:cNvSpPr>
+          <p:nvPr/>
+        </p:nvSpPr>
+        <p:spPr>
+          <a:xfrm xmlns:a="http://schemas.openxmlformats.org/drawingml/2006/main">
+            <a:off x="1485900" y="3409950"/>
+            <a:ext cx="9239250" cy="619125"/>
+          </a:xfrm>
+          <a:prstGeom xmlns:a="http://schemas.openxmlformats.org/drawingml/2006/main" prst="rect">
+            <a:avLst/>
+          </a:prstGeom>
+          <a:noFill xmlns:a="http://schemas.openxmlformats.org/drawingml/2006/main"/>
+          <a:ln xmlns:a="http://schemas.openxmlformats.org/drawingml/2006/main" w="0">
+            <a:noFill/>
+            <a:prstDash val="solid"/>
+          </a:ln>
+        </p:spPr>
+        <p:txBody>
+          <a:bodyPr xmlns:a="http://schemas.openxmlformats.org/drawingml/2006/main"/>
+          <a:lstStyle xmlns:a="http://schemas.openxmlformats.org/drawingml/2006/main"/>
+          <a:p xmlns:a="http://schemas.openxmlformats.org/drawingml/2006/main">
+            <a:pPr>
+              <a:defRPr sz="1800">
+                <a:solidFill>
+                  <a:srgbClr val="182235"/>
+                </a:solidFill>
+              </a:defRPr>
+            </a:pPr>
+            <a:r>
+              <a:rPr sz="1800">
+                <a:solidFill>
+                  <a:srgbClr val="182235"/>
+                </a:solidFill>
+              </a:rPr>
+              <a:t>Express 설치 환경</a:t>
+            </a:r>
+          </a:p>
+        </p:txBody>
+      </p:sp>
+      <p:sp>
+        <p:nvSpPr>
+          <p:cNvPr id="13" name="">
+            <a:extLst xmlns:a="http://schemas.openxmlformats.org/drawingml/2006/main">
+              <a:ext uri="{FF2B5EF4-FFF2-40B4-BE49-F238E27FC236}">
+                <a16:creationId xmlns:a16="http://schemas.microsoft.com/office/drawing/2014/main" id="{1D5482BF-B42A-47BA-A0E6-F9EF0E98E724}"/>
+              </a:ext>
+            </a:extLst>
+          </p:cNvPr>
+          <p:cNvSpPr>
+            <a:spLocks xmlns:a="http://schemas.openxmlformats.org/drawingml/2006/main" noGrp="1"/>
+          </p:cNvSpPr>
+          <p:nvPr/>
+        </p:nvSpPr>
+        <p:spPr>
+          <a:xfrm xmlns:a="http://schemas.openxmlformats.org/drawingml/2006/main">
+            <a:off x="742950" y="4343400"/>
+            <a:ext cx="514350" cy="514350"/>
+          </a:xfrm>
+          <a:prstGeom xmlns:a="http://schemas.openxmlformats.org/drawingml/2006/main" prst="roundRect">
+            <a:avLst>
+              <a:gd name="adj" fmla="val 22222"/>
+            </a:avLst>
+          </a:prstGeom>
+          <a:solidFill xmlns:a="http://schemas.openxmlformats.org/drawingml/2006/main">
+            <a:srgbClr val="EAF8F3"/>
+          </a:solidFill>
+          <a:ln xmlns:a="http://schemas.openxmlformats.org/drawingml/2006/main" w="0">
+            <a:noFill/>
+            <a:prstDash val="solid"/>
+          </a:ln>
+        </p:spPr>
+      </p:sp>
+      <p:sp>
+        <p:nvSpPr>
+          <p:cNvPr id="14" name="">
+            <a:extLst xmlns:a="http://schemas.openxmlformats.org/drawingml/2006/main">
+              <a:ext uri="{FF2B5EF4-FFF2-40B4-BE49-F238E27FC236}">
+                <a16:creationId xmlns:a16="http://schemas.microsoft.com/office/drawing/2014/main" id="{86D37EF2-4574-4809-8F14-5BADD9E9D55A}"/>
+              </a:ext>
+            </a:extLst>
+          </p:cNvPr>
+          <p:cNvSpPr>
+            <a:spLocks xmlns:a="http://schemas.openxmlformats.org/drawingml/2006/main" noGrp="1"/>
+          </p:cNvSpPr>
+          <p:nvPr/>
+        </p:nvSpPr>
+        <p:spPr>
+          <a:xfrm xmlns:a="http://schemas.openxmlformats.org/drawingml/2006/main">
+            <a:off x="742950" y="4438650"/>
+            <a:ext cx="514350" cy="304800"/>
+          </a:xfrm>
+          <a:prstGeom xmlns:a="http://schemas.openxmlformats.org/drawingml/2006/main" prst="rect">
+            <a:avLst/>
+          </a:prstGeom>
+          <a:noFill xmlns:a="http://schemas.openxmlformats.org/drawingml/2006/main"/>
+          <a:ln xmlns:a="http://schemas.openxmlformats.org/drawingml/2006/main" w="0">
+            <a:noFill/>
+            <a:prstDash val="solid"/>
+          </a:ln>
+        </p:spPr>
+        <p:txBody>
+          <a:bodyPr xmlns:a="http://schemas.openxmlformats.org/drawingml/2006/main"/>
+          <a:lstStyle xmlns:a="http://schemas.openxmlformats.org/drawingml/2006/main"/>
+          <a:p xmlns:a="http://schemas.openxmlformats.org/drawingml/2006/main">
+            <a:pPr algn="ctr">
+              <a:defRPr sz="1500" b="1">
+                <a:solidFill>
+                  <a:srgbClr val="57C7A5"/>
+                </a:solidFill>
+              </a:defRPr>
+            </a:pPr>
+            <a:r>
+              <a:rPr sz="1500" b="1">
+                <a:solidFill>
+                  <a:srgbClr val="57C7A5"/>
+                </a:solidFill>
+              </a:rPr>
+              <a:t>4</a:t>
+            </a:r>
+          </a:p>
+        </p:txBody>
+      </p:sp>
+      <p:sp>
+        <p:nvSpPr>
+          <p:cNvPr id="15" name="">
+            <a:extLst xmlns:a="http://schemas.openxmlformats.org/drawingml/2006/main">
+              <a:ext uri="{FF2B5EF4-FFF2-40B4-BE49-F238E27FC236}">
+                <a16:creationId xmlns:a16="http://schemas.microsoft.com/office/drawing/2014/main" id="{52262216-CDAD-41E3-9806-D04A3D4F99A6}"/>
+              </a:ext>
+            </a:extLst>
+          </p:cNvPr>
+          <p:cNvSpPr>
+            <a:spLocks xmlns:a="http://schemas.openxmlformats.org/drawingml/2006/main" noGrp="1"/>
+          </p:cNvSpPr>
+          <p:nvPr/>
+        </p:nvSpPr>
+        <p:spPr>
+          <a:xfrm xmlns:a="http://schemas.openxmlformats.org/drawingml/2006/main">
+            <a:off x="1485900" y="4381500"/>
+            <a:ext cx="9239250" cy="619125"/>
+          </a:xfrm>
+          <a:prstGeom xmlns:a="http://schemas.openxmlformats.org/drawingml/2006/main" prst="rect">
+            <a:avLst/>
+          </a:prstGeom>
+          <a:noFill xmlns:a="http://schemas.openxmlformats.org/drawingml/2006/main"/>
+          <a:ln xmlns:a="http://schemas.openxmlformats.org/drawingml/2006/main" w="0">
+            <a:noFill/>
+            <a:prstDash val="solid"/>
+          </a:ln>
+        </p:spPr>
+        <p:txBody>
+          <a:bodyPr xmlns:a="http://schemas.openxmlformats.org/drawingml/2006/main"/>
+          <a:lstStyle xmlns:a="http://schemas.openxmlformats.org/drawingml/2006/main"/>
+          <a:p xmlns:a="http://schemas.openxmlformats.org/drawingml/2006/main">
+            <a:pPr>
+              <a:defRPr sz="1800">
+                <a:solidFill>
+                  <a:srgbClr val="182235"/>
+                </a:solidFill>
+              </a:defRPr>
+            </a:pPr>
+            <a:r>
+              <a:rPr sz="1800">
+                <a:solidFill>
+                  <a:srgbClr val="182235"/>
+                </a:solidFill>
+              </a:rPr>
+              <a:t>Chrome 브라우저</a:t>
+            </a:r>
+          </a:p>
+        </p:txBody>
+      </p:sp>
+    </p:spTree>
+    <p:extLst>
+      <p:ext uri="{BB962C8B-B14F-4D97-AF65-F5344CB8AC3E}">
+        <p14:creationId xmlns:p14="http://schemas.microsoft.com/office/powerpoint/2010/main" val="924612749"/>
+      </p:ext>
+    </p:extLst>
+  </p:cSld>
+</p:sld>
+</file>
+
+<file path=ppt/slides/slide11.xml><?xml version="1.0" encoding="utf-8"?>
+<p:sld xmlns:p="http://schemas.openxmlformats.org/presentationml/2006/main">
+  <p:cSld>
+    <p:bg>
+      <p:bgPr>
+        <a:solidFill xmlns:a="http://schemas.openxmlformats.org/drawingml/2006/main">
+          <a:srgbClr val="FFFCF8"/>
+        </a:solidFill>
+      </p:bgPr>
+    </p:bg>
+    <p:spTree>
+      <p:nvGrpSpPr>
+        <p:cNvPr id="1" name=""/>
+        <p:cNvGrpSpPr/>
+        <p:nvPr/>
+      </p:nvGrpSpPr>
+      <p:grpSpPr>
+        <a:xfrm xmlns:a="http://schemas.openxmlformats.org/drawingml/2006/main"/>
+      </p:grpSpPr>
+      <p:sp>
+        <p:nvSpPr>
+          <p:cNvPr id="10" name="">
+            <a:extLst xmlns:a="http://schemas.openxmlformats.org/drawingml/2006/main">
+              <a:ext uri="{FF2B5EF4-FFF2-40B4-BE49-F238E27FC236}">
+                <a16:creationId xmlns:a16="http://schemas.microsoft.com/office/drawing/2014/main" id="{35426D49-9EC9-432C-9261-8A377A6ED72B}"/>
+              </a:ext>
+            </a:extLst>
+          </p:cNvPr>
+          <p:cNvSpPr>
+            <a:spLocks xmlns:a="http://schemas.openxmlformats.org/drawingml/2006/main" noGrp="1"/>
+          </p:cNvSpPr>
+          <p:nvPr/>
+        </p:nvSpPr>
+        <p:spPr>
+          <a:xfrm xmlns:a="http://schemas.openxmlformats.org/drawingml/2006/main">
+            <a:off x="0" y="0"/>
+            <a:ext cx="171450" cy="6858000"/>
+          </a:xfrm>
+          <a:prstGeom xmlns:a="http://schemas.openxmlformats.org/drawingml/2006/main" prst="rect">
+            <a:avLst/>
+          </a:prstGeom>
+          <a:solidFill xmlns:a="http://schemas.openxmlformats.org/drawingml/2006/main">
+            <a:srgbClr val="6657E8"/>
+          </a:solidFill>
+          <a:ln xmlns:a="http://schemas.openxmlformats.org/drawingml/2006/main" w="0">
+            <a:noFill/>
+            <a:prstDash val="solid"/>
+          </a:ln>
+        </p:spPr>
+      </p:sp>
+      <p:sp>
+        <p:nvSpPr>
+          <p:cNvPr id="2" name="">
+            <a:extLst xmlns:a="http://schemas.openxmlformats.org/drawingml/2006/main">
+              <a:ext uri="{FF2B5EF4-FFF2-40B4-BE49-F238E27FC236}">
+                <a16:creationId xmlns:a16="http://schemas.microsoft.com/office/drawing/2014/main" id="{F63FE41E-BFA6-4509-8EE1-D97678AE8728}"/>
+              </a:ext>
+            </a:extLst>
+          </p:cNvPr>
+          <p:cNvSpPr>
+            <a:spLocks xmlns:a="http://schemas.openxmlformats.org/drawingml/2006/main" noGrp="1"/>
+          </p:cNvSpPr>
+          <p:nvPr/>
+        </p:nvSpPr>
+        <p:spPr>
+          <a:xfrm xmlns:a="http://schemas.openxmlformats.org/drawingml/2006/main">
+            <a:off x="647700" y="457200"/>
+            <a:ext cx="10096500" cy="552450"/>
+          </a:xfrm>
+          <a:prstGeom xmlns:a="http://schemas.openxmlformats.org/drawingml/2006/main" prst="rect">
+            <a:avLst/>
+          </a:prstGeom>
+          <a:noFill xmlns:a="http://schemas.openxmlformats.org/drawingml/2006/main"/>
+          <a:ln xmlns:a="http://schemas.openxmlformats.org/drawingml/2006/main" w="0">
+            <a:noFill/>
+            <a:prstDash val="solid"/>
+          </a:ln>
+        </p:spPr>
+        <p:txBody>
+          <a:bodyPr xmlns:a="http://schemas.openxmlformats.org/drawingml/2006/main"/>
+          <a:lstStyle xmlns:a="http://schemas.openxmlformats.org/drawingml/2006/main"/>
+          <a:p xmlns:a="http://schemas.openxmlformats.org/drawingml/2006/main">
+            <a:pPr>
+              <a:defRPr sz="2700" b="1">
+                <a:solidFill>
+                  <a:srgbClr val="182235"/>
+                </a:solidFill>
+              </a:defRPr>
+            </a:pPr>
+            <a:r>
+              <a:rPr sz="2700" b="1">
+                <a:solidFill>
+                  <a:srgbClr val="182235"/>
+                </a:solidFill>
+              </a:rPr>
+              <a:t>코드의 역할을 하나씩 연결해 보세요</a:t>
+            </a:r>
+          </a:p>
+        </p:txBody>
+      </p:sp>
+      <p:sp>
+        <p:nvSpPr>
+          <p:cNvPr id="3" name="">
+            <a:extLst xmlns:a="http://schemas.openxmlformats.org/drawingml/2006/main">
+              <a:ext uri="{FF2B5EF4-FFF2-40B4-BE49-F238E27FC236}">
+                <a16:creationId xmlns:a16="http://schemas.microsoft.com/office/drawing/2014/main" id="{999E5345-2F51-431E-8914-B035803EC366}"/>
+              </a:ext>
+            </a:extLst>
+          </p:cNvPr>
+          <p:cNvSpPr>
+            <a:spLocks xmlns:a="http://schemas.openxmlformats.org/drawingml/2006/main" noGrp="1"/>
+          </p:cNvSpPr>
+          <p:nvPr/>
+        </p:nvSpPr>
+        <p:spPr>
+          <a:xfrm xmlns:a="http://schemas.openxmlformats.org/drawingml/2006/main">
+            <a:off x="666750" y="6419850"/>
+            <a:ext cx="10096500" cy="209550"/>
+          </a:xfrm>
+          <a:prstGeom xmlns:a="http://schemas.openxmlformats.org/drawingml/2006/main" prst="rect">
+            <a:avLst/>
+          </a:prstGeom>
+          <a:noFill xmlns:a="http://schemas.openxmlformats.org/drawingml/2006/main"/>
+          <a:ln xmlns:a="http://schemas.openxmlformats.org/drawingml/2006/main" w="0">
+            <a:noFill/>
+            <a:prstDash val="solid"/>
+          </a:ln>
+        </p:spPr>
+        <p:txBody>
+          <a:bodyPr xmlns:a="http://schemas.openxmlformats.org/drawingml/2006/main"/>
+          <a:lstStyle xmlns:a="http://schemas.openxmlformats.org/drawingml/2006/main"/>
+          <a:p xmlns:a="http://schemas.openxmlformats.org/drawingml/2006/main">
+            <a:pPr>
+              <a:defRPr sz="975">
+                <a:solidFill>
+                  <a:srgbClr val="657083"/>
+                </a:solidFill>
+              </a:defRPr>
+            </a:pPr>
+            <a:r>
+              <a:rPr sz="975">
+                <a:solidFill>
+                  <a:srgbClr val="657083"/>
+                </a:solidFill>
+              </a:rPr>
+              <a:t>EDU 웹개발 교육 플랫폼  ·  11</a:t>
+            </a:r>
+          </a:p>
+        </p:txBody>
+      </p:sp>
+      <p:sp>
+        <p:nvSpPr>
+          <p:cNvPr id="4" name="">
+            <a:extLst xmlns:a="http://schemas.openxmlformats.org/drawingml/2006/main">
+              <a:ext uri="{FF2B5EF4-FFF2-40B4-BE49-F238E27FC236}">
+                <a16:creationId xmlns:a16="http://schemas.microsoft.com/office/drawing/2014/main" id="{FFF40BBB-B703-487B-8FD7-A5215F3759F3}"/>
+              </a:ext>
+            </a:extLst>
+          </p:cNvPr>
+          <p:cNvSpPr>
+            <a:spLocks xmlns:a="http://schemas.openxmlformats.org/drawingml/2006/main" noGrp="1"/>
+          </p:cNvSpPr>
+          <p:nvPr/>
+        </p:nvSpPr>
+        <p:spPr>
+          <a:xfrm xmlns:a="http://schemas.openxmlformats.org/drawingml/2006/main">
+            <a:off x="857250" y="1428750"/>
+            <a:ext cx="2381250" cy="400050"/>
+          </a:xfrm>
+          <a:prstGeom xmlns:a="http://schemas.openxmlformats.org/drawingml/2006/main" prst="rect">
+            <a:avLst/>
+          </a:prstGeom>
+          <a:noFill xmlns:a="http://schemas.openxmlformats.org/drawingml/2006/main"/>
+          <a:ln xmlns:a="http://schemas.openxmlformats.org/drawingml/2006/main" w="0">
+            <a:noFill/>
+            <a:prstDash val="solid"/>
+          </a:ln>
+        </p:spPr>
+        <p:txBody>
+          <a:bodyPr xmlns:a="http://schemas.openxmlformats.org/drawingml/2006/main"/>
+          <a:lstStyle xmlns:a="http://schemas.openxmlformats.org/drawingml/2006/main"/>
+          <a:p xmlns:a="http://schemas.openxmlformats.org/drawingml/2006/main">
+            <a:pPr>
+              <a:defRPr sz="1725" b="1">
+                <a:solidFill>
+                  <a:srgbClr val="6657E8"/>
+                </a:solidFill>
+              </a:defRPr>
+            </a:pPr>
+            <a:r>
+              <a:rPr sz="1725" b="1">
+                <a:solidFill>
+                  <a:srgbClr val="6657E8"/>
+                </a:solidFill>
+              </a:rPr>
+              <a:t>app.get</a:t>
+            </a:r>
+          </a:p>
+        </p:txBody>
+      </p:sp>
+      <p:sp>
+        <p:nvSpPr>
+          <p:cNvPr id="5" name="">
+            <a:extLst xmlns:a="http://schemas.openxmlformats.org/drawingml/2006/main">
+              <a:ext uri="{FF2B5EF4-FFF2-40B4-BE49-F238E27FC236}">
+                <a16:creationId xmlns:a16="http://schemas.microsoft.com/office/drawing/2014/main" id="{4542AC51-C694-4120-A0DA-EB02124A948A}"/>
+              </a:ext>
+            </a:extLst>
+          </p:cNvPr>
+          <p:cNvSpPr>
+            <a:spLocks xmlns:a="http://schemas.openxmlformats.org/drawingml/2006/main" noGrp="1"/>
+          </p:cNvSpPr>
+          <p:nvPr/>
+        </p:nvSpPr>
+        <p:spPr>
+          <a:xfrm xmlns:a="http://schemas.openxmlformats.org/drawingml/2006/main">
+            <a:off x="3429000" y="1428750"/>
+            <a:ext cx="7429500" cy="666750"/>
+          </a:xfrm>
+          <a:prstGeom xmlns:a="http://schemas.openxmlformats.org/drawingml/2006/main" prst="rect">
+            <a:avLst/>
+          </a:prstGeom>
+          <a:noFill xmlns:a="http://schemas.openxmlformats.org/drawingml/2006/main"/>
+          <a:ln xmlns:a="http://schemas.openxmlformats.org/drawingml/2006/main" w="0">
+            <a:noFill/>
+            <a:prstDash val="solid"/>
+          </a:ln>
+        </p:spPr>
+        <p:txBody>
+          <a:bodyPr xmlns:a="http://schemas.openxmlformats.org/drawingml/2006/main"/>
+          <a:lstStyle xmlns:a="http://schemas.openxmlformats.org/drawingml/2006/main"/>
+          <a:p xmlns:a="http://schemas.openxmlformats.org/drawingml/2006/main">
+            <a:pPr>
+              <a:defRPr sz="1650">
+                <a:solidFill>
+                  <a:srgbClr val="182235"/>
+                </a:solidFill>
+              </a:defRPr>
+            </a:pPr>
+            <a:r>
+              <a:rPr sz="1650">
+                <a:solidFill>
+                  <a:srgbClr val="182235"/>
+                </a:solidFill>
+              </a:rPr>
+              <a:t>GET 요청을 받을 주소를 정합니다.</a:t>
+            </a:r>
+          </a:p>
+        </p:txBody>
+      </p:sp>
+      <p:sp>
+        <p:nvSpPr>
+          <p:cNvPr id="6" name="">
+            <a:extLst xmlns:a="http://schemas.openxmlformats.org/drawingml/2006/main">
+              <a:ext uri="{FF2B5EF4-FFF2-40B4-BE49-F238E27FC236}">
+                <a16:creationId xmlns:a16="http://schemas.microsoft.com/office/drawing/2014/main" id="{122B3D4F-AF0C-4EA1-8618-164DC7B47C64}"/>
+              </a:ext>
+            </a:extLst>
+          </p:cNvPr>
+          <p:cNvSpPr>
+            <a:spLocks xmlns:a="http://schemas.openxmlformats.org/drawingml/2006/main" noGrp="1"/>
+          </p:cNvSpPr>
+          <p:nvPr/>
+        </p:nvSpPr>
+        <p:spPr>
+          <a:xfrm xmlns:a="http://schemas.openxmlformats.org/drawingml/2006/main">
+            <a:off x="857250" y="2524125"/>
+            <a:ext cx="2381250" cy="400050"/>
+          </a:xfrm>
+          <a:prstGeom xmlns:a="http://schemas.openxmlformats.org/drawingml/2006/main" prst="rect">
+            <a:avLst/>
+          </a:prstGeom>
+          <a:noFill xmlns:a="http://schemas.openxmlformats.org/drawingml/2006/main"/>
+          <a:ln xmlns:a="http://schemas.openxmlformats.org/drawingml/2006/main" w="0">
+            <a:noFill/>
+            <a:prstDash val="solid"/>
+          </a:ln>
+        </p:spPr>
+        <p:txBody>
+          <a:bodyPr xmlns:a="http://schemas.openxmlformats.org/drawingml/2006/main"/>
+          <a:lstStyle xmlns:a="http://schemas.openxmlformats.org/drawingml/2006/main"/>
+          <a:p xmlns:a="http://schemas.openxmlformats.org/drawingml/2006/main">
+            <a:pPr>
+              <a:defRPr sz="1725" b="1">
+                <a:solidFill>
+                  <a:srgbClr val="6657E8"/>
+                </a:solidFill>
+              </a:defRPr>
+            </a:pPr>
+            <a:r>
+              <a:rPr sz="1725" b="1">
+                <a:solidFill>
+                  <a:srgbClr val="6657E8"/>
+                </a:solidFill>
+              </a:rPr>
+              <a:t>req</a:t>
+            </a:r>
+          </a:p>
+        </p:txBody>
+      </p:sp>
+      <p:sp>
+        <p:nvSpPr>
+          <p:cNvPr id="7" name="">
+            <a:extLst xmlns:a="http://schemas.openxmlformats.org/drawingml/2006/main">
+              <a:ext uri="{FF2B5EF4-FFF2-40B4-BE49-F238E27FC236}">
+                <a16:creationId xmlns:a16="http://schemas.microsoft.com/office/drawing/2014/main" id="{35EFE0EB-8B31-4937-B493-00C7267FB7D4}"/>
+              </a:ext>
+            </a:extLst>
+          </p:cNvPr>
+          <p:cNvSpPr>
+            <a:spLocks xmlns:a="http://schemas.openxmlformats.org/drawingml/2006/main" noGrp="1"/>
+          </p:cNvSpPr>
+          <p:nvPr/>
+        </p:nvSpPr>
+        <p:spPr>
+          <a:xfrm xmlns:a="http://schemas.openxmlformats.org/drawingml/2006/main">
+            <a:off x="3429000" y="2524125"/>
+            <a:ext cx="7429500" cy="666750"/>
+          </a:xfrm>
+          <a:prstGeom xmlns:a="http://schemas.openxmlformats.org/drawingml/2006/main" prst="rect">
+            <a:avLst/>
+          </a:prstGeom>
+          <a:noFill xmlns:a="http://schemas.openxmlformats.org/drawingml/2006/main"/>
+          <a:ln xmlns:a="http://schemas.openxmlformats.org/drawingml/2006/main" w="0">
+            <a:noFill/>
+            <a:prstDash val="solid"/>
+          </a:ln>
+        </p:spPr>
+        <p:txBody>
+          <a:bodyPr xmlns:a="http://schemas.openxmlformats.org/drawingml/2006/main"/>
+          <a:lstStyle xmlns:a="http://schemas.openxmlformats.org/drawingml/2006/main"/>
+          <a:p xmlns:a="http://schemas.openxmlformats.org/drawingml/2006/main">
+            <a:pPr>
+              <a:defRPr sz="1650">
+                <a:solidFill>
+                  <a:srgbClr val="182235"/>
+                </a:solidFill>
+              </a:defRPr>
+            </a:pPr>
+            <a:r>
+              <a:rPr sz="1650">
+                <a:solidFill>
+                  <a:srgbClr val="182235"/>
+                </a:solidFill>
+              </a:rPr>
+              <a:t>브라우저가 보낸 요청 정보입니다.</a:t>
+            </a:r>
+          </a:p>
+        </p:txBody>
+      </p:sp>
+      <p:sp>
+        <p:nvSpPr>
+          <p:cNvPr id="8" name="">
+            <a:extLst xmlns:a="http://schemas.openxmlformats.org/drawingml/2006/main">
+              <a:ext uri="{FF2B5EF4-FFF2-40B4-BE49-F238E27FC236}">
+                <a16:creationId xmlns:a16="http://schemas.microsoft.com/office/drawing/2014/main" id="{AA059FCF-3CDA-4018-895C-E003FB50E7E6}"/>
+              </a:ext>
+            </a:extLst>
+          </p:cNvPr>
+          <p:cNvSpPr>
+            <a:spLocks xmlns:a="http://schemas.openxmlformats.org/drawingml/2006/main" noGrp="1"/>
+          </p:cNvSpPr>
+          <p:nvPr/>
+        </p:nvSpPr>
+        <p:spPr>
+          <a:xfrm xmlns:a="http://schemas.openxmlformats.org/drawingml/2006/main">
+            <a:off x="857250" y="3619500"/>
+            <a:ext cx="2381250" cy="400050"/>
+          </a:xfrm>
+          <a:prstGeom xmlns:a="http://schemas.openxmlformats.org/drawingml/2006/main" prst="rect">
+            <a:avLst/>
+          </a:prstGeom>
+          <a:noFill xmlns:a="http://schemas.openxmlformats.org/drawingml/2006/main"/>
+          <a:ln xmlns:a="http://schemas.openxmlformats.org/drawingml/2006/main" w="0">
+            <a:noFill/>
+            <a:prstDash val="solid"/>
+          </a:ln>
+        </p:spPr>
+        <p:txBody>
+          <a:bodyPr xmlns:a="http://schemas.openxmlformats.org/drawingml/2006/main"/>
+          <a:lstStyle xmlns:a="http://schemas.openxmlformats.org/drawingml/2006/main"/>
+          <a:p xmlns:a="http://schemas.openxmlformats.org/drawingml/2006/main">
+            <a:pPr>
+              <a:defRPr sz="1725" b="1">
+                <a:solidFill>
+                  <a:srgbClr val="6657E8"/>
+                </a:solidFill>
+              </a:defRPr>
+            </a:pPr>
+            <a:r>
+              <a:rPr sz="1725" b="1">
+                <a:solidFill>
+                  <a:srgbClr val="6657E8"/>
+                </a:solidFill>
+              </a:rPr>
+              <a:t>res.json</a:t>
+            </a:r>
+          </a:p>
+        </p:txBody>
+      </p:sp>
+      <p:sp>
+        <p:nvSpPr>
+          <p:cNvPr id="9" name="">
+            <a:extLst xmlns:a="http://schemas.openxmlformats.org/drawingml/2006/main">
+              <a:ext uri="{FF2B5EF4-FFF2-40B4-BE49-F238E27FC236}">
+                <a16:creationId xmlns:a16="http://schemas.microsoft.com/office/drawing/2014/main" id="{2CB0CF10-305D-4F5F-B5BA-A1FBF23B53BB}"/>
+              </a:ext>
+            </a:extLst>
+          </p:cNvPr>
+          <p:cNvSpPr>
+            <a:spLocks xmlns:a="http://schemas.openxmlformats.org/drawingml/2006/main" noGrp="1"/>
+          </p:cNvSpPr>
+          <p:nvPr/>
+        </p:nvSpPr>
+        <p:spPr>
+          <a:xfrm xmlns:a="http://schemas.openxmlformats.org/drawingml/2006/main">
+            <a:off x="3429000" y="3619500"/>
+            <a:ext cx="7429500" cy="666750"/>
+          </a:xfrm>
+          <a:prstGeom xmlns:a="http://schemas.openxmlformats.org/drawingml/2006/main" prst="rect">
+            <a:avLst/>
+          </a:prstGeom>
+          <a:noFill xmlns:a="http://schemas.openxmlformats.org/drawingml/2006/main"/>
+          <a:ln xmlns:a="http://schemas.openxmlformats.org/drawingml/2006/main" w="0">
+            <a:noFill/>
+            <a:prstDash val="solid"/>
+          </a:ln>
+        </p:spPr>
+        <p:txBody>
+          <a:bodyPr xmlns:a="http://schemas.openxmlformats.org/drawingml/2006/main"/>
+          <a:lstStyle xmlns:a="http://schemas.openxmlformats.org/drawingml/2006/main"/>
+          <a:p xmlns:a="http://schemas.openxmlformats.org/drawingml/2006/main">
+            <a:pPr>
+              <a:defRPr sz="1650">
+                <a:solidFill>
+                  <a:srgbClr val="182235"/>
+                </a:solidFill>
+              </a:defRPr>
+            </a:pPr>
+            <a:r>
+              <a:rPr sz="1650">
+                <a:solidFill>
+                  <a:srgbClr val="182235"/>
+                </a:solidFill>
+              </a:rPr>
+              <a:t>JavaScript 자료를 JSON 응답으로 보냅니다.</a:t>
+            </a:r>
+          </a:p>
+        </p:txBody>
+      </p:sp>
+    </p:spTree>
+    <p:extLst>
+      <p:ext uri="{BB962C8B-B14F-4D97-AF65-F5344CB8AC3E}">
+        <p14:creationId xmlns:p14="http://schemas.microsoft.com/office/powerpoint/2010/main" val="1822101028"/>
+      </p:ext>
+    </p:extLst>
+  </p:cSld>
+</p:sld>
+</file>
+
+<file path=ppt/slides/slide12.xml><?xml version="1.0" encoding="utf-8"?>
+<p:sld xmlns:p="http://schemas.openxmlformats.org/presentationml/2006/main">
+  <p:cSld>
+    <p:bg>
+      <p:bgPr>
+        <a:solidFill xmlns:a="http://schemas.openxmlformats.org/drawingml/2006/main">
+          <a:srgbClr val="FFFCF8"/>
+        </a:solidFill>
+      </p:bgPr>
+    </p:bg>
+    <p:spTree>
+      <p:nvGrpSpPr>
+        <p:cNvPr id="1" name=""/>
+        <p:cNvGrpSpPr/>
+        <p:nvPr/>
+      </p:nvGrpSpPr>
+      <p:grpSpPr>
+        <a:xfrm xmlns:a="http://schemas.openxmlformats.org/drawingml/2006/main"/>
+      </p:grpSpPr>
+      <p:sp>
+        <p:nvSpPr>
+          <p:cNvPr id="13" name="">
+            <a:extLst xmlns:a="http://schemas.openxmlformats.org/drawingml/2006/main">
+              <a:ext uri="{FF2B5EF4-FFF2-40B4-BE49-F238E27FC236}">
+                <a16:creationId xmlns:a16="http://schemas.microsoft.com/office/drawing/2014/main" id="{9375291A-58E9-471A-AD42-2C821A110541}"/>
+              </a:ext>
+            </a:extLst>
+          </p:cNvPr>
+          <p:cNvSpPr>
+            <a:spLocks xmlns:a="http://schemas.openxmlformats.org/drawingml/2006/main" noGrp="1"/>
+          </p:cNvSpPr>
+          <p:nvPr/>
+        </p:nvSpPr>
+        <p:spPr>
+          <a:xfrm xmlns:a="http://schemas.openxmlformats.org/drawingml/2006/main">
+            <a:off x="0" y="0"/>
+            <a:ext cx="171450" cy="6858000"/>
+          </a:xfrm>
+          <a:prstGeom xmlns:a="http://schemas.openxmlformats.org/drawingml/2006/main" prst="rect">
+            <a:avLst/>
+          </a:prstGeom>
+          <a:solidFill xmlns:a="http://schemas.openxmlformats.org/drawingml/2006/main">
+            <a:srgbClr val="6657E8"/>
+          </a:solidFill>
+          <a:ln xmlns:a="http://schemas.openxmlformats.org/drawingml/2006/main" w="0">
+            <a:noFill/>
+            <a:prstDash val="solid"/>
+          </a:ln>
+        </p:spPr>
+      </p:sp>
+      <p:sp>
+        <p:nvSpPr>
+          <p:cNvPr id="2" name="">
+            <a:extLst xmlns:a="http://schemas.openxmlformats.org/drawingml/2006/main">
+              <a:ext uri="{FF2B5EF4-FFF2-40B4-BE49-F238E27FC236}">
+                <a16:creationId xmlns:a16="http://schemas.microsoft.com/office/drawing/2014/main" id="{8BD1F3BE-F7A0-457F-8783-CFB2EAAFEC0A}"/>
+              </a:ext>
+            </a:extLst>
+          </p:cNvPr>
+          <p:cNvSpPr>
+            <a:spLocks xmlns:a="http://schemas.openxmlformats.org/drawingml/2006/main" noGrp="1"/>
+          </p:cNvSpPr>
+          <p:nvPr/>
+        </p:nvSpPr>
+        <p:spPr>
+          <a:xfrm xmlns:a="http://schemas.openxmlformats.org/drawingml/2006/main">
+            <a:off x="647700" y="457200"/>
+            <a:ext cx="10096500" cy="552450"/>
+          </a:xfrm>
+          <a:prstGeom xmlns:a="http://schemas.openxmlformats.org/drawingml/2006/main" prst="rect">
+            <a:avLst/>
+          </a:prstGeom>
+          <a:noFill xmlns:a="http://schemas.openxmlformats.org/drawingml/2006/main"/>
+          <a:ln xmlns:a="http://schemas.openxmlformats.org/drawingml/2006/main" w="0">
+            <a:noFill/>
+            <a:prstDash val="solid"/>
+          </a:ln>
+        </p:spPr>
+        <p:txBody>
+          <a:bodyPr xmlns:a="http://schemas.openxmlformats.org/drawingml/2006/main"/>
+          <a:lstStyle xmlns:a="http://schemas.openxmlformats.org/drawingml/2006/main"/>
+          <a:p xmlns:a="http://schemas.openxmlformats.org/drawingml/2006/main">
+            <a:pPr>
+              <a:defRPr sz="2700" b="1">
+                <a:solidFill>
+                  <a:srgbClr val="182235"/>
+                </a:solidFill>
+              </a:defRPr>
+            </a:pPr>
+            <a:r>
+              <a:rPr sz="2700" b="1">
+                <a:solidFill>
+                  <a:srgbClr val="182235"/>
+                </a:solidFill>
+              </a:rPr>
+              <a:t>오류는 첫 문장부터 차례로 해결합니다</a:t>
+            </a:r>
+          </a:p>
+        </p:txBody>
+      </p:sp>
+      <p:sp>
+        <p:nvSpPr>
+          <p:cNvPr id="3" name="">
+            <a:extLst xmlns:a="http://schemas.openxmlformats.org/drawingml/2006/main">
+              <a:ext uri="{FF2B5EF4-FFF2-40B4-BE49-F238E27FC236}">
+                <a16:creationId xmlns:a16="http://schemas.microsoft.com/office/drawing/2014/main" id="{67FEE5C0-DC03-4A10-8ADE-08EBCAF9D66B}"/>
+              </a:ext>
+            </a:extLst>
+          </p:cNvPr>
+          <p:cNvSpPr>
+            <a:spLocks xmlns:a="http://schemas.openxmlformats.org/drawingml/2006/main" noGrp="1"/>
+          </p:cNvSpPr>
+          <p:nvPr/>
+        </p:nvSpPr>
+        <p:spPr>
+          <a:xfrm xmlns:a="http://schemas.openxmlformats.org/drawingml/2006/main">
+            <a:off x="666750" y="6419850"/>
+            <a:ext cx="10096500" cy="209550"/>
+          </a:xfrm>
+          <a:prstGeom xmlns:a="http://schemas.openxmlformats.org/drawingml/2006/main" prst="rect">
+            <a:avLst/>
+          </a:prstGeom>
+          <a:noFill xmlns:a="http://schemas.openxmlformats.org/drawingml/2006/main"/>
+          <a:ln xmlns:a="http://schemas.openxmlformats.org/drawingml/2006/main" w="0">
+            <a:noFill/>
+            <a:prstDash val="solid"/>
+          </a:ln>
+        </p:spPr>
+        <p:txBody>
+          <a:bodyPr xmlns:a="http://schemas.openxmlformats.org/drawingml/2006/main"/>
+          <a:lstStyle xmlns:a="http://schemas.openxmlformats.org/drawingml/2006/main"/>
+          <a:p xmlns:a="http://schemas.openxmlformats.org/drawingml/2006/main">
+            <a:pPr>
+              <a:defRPr sz="975">
+                <a:solidFill>
+                  <a:srgbClr val="657083"/>
+                </a:solidFill>
+              </a:defRPr>
+            </a:pPr>
+            <a:r>
+              <a:rPr sz="975">
+                <a:solidFill>
+                  <a:srgbClr val="657083"/>
+                </a:solidFill>
+              </a:rPr>
+              <a:t>EDU 웹개발 교육 플랫폼  ·  12</a:t>
+            </a:r>
+          </a:p>
+        </p:txBody>
+      </p:sp>
+      <p:sp>
+        <p:nvSpPr>
+          <p:cNvPr id="4" name="">
+            <a:extLst xmlns:a="http://schemas.openxmlformats.org/drawingml/2006/main">
+              <a:ext uri="{FF2B5EF4-FFF2-40B4-BE49-F238E27FC236}">
+                <a16:creationId xmlns:a16="http://schemas.microsoft.com/office/drawing/2014/main" id="{12DEFE0B-A2DC-4657-96C3-AED7ADE2264F}"/>
+              </a:ext>
+            </a:extLst>
+          </p:cNvPr>
+          <p:cNvSpPr>
+            <a:spLocks xmlns:a="http://schemas.openxmlformats.org/drawingml/2006/main" noGrp="1"/>
+          </p:cNvSpPr>
+          <p:nvPr/>
+        </p:nvSpPr>
+        <p:spPr>
+          <a:xfrm xmlns:a="http://schemas.openxmlformats.org/drawingml/2006/main">
+            <a:off x="723900" y="1333500"/>
+            <a:ext cx="10744200" cy="1123950"/>
+          </a:xfrm>
+          <a:prstGeom xmlns:a="http://schemas.openxmlformats.org/drawingml/2006/main" prst="roundRect">
+            <a:avLst>
+              <a:gd name="adj" fmla="val 10169"/>
+            </a:avLst>
+          </a:prstGeom>
+          <a:solidFill xmlns:a="http://schemas.openxmlformats.org/drawingml/2006/main">
+            <a:srgbClr val="FFF0ED"/>
+          </a:solidFill>
+          <a:ln xmlns:a="http://schemas.openxmlformats.org/drawingml/2006/main" w="0">
+            <a:noFill/>
+            <a:prstDash val="solid"/>
+          </a:ln>
+        </p:spPr>
+      </p:sp>
+      <p:sp>
+        <p:nvSpPr>
+          <p:cNvPr id="5" name="">
+            <a:extLst xmlns:a="http://schemas.openxmlformats.org/drawingml/2006/main">
+              <a:ext uri="{FF2B5EF4-FFF2-40B4-BE49-F238E27FC236}">
+                <a16:creationId xmlns:a16="http://schemas.microsoft.com/office/drawing/2014/main" id="{FB9B2F77-CE00-4797-B424-9C6A12E09527}"/>
+              </a:ext>
+            </a:extLst>
+          </p:cNvPr>
+          <p:cNvSpPr>
+            <a:spLocks xmlns:a="http://schemas.openxmlformats.org/drawingml/2006/main" noGrp="1"/>
+          </p:cNvSpPr>
+          <p:nvPr/>
+        </p:nvSpPr>
+        <p:spPr>
+          <a:xfrm xmlns:a="http://schemas.openxmlformats.org/drawingml/2006/main">
+            <a:off x="1000125" y="1562100"/>
+            <a:ext cx="2857500" cy="361950"/>
+          </a:xfrm>
+          <a:prstGeom xmlns:a="http://schemas.openxmlformats.org/drawingml/2006/main" prst="rect">
+            <a:avLst/>
+          </a:prstGeom>
+          <a:noFill xmlns:a="http://schemas.openxmlformats.org/drawingml/2006/main"/>
+          <a:ln xmlns:a="http://schemas.openxmlformats.org/drawingml/2006/main" w="0">
+            <a:noFill/>
+            <a:prstDash val="solid"/>
+          </a:ln>
+        </p:spPr>
+        <p:txBody>
+          <a:bodyPr xmlns:a="http://schemas.openxmlformats.org/drawingml/2006/main"/>
+          <a:lstStyle xmlns:a="http://schemas.openxmlformats.org/drawingml/2006/main"/>
+          <a:p xmlns:a="http://schemas.openxmlformats.org/drawingml/2006/main">
+            <a:pPr>
+              <a:defRPr sz="1650" b="1">
+                <a:solidFill>
+                  <a:srgbClr val="A8493B"/>
+                </a:solidFill>
+              </a:defRPr>
+            </a:pPr>
+            <a:r>
+              <a:rPr sz="1650" b="1">
+                <a:solidFill>
+                  <a:srgbClr val="A8493B"/>
+                </a:solidFill>
+              </a:rPr>
+              <a:t>Cannot find module</a:t>
+            </a:r>
+          </a:p>
+        </p:txBody>
+      </p:sp>
+      <p:sp>
+        <p:nvSpPr>
+          <p:cNvPr id="6" name="">
+            <a:extLst xmlns:a="http://schemas.openxmlformats.org/drawingml/2006/main">
+              <a:ext uri="{FF2B5EF4-FFF2-40B4-BE49-F238E27FC236}">
+                <a16:creationId xmlns:a16="http://schemas.microsoft.com/office/drawing/2014/main" id="{5133379C-A79C-4100-9DA4-6CD73C848839}"/>
+              </a:ext>
+            </a:extLst>
+          </p:cNvPr>
+          <p:cNvSpPr>
+            <a:spLocks xmlns:a="http://schemas.openxmlformats.org/drawingml/2006/main" noGrp="1"/>
+          </p:cNvSpPr>
+          <p:nvPr/>
+        </p:nvSpPr>
+        <p:spPr>
+          <a:xfrm xmlns:a="http://schemas.openxmlformats.org/drawingml/2006/main">
+            <a:off x="4000500" y="1495425"/>
+            <a:ext cx="6953250" cy="619125"/>
+          </a:xfrm>
+          <a:prstGeom xmlns:a="http://schemas.openxmlformats.org/drawingml/2006/main" prst="rect">
+            <a:avLst/>
+          </a:prstGeom>
+          <a:noFill xmlns:a="http://schemas.openxmlformats.org/drawingml/2006/main"/>
+          <a:ln xmlns:a="http://schemas.openxmlformats.org/drawingml/2006/main" w="0">
+            <a:noFill/>
+            <a:prstDash val="solid"/>
+          </a:ln>
+        </p:spPr>
+        <p:txBody>
+          <a:bodyPr xmlns:a="http://schemas.openxmlformats.org/drawingml/2006/main"/>
+          <a:lstStyle xmlns:a="http://schemas.openxmlformats.org/drawingml/2006/main"/>
+          <a:p xmlns:a="http://schemas.openxmlformats.org/drawingml/2006/main">
+            <a:pPr>
+              <a:defRPr sz="1575">
+                <a:solidFill>
+                  <a:srgbClr val="182235"/>
+                </a:solidFill>
+              </a:defRPr>
+            </a:pPr>
+            <a:r>
+              <a:rPr sz="1575">
+                <a:solidFill>
+                  <a:srgbClr val="182235"/>
+                </a:solidFill>
+              </a:rPr>
+              <a:t>npm install을 실행했는지 확인합니다.</a:t>
+            </a:r>
+          </a:p>
+        </p:txBody>
+      </p:sp>
+      <p:sp>
+        <p:nvSpPr>
+          <p:cNvPr id="7" name="">
+            <a:extLst xmlns:a="http://schemas.openxmlformats.org/drawingml/2006/main">
+              <a:ext uri="{FF2B5EF4-FFF2-40B4-BE49-F238E27FC236}">
+                <a16:creationId xmlns:a16="http://schemas.microsoft.com/office/drawing/2014/main" id="{EAF5E9EF-9276-4628-A433-26DBC60B2F9B}"/>
+              </a:ext>
+            </a:extLst>
+          </p:cNvPr>
+          <p:cNvSpPr>
+            <a:spLocks xmlns:a="http://schemas.openxmlformats.org/drawingml/2006/main" noGrp="1"/>
+          </p:cNvSpPr>
+          <p:nvPr/>
+        </p:nvSpPr>
+        <p:spPr>
+          <a:xfrm xmlns:a="http://schemas.openxmlformats.org/drawingml/2006/main">
+            <a:off x="723900" y="2762250"/>
+            <a:ext cx="10744200" cy="1123950"/>
+          </a:xfrm>
+          <a:prstGeom xmlns:a="http://schemas.openxmlformats.org/drawingml/2006/main" prst="roundRect">
+            <a:avLst>
+              <a:gd name="adj" fmla="val 10169"/>
+            </a:avLst>
+          </a:prstGeom>
+          <a:solidFill xmlns:a="http://schemas.openxmlformats.org/drawingml/2006/main">
+            <a:srgbClr val="EAF8F3"/>
+          </a:solidFill>
+          <a:ln xmlns:a="http://schemas.openxmlformats.org/drawingml/2006/main" w="0">
+            <a:noFill/>
+            <a:prstDash val="solid"/>
+          </a:ln>
+        </p:spPr>
+      </p:sp>
+      <p:sp>
+        <p:nvSpPr>
+          <p:cNvPr id="8" name="">
+            <a:extLst xmlns:a="http://schemas.openxmlformats.org/drawingml/2006/main">
+              <a:ext uri="{FF2B5EF4-FFF2-40B4-BE49-F238E27FC236}">
+                <a16:creationId xmlns:a16="http://schemas.microsoft.com/office/drawing/2014/main" id="{4BCF8456-C461-4070-A3D9-0AD773A6C3F3}"/>
+              </a:ext>
+            </a:extLst>
+          </p:cNvPr>
+          <p:cNvSpPr>
+            <a:spLocks xmlns:a="http://schemas.openxmlformats.org/drawingml/2006/main" noGrp="1"/>
+          </p:cNvSpPr>
+          <p:nvPr/>
+        </p:nvSpPr>
+        <p:spPr>
+          <a:xfrm xmlns:a="http://schemas.openxmlformats.org/drawingml/2006/main">
+            <a:off x="1000125" y="2990850"/>
+            <a:ext cx="2857500" cy="361950"/>
+          </a:xfrm>
+          <a:prstGeom xmlns:a="http://schemas.openxmlformats.org/drawingml/2006/main" prst="rect">
+            <a:avLst/>
+          </a:prstGeom>
+          <a:noFill xmlns:a="http://schemas.openxmlformats.org/drawingml/2006/main"/>
+          <a:ln xmlns:a="http://schemas.openxmlformats.org/drawingml/2006/main" w="0">
+            <a:noFill/>
+            <a:prstDash val="solid"/>
+          </a:ln>
+        </p:spPr>
+        <p:txBody>
+          <a:bodyPr xmlns:a="http://schemas.openxmlformats.org/drawingml/2006/main"/>
+          <a:lstStyle xmlns:a="http://schemas.openxmlformats.org/drawingml/2006/main"/>
+          <a:p xmlns:a="http://schemas.openxmlformats.org/drawingml/2006/main">
+            <a:pPr>
+              <a:defRPr sz="1650" b="1">
+                <a:solidFill>
+                  <a:srgbClr val="26755F"/>
+                </a:solidFill>
+              </a:defRPr>
+            </a:pPr>
+            <a:r>
+              <a:rPr sz="1650" b="1">
+                <a:solidFill>
+                  <a:srgbClr val="26755F"/>
+                </a:solidFill>
+              </a:rPr>
+              <a:t>주소를 찾을 수 없어요</a:t>
+            </a:r>
+          </a:p>
+        </p:txBody>
+      </p:sp>
+      <p:sp>
+        <p:nvSpPr>
+          <p:cNvPr id="9" name="">
+            <a:extLst xmlns:a="http://schemas.openxmlformats.org/drawingml/2006/main">
+              <a:ext uri="{FF2B5EF4-FFF2-40B4-BE49-F238E27FC236}">
+                <a16:creationId xmlns:a16="http://schemas.microsoft.com/office/drawing/2014/main" id="{E437E982-1117-4017-BDC2-D892DE0CFD47}"/>
+              </a:ext>
+            </a:extLst>
+          </p:cNvPr>
+          <p:cNvSpPr>
+            <a:spLocks xmlns:a="http://schemas.openxmlformats.org/drawingml/2006/main" noGrp="1"/>
+          </p:cNvSpPr>
+          <p:nvPr/>
+        </p:nvSpPr>
+        <p:spPr>
+          <a:xfrm xmlns:a="http://schemas.openxmlformats.org/drawingml/2006/main">
+            <a:off x="4000500" y="2924175"/>
+            <a:ext cx="6953250" cy="619125"/>
+          </a:xfrm>
+          <a:prstGeom xmlns:a="http://schemas.openxmlformats.org/drawingml/2006/main" prst="rect">
+            <a:avLst/>
+          </a:prstGeom>
+          <a:noFill xmlns:a="http://schemas.openxmlformats.org/drawingml/2006/main"/>
+          <a:ln xmlns:a="http://schemas.openxmlformats.org/drawingml/2006/main" w="0">
+            <a:noFill/>
+            <a:prstDash val="solid"/>
+          </a:ln>
+        </p:spPr>
+        <p:txBody>
+          <a:bodyPr xmlns:a="http://schemas.openxmlformats.org/drawingml/2006/main"/>
+          <a:lstStyle xmlns:a="http://schemas.openxmlformats.org/drawingml/2006/main"/>
+          <a:p xmlns:a="http://schemas.openxmlformats.org/drawingml/2006/main">
+            <a:pPr>
+              <a:defRPr sz="1575">
+                <a:solidFill>
+                  <a:srgbClr val="182235"/>
+                </a:solidFill>
+              </a:defRPr>
+            </a:pPr>
+            <a:r>
+              <a:rPr sz="1575">
+                <a:solidFill>
+                  <a:srgbClr val="182235"/>
+                </a:solidFill>
+              </a:rPr>
+              <a:t>서버 포트와 /api/lessons 철자를 봅니다.</a:t>
+            </a:r>
+          </a:p>
+        </p:txBody>
+      </p:sp>
+      <p:sp>
+        <p:nvSpPr>
+          <p:cNvPr id="10" name="">
+            <a:extLst xmlns:a="http://schemas.openxmlformats.org/drawingml/2006/main">
+              <a:ext uri="{FF2B5EF4-FFF2-40B4-BE49-F238E27FC236}">
+                <a16:creationId xmlns:a16="http://schemas.microsoft.com/office/drawing/2014/main" id="{0281E75B-2B97-42EC-96C4-A7374ACB8ABF}"/>
+              </a:ext>
+            </a:extLst>
+          </p:cNvPr>
+          <p:cNvSpPr>
+            <a:spLocks xmlns:a="http://schemas.openxmlformats.org/drawingml/2006/main" noGrp="1"/>
+          </p:cNvSpPr>
+          <p:nvPr/>
+        </p:nvSpPr>
+        <p:spPr>
+          <a:xfrm xmlns:a="http://schemas.openxmlformats.org/drawingml/2006/main">
+            <a:off x="723900" y="4191000"/>
+            <a:ext cx="10744200" cy="1123950"/>
+          </a:xfrm>
+          <a:prstGeom xmlns:a="http://schemas.openxmlformats.org/drawingml/2006/main" prst="roundRect">
+            <a:avLst>
+              <a:gd name="adj" fmla="val 10169"/>
+            </a:avLst>
+          </a:prstGeom>
+          <a:solidFill xmlns:a="http://schemas.openxmlformats.org/drawingml/2006/main">
+            <a:srgbClr val="FFF0ED"/>
+          </a:solidFill>
+          <a:ln xmlns:a="http://schemas.openxmlformats.org/drawingml/2006/main" w="0">
+            <a:noFill/>
+            <a:prstDash val="solid"/>
+          </a:ln>
+        </p:spPr>
+      </p:sp>
+      <p:sp>
+        <p:nvSpPr>
+          <p:cNvPr id="11" name="">
+            <a:extLst xmlns:a="http://schemas.openxmlformats.org/drawingml/2006/main">
+              <a:ext uri="{FF2B5EF4-FFF2-40B4-BE49-F238E27FC236}">
+                <a16:creationId xmlns:a16="http://schemas.microsoft.com/office/drawing/2014/main" id="{A64CD2E0-380D-410A-A1C8-61E81C89FCA6}"/>
+              </a:ext>
+            </a:extLst>
+          </p:cNvPr>
+          <p:cNvSpPr>
+            <a:spLocks xmlns:a="http://schemas.openxmlformats.org/drawingml/2006/main" noGrp="1"/>
+          </p:cNvSpPr>
+          <p:nvPr/>
+        </p:nvSpPr>
+        <p:spPr>
+          <a:xfrm xmlns:a="http://schemas.openxmlformats.org/drawingml/2006/main">
+            <a:off x="1000125" y="4419600"/>
+            <a:ext cx="2857500" cy="361950"/>
+          </a:xfrm>
+          <a:prstGeom xmlns:a="http://schemas.openxmlformats.org/drawingml/2006/main" prst="rect">
+            <a:avLst/>
+          </a:prstGeom>
+          <a:noFill xmlns:a="http://schemas.openxmlformats.org/drawingml/2006/main"/>
+          <a:ln xmlns:a="http://schemas.openxmlformats.org/drawingml/2006/main" w="0">
+            <a:noFill/>
+            <a:prstDash val="solid"/>
+          </a:ln>
+        </p:spPr>
+        <p:txBody>
+          <a:bodyPr xmlns:a="http://schemas.openxmlformats.org/drawingml/2006/main"/>
+          <a:lstStyle xmlns:a="http://schemas.openxmlformats.org/drawingml/2006/main"/>
+          <a:p xmlns:a="http://schemas.openxmlformats.org/drawingml/2006/main">
+            <a:pPr>
+              <a:defRPr sz="1650" b="1">
+                <a:solidFill>
+                  <a:srgbClr val="A8493B"/>
+                </a:solidFill>
+              </a:defRPr>
+            </a:pPr>
+            <a:r>
+              <a:rPr sz="1650" b="1">
+                <a:solidFill>
+                  <a:srgbClr val="A8493B"/>
+                </a:solidFill>
+              </a:rPr>
+              <a:t>서버가 다시 안 켜져요</a:t>
+            </a:r>
+          </a:p>
+        </p:txBody>
+      </p:sp>
+      <p:sp>
+        <p:nvSpPr>
+          <p:cNvPr id="12" name="">
+            <a:extLst xmlns:a="http://schemas.openxmlformats.org/drawingml/2006/main">
+              <a:ext uri="{FF2B5EF4-FFF2-40B4-BE49-F238E27FC236}">
+                <a16:creationId xmlns:a16="http://schemas.microsoft.com/office/drawing/2014/main" id="{67A07AE5-FDFF-4180-867A-4F453B34E05D}"/>
+              </a:ext>
+            </a:extLst>
+          </p:cNvPr>
+          <p:cNvSpPr>
+            <a:spLocks xmlns:a="http://schemas.openxmlformats.org/drawingml/2006/main" noGrp="1"/>
+          </p:cNvSpPr>
+          <p:nvPr/>
+        </p:nvSpPr>
+        <p:spPr>
+          <a:xfrm xmlns:a="http://schemas.openxmlformats.org/drawingml/2006/main">
+            <a:off x="4000500" y="4352925"/>
+            <a:ext cx="6953250" cy="619125"/>
+          </a:xfrm>
+          <a:prstGeom xmlns:a="http://schemas.openxmlformats.org/drawingml/2006/main" prst="rect">
+            <a:avLst/>
+          </a:prstGeom>
+          <a:noFill xmlns:a="http://schemas.openxmlformats.org/drawingml/2006/main"/>
+          <a:ln xmlns:a="http://schemas.openxmlformats.org/drawingml/2006/main" w="0">
+            <a:noFill/>
+            <a:prstDash val="solid"/>
+          </a:ln>
+        </p:spPr>
+        <p:txBody>
+          <a:bodyPr xmlns:a="http://schemas.openxmlformats.org/drawingml/2006/main"/>
+          <a:lstStyle xmlns:a="http://schemas.openxmlformats.org/drawingml/2006/main"/>
+          <a:p xmlns:a="http://schemas.openxmlformats.org/drawingml/2006/main">
+            <a:pPr>
+              <a:defRPr sz="1575">
+                <a:solidFill>
+                  <a:srgbClr val="182235"/>
+                </a:solidFill>
+              </a:defRPr>
+            </a:pPr>
+            <a:r>
+              <a:rPr sz="1575">
+                <a:solidFill>
+                  <a:srgbClr val="182235"/>
+                </a:solidFill>
+              </a:rPr>
+              <a:t>기존 실행을 Ctrl+C로 종료한 뒤 다시 시작합니다.</a:t>
+            </a:r>
+          </a:p>
+        </p:txBody>
+      </p:sp>
+    </p:spTree>
+    <p:extLst>
+      <p:ext uri="{BB962C8B-B14F-4D97-AF65-F5344CB8AC3E}">
+        <p14:creationId xmlns:p14="http://schemas.microsoft.com/office/powerpoint/2010/main" val="598206191"/>
+      </p:ext>
+    </p:extLst>
+  </p:cSld>
+</p:sld>
+</file>
+
+<file path=ppt/slides/slide13.xml><?xml version="1.0" encoding="utf-8"?>
+<p:sld xmlns:p="http://schemas.openxmlformats.org/presentationml/2006/main">
+  <p:cSld>
+    <p:bg>
+      <p:bgPr>
+        <a:solidFill xmlns:a="http://schemas.openxmlformats.org/drawingml/2006/main">
+          <a:srgbClr val="FFFCF8"/>
+        </a:solidFill>
+      </p:bgPr>
+    </p:bg>
+    <p:spTree>
+      <p:nvGrpSpPr>
+        <p:cNvPr id="1" name=""/>
+        <p:cNvGrpSpPr/>
+        <p:nvPr/>
+      </p:nvGrpSpPr>
+      <p:grpSpPr>
+        <a:xfrm xmlns:a="http://schemas.openxmlformats.org/drawingml/2006/main"/>
+      </p:grpSpPr>
+      <p:sp>
+        <p:nvSpPr>
+          <p:cNvPr id="13" name="">
+            <a:extLst xmlns:a="http://schemas.openxmlformats.org/drawingml/2006/main">
+              <a:ext uri="{FF2B5EF4-FFF2-40B4-BE49-F238E27FC236}">
+                <a16:creationId xmlns:a16="http://schemas.microsoft.com/office/drawing/2014/main" id="{249E16B6-7DFC-4E63-BF15-E1876A4A0DFC}"/>
+              </a:ext>
+            </a:extLst>
+          </p:cNvPr>
+          <p:cNvSpPr>
+            <a:spLocks xmlns:a="http://schemas.openxmlformats.org/drawingml/2006/main" noGrp="1"/>
+          </p:cNvSpPr>
+          <p:nvPr/>
+        </p:nvSpPr>
+        <p:spPr>
+          <a:xfrm xmlns:a="http://schemas.openxmlformats.org/drawingml/2006/main">
+            <a:off x="0" y="0"/>
+            <a:ext cx="171450" cy="6858000"/>
+          </a:xfrm>
+          <a:prstGeom xmlns:a="http://schemas.openxmlformats.org/drawingml/2006/main" prst="rect">
+            <a:avLst/>
+          </a:prstGeom>
+          <a:solidFill xmlns:a="http://schemas.openxmlformats.org/drawingml/2006/main">
+            <a:srgbClr val="6657E8"/>
+          </a:solidFill>
+          <a:ln xmlns:a="http://schemas.openxmlformats.org/drawingml/2006/main" w="0">
+            <a:noFill/>
+            <a:prstDash val="solid"/>
+          </a:ln>
+        </p:spPr>
+      </p:sp>
+      <p:sp>
+        <p:nvSpPr>
+          <p:cNvPr id="2" name="">
+            <a:extLst xmlns:a="http://schemas.openxmlformats.org/drawingml/2006/main">
+              <a:ext uri="{FF2B5EF4-FFF2-40B4-BE49-F238E27FC236}">
+                <a16:creationId xmlns:a16="http://schemas.microsoft.com/office/drawing/2014/main" id="{76A4969F-33E1-48C7-B2B0-BED336BA9F54}"/>
+              </a:ext>
+            </a:extLst>
+          </p:cNvPr>
+          <p:cNvSpPr>
+            <a:spLocks xmlns:a="http://schemas.openxmlformats.org/drawingml/2006/main" noGrp="1"/>
+          </p:cNvSpPr>
+          <p:nvPr/>
+        </p:nvSpPr>
+        <p:spPr>
+          <a:xfrm xmlns:a="http://schemas.openxmlformats.org/drawingml/2006/main">
+            <a:off x="647700" y="457200"/>
+            <a:ext cx="10096500" cy="552450"/>
+          </a:xfrm>
+          <a:prstGeom xmlns:a="http://schemas.openxmlformats.org/drawingml/2006/main" prst="rect">
+            <a:avLst/>
+          </a:prstGeom>
+          <a:noFill xmlns:a="http://schemas.openxmlformats.org/drawingml/2006/main"/>
+          <a:ln xmlns:a="http://schemas.openxmlformats.org/drawingml/2006/main" w="0">
+            <a:noFill/>
+            <a:prstDash val="solid"/>
+          </a:ln>
+        </p:spPr>
+        <p:txBody>
+          <a:bodyPr xmlns:a="http://schemas.openxmlformats.org/drawingml/2006/main"/>
+          <a:lstStyle xmlns:a="http://schemas.openxmlformats.org/drawingml/2006/main"/>
+          <a:p xmlns:a="http://schemas.openxmlformats.org/drawingml/2006/main">
+            <a:pPr>
+              <a:defRPr sz="2700" b="1">
+                <a:solidFill>
+                  <a:srgbClr val="182235"/>
+                </a:solidFill>
+              </a:defRPr>
+            </a:pPr>
+            <a:r>
+              <a:rPr sz="2700" b="1">
+                <a:solidFill>
+                  <a:srgbClr val="182235"/>
+                </a:solidFill>
+              </a:rPr>
+              <a:t>상황에 맞는 Codex 요청문을 골라 쓰세요</a:t>
+            </a:r>
+          </a:p>
+        </p:txBody>
+      </p:sp>
+      <p:sp>
+        <p:nvSpPr>
+          <p:cNvPr id="3" name="">
+            <a:extLst xmlns:a="http://schemas.openxmlformats.org/drawingml/2006/main">
+              <a:ext uri="{FF2B5EF4-FFF2-40B4-BE49-F238E27FC236}">
+                <a16:creationId xmlns:a16="http://schemas.microsoft.com/office/drawing/2014/main" id="{128F2CA0-6EDB-4538-A504-AE2A8892D233}"/>
+              </a:ext>
+            </a:extLst>
+          </p:cNvPr>
+          <p:cNvSpPr>
+            <a:spLocks xmlns:a="http://schemas.openxmlformats.org/drawingml/2006/main" noGrp="1"/>
+          </p:cNvSpPr>
+          <p:nvPr/>
+        </p:nvSpPr>
+        <p:spPr>
+          <a:xfrm xmlns:a="http://schemas.openxmlformats.org/drawingml/2006/main">
+            <a:off x="666750" y="6419850"/>
+            <a:ext cx="10096500" cy="209550"/>
+          </a:xfrm>
+          <a:prstGeom xmlns:a="http://schemas.openxmlformats.org/drawingml/2006/main" prst="rect">
+            <a:avLst/>
+          </a:prstGeom>
+          <a:noFill xmlns:a="http://schemas.openxmlformats.org/drawingml/2006/main"/>
+          <a:ln xmlns:a="http://schemas.openxmlformats.org/drawingml/2006/main" w="0">
+            <a:noFill/>
+            <a:prstDash val="solid"/>
+          </a:ln>
+        </p:spPr>
+        <p:txBody>
+          <a:bodyPr xmlns:a="http://schemas.openxmlformats.org/drawingml/2006/main"/>
+          <a:lstStyle xmlns:a="http://schemas.openxmlformats.org/drawingml/2006/main"/>
+          <a:p xmlns:a="http://schemas.openxmlformats.org/drawingml/2006/main">
+            <a:pPr>
+              <a:defRPr sz="975">
+                <a:solidFill>
+                  <a:srgbClr val="657083"/>
+                </a:solidFill>
+              </a:defRPr>
+            </a:pPr>
+            <a:r>
+              <a:rPr sz="975">
+                <a:solidFill>
+                  <a:srgbClr val="657083"/>
+                </a:solidFill>
+              </a:rPr>
+              <a:t>EDU 웹개발 교육 플랫폼  ·  13</a:t>
+            </a:r>
+          </a:p>
+        </p:txBody>
+      </p:sp>
+      <p:sp>
+        <p:nvSpPr>
+          <p:cNvPr id="4" name="">
+            <a:extLst xmlns:a="http://schemas.openxmlformats.org/drawingml/2006/main">
+              <a:ext uri="{FF2B5EF4-FFF2-40B4-BE49-F238E27FC236}">
+                <a16:creationId xmlns:a16="http://schemas.microsoft.com/office/drawing/2014/main" id="{D3D12E1E-5327-4762-A9D0-2236E6210D17}"/>
+              </a:ext>
+            </a:extLst>
+          </p:cNvPr>
+          <p:cNvSpPr>
+            <a:spLocks xmlns:a="http://schemas.openxmlformats.org/drawingml/2006/main" noGrp="1"/>
+          </p:cNvSpPr>
+          <p:nvPr/>
+        </p:nvSpPr>
+        <p:spPr>
+          <a:xfrm xmlns:a="http://schemas.openxmlformats.org/drawingml/2006/main">
+            <a:off x="742950" y="1381125"/>
+            <a:ext cx="514350" cy="514350"/>
+          </a:xfrm>
+          <a:prstGeom xmlns:a="http://schemas.openxmlformats.org/drawingml/2006/main" prst="roundRect">
+            <a:avLst>
+              <a:gd name="adj" fmla="val 22222"/>
+            </a:avLst>
+          </a:prstGeom>
+          <a:solidFill xmlns:a="http://schemas.openxmlformats.org/drawingml/2006/main">
+            <a:srgbClr val="EEEAFE"/>
+          </a:solidFill>
+          <a:ln xmlns:a="http://schemas.openxmlformats.org/drawingml/2006/main" w="0">
+            <a:noFill/>
+            <a:prstDash val="solid"/>
+          </a:ln>
+        </p:spPr>
+      </p:sp>
+      <p:sp>
+        <p:nvSpPr>
+          <p:cNvPr id="5" name="">
+            <a:extLst xmlns:a="http://schemas.openxmlformats.org/drawingml/2006/main">
+              <a:ext uri="{FF2B5EF4-FFF2-40B4-BE49-F238E27FC236}">
+                <a16:creationId xmlns:a16="http://schemas.microsoft.com/office/drawing/2014/main" id="{00411B27-64E4-4FA1-9207-52B5B1AAE486}"/>
+              </a:ext>
+            </a:extLst>
+          </p:cNvPr>
+          <p:cNvSpPr>
+            <a:spLocks xmlns:a="http://schemas.openxmlformats.org/drawingml/2006/main" noGrp="1"/>
+          </p:cNvSpPr>
+          <p:nvPr/>
+        </p:nvSpPr>
+        <p:spPr>
+          <a:xfrm xmlns:a="http://schemas.openxmlformats.org/drawingml/2006/main">
+            <a:off x="742950" y="1476375"/>
+            <a:ext cx="514350" cy="304800"/>
+          </a:xfrm>
+          <a:prstGeom xmlns:a="http://schemas.openxmlformats.org/drawingml/2006/main" prst="rect">
+            <a:avLst/>
+          </a:prstGeom>
+          <a:noFill xmlns:a="http://schemas.openxmlformats.org/drawingml/2006/main"/>
+          <a:ln xmlns:a="http://schemas.openxmlformats.org/drawingml/2006/main" w="0">
+            <a:noFill/>
+            <a:prstDash val="solid"/>
+          </a:ln>
+        </p:spPr>
+        <p:txBody>
+          <a:bodyPr xmlns:a="http://schemas.openxmlformats.org/drawingml/2006/main"/>
+          <a:lstStyle xmlns:a="http://schemas.openxmlformats.org/drawingml/2006/main"/>
+          <a:p xmlns:a="http://schemas.openxmlformats.org/drawingml/2006/main">
+            <a:pPr algn="ctr">
+              <a:defRPr sz="1500" b="1">
+                <a:solidFill>
+                  <a:srgbClr val="6657E8"/>
+                </a:solidFill>
+              </a:defRPr>
+            </a:pPr>
+            <a:r>
+              <a:rPr sz="1500" b="1">
+                <a:solidFill>
+                  <a:srgbClr val="6657E8"/>
+                </a:solidFill>
+              </a:rPr>
+              <a:t>1</a:t>
+            </a:r>
+          </a:p>
+        </p:txBody>
+      </p:sp>
+      <p:sp>
+        <p:nvSpPr>
+          <p:cNvPr id="6" name="">
+            <a:extLst xmlns:a="http://schemas.openxmlformats.org/drawingml/2006/main">
+              <a:ext uri="{FF2B5EF4-FFF2-40B4-BE49-F238E27FC236}">
+                <a16:creationId xmlns:a16="http://schemas.microsoft.com/office/drawing/2014/main" id="{84B517A6-43CE-495E-A0C9-05CEF3CC6AA1}"/>
+              </a:ext>
+            </a:extLst>
+          </p:cNvPr>
+          <p:cNvSpPr>
+            <a:spLocks xmlns:a="http://schemas.openxmlformats.org/drawingml/2006/main" noGrp="1"/>
+          </p:cNvSpPr>
+          <p:nvPr/>
+        </p:nvSpPr>
+        <p:spPr>
+          <a:xfrm xmlns:a="http://schemas.openxmlformats.org/drawingml/2006/main">
+            <a:off x="1485900" y="1419225"/>
+            <a:ext cx="9239250" cy="619125"/>
+          </a:xfrm>
+          <a:prstGeom xmlns:a="http://schemas.openxmlformats.org/drawingml/2006/main" prst="rect">
+            <a:avLst/>
+          </a:prstGeom>
+          <a:noFill xmlns:a="http://schemas.openxmlformats.org/drawingml/2006/main"/>
+          <a:ln xmlns:a="http://schemas.openxmlformats.org/drawingml/2006/main" w="0">
+            <a:noFill/>
+            <a:prstDash val="solid"/>
+          </a:ln>
+        </p:spPr>
+        <p:txBody>
+          <a:bodyPr xmlns:a="http://schemas.openxmlformats.org/drawingml/2006/main"/>
+          <a:lstStyle xmlns:a="http://schemas.openxmlformats.org/drawingml/2006/main"/>
+          <a:p xmlns:a="http://schemas.openxmlformats.org/drawingml/2006/main">
+            <a:pPr>
+              <a:defRPr sz="1800">
+                <a:solidFill>
+                  <a:srgbClr val="182235"/>
+                </a:solidFill>
+              </a:defRPr>
+            </a:pPr>
+            <a:r>
+              <a:rPr sz="1800">
+                <a:solidFill>
+                  <a:srgbClr val="182235"/>
+                </a:solidFill>
+              </a:rPr>
+              <a:t>Express 서버의 요청과 응답 흐름을 식당 주문에 비유해줘.</a:t>
+            </a:r>
+          </a:p>
+        </p:txBody>
+      </p:sp>
+      <p:sp>
+        <p:nvSpPr>
+          <p:cNvPr id="7" name="">
+            <a:extLst xmlns:a="http://schemas.openxmlformats.org/drawingml/2006/main">
+              <a:ext uri="{FF2B5EF4-FFF2-40B4-BE49-F238E27FC236}">
+                <a16:creationId xmlns:a16="http://schemas.microsoft.com/office/drawing/2014/main" id="{A3CB1E80-2B38-414E-A3A7-8219E5F31CFB}"/>
+              </a:ext>
+            </a:extLst>
+          </p:cNvPr>
+          <p:cNvSpPr>
+            <a:spLocks xmlns:a="http://schemas.openxmlformats.org/drawingml/2006/main" noGrp="1"/>
+          </p:cNvSpPr>
+          <p:nvPr/>
+        </p:nvSpPr>
+        <p:spPr>
+          <a:xfrm xmlns:a="http://schemas.openxmlformats.org/drawingml/2006/main">
+            <a:off x="742950" y="2352675"/>
+            <a:ext cx="514350" cy="514350"/>
+          </a:xfrm>
+          <a:prstGeom xmlns:a="http://schemas.openxmlformats.org/drawingml/2006/main" prst="roundRect">
+            <a:avLst>
+              <a:gd name="adj" fmla="val 22222"/>
+            </a:avLst>
+          </a:prstGeom>
+          <a:solidFill xmlns:a="http://schemas.openxmlformats.org/drawingml/2006/main">
+            <a:srgbClr val="EAF8F3"/>
+          </a:solidFill>
+          <a:ln xmlns:a="http://schemas.openxmlformats.org/drawingml/2006/main" w="0">
+            <a:noFill/>
+            <a:prstDash val="solid"/>
+          </a:ln>
+        </p:spPr>
+      </p:sp>
+      <p:sp>
+        <p:nvSpPr>
+          <p:cNvPr id="8" name="">
+            <a:extLst xmlns:a="http://schemas.openxmlformats.org/drawingml/2006/main">
+              <a:ext uri="{FF2B5EF4-FFF2-40B4-BE49-F238E27FC236}">
+                <a16:creationId xmlns:a16="http://schemas.microsoft.com/office/drawing/2014/main" id="{65B03F60-E6C3-4EBB-9FE1-D06C51D28CE5}"/>
+              </a:ext>
+            </a:extLst>
+          </p:cNvPr>
+          <p:cNvSpPr>
+            <a:spLocks xmlns:a="http://schemas.openxmlformats.org/drawingml/2006/main" noGrp="1"/>
+          </p:cNvSpPr>
+          <p:nvPr/>
+        </p:nvSpPr>
+        <p:spPr>
+          <a:xfrm xmlns:a="http://schemas.openxmlformats.org/drawingml/2006/main">
+            <a:off x="742950" y="2447925"/>
+            <a:ext cx="514350" cy="304800"/>
+          </a:xfrm>
+          <a:prstGeom xmlns:a="http://schemas.openxmlformats.org/drawingml/2006/main" prst="rect">
+            <a:avLst/>
+          </a:prstGeom>
+          <a:noFill xmlns:a="http://schemas.openxmlformats.org/drawingml/2006/main"/>
+          <a:ln xmlns:a="http://schemas.openxmlformats.org/drawingml/2006/main" w="0">
+            <a:noFill/>
+            <a:prstDash val="solid"/>
+          </a:ln>
+        </p:spPr>
+        <p:txBody>
+          <a:bodyPr xmlns:a="http://schemas.openxmlformats.org/drawingml/2006/main"/>
+          <a:lstStyle xmlns:a="http://schemas.openxmlformats.org/drawingml/2006/main"/>
+          <a:p xmlns:a="http://schemas.openxmlformats.org/drawingml/2006/main">
+            <a:pPr algn="ctr">
+              <a:defRPr sz="1500" b="1">
+                <a:solidFill>
+                  <a:srgbClr val="6657E8"/>
+                </a:solidFill>
+              </a:defRPr>
+            </a:pPr>
+            <a:r>
+              <a:rPr sz="1500" b="1">
+                <a:solidFill>
+                  <a:srgbClr val="6657E8"/>
+                </a:solidFill>
+              </a:rPr>
+              <a:t>2</a:t>
+            </a:r>
+          </a:p>
+        </p:txBody>
+      </p:sp>
+      <p:sp>
+        <p:nvSpPr>
+          <p:cNvPr id="9" name="">
+            <a:extLst xmlns:a="http://schemas.openxmlformats.org/drawingml/2006/main">
+              <a:ext uri="{FF2B5EF4-FFF2-40B4-BE49-F238E27FC236}">
+                <a16:creationId xmlns:a16="http://schemas.microsoft.com/office/drawing/2014/main" id="{83370D94-F520-4791-A95A-F04B943DA3F2}"/>
+              </a:ext>
+            </a:extLst>
+          </p:cNvPr>
+          <p:cNvSpPr>
+            <a:spLocks xmlns:a="http://schemas.openxmlformats.org/drawingml/2006/main" noGrp="1"/>
+          </p:cNvSpPr>
+          <p:nvPr/>
+        </p:nvSpPr>
+        <p:spPr>
+          <a:xfrm xmlns:a="http://schemas.openxmlformats.org/drawingml/2006/main">
+            <a:off x="1485900" y="2390775"/>
+            <a:ext cx="9239250" cy="619125"/>
+          </a:xfrm>
+          <a:prstGeom xmlns:a="http://schemas.openxmlformats.org/drawingml/2006/main" prst="rect">
+            <a:avLst/>
+          </a:prstGeom>
+          <a:noFill xmlns:a="http://schemas.openxmlformats.org/drawingml/2006/main"/>
+          <a:ln xmlns:a="http://schemas.openxmlformats.org/drawingml/2006/main" w="0">
+            <a:noFill/>
+            <a:prstDash val="solid"/>
+          </a:ln>
+        </p:spPr>
+        <p:txBody>
+          <a:bodyPr xmlns:a="http://schemas.openxmlformats.org/drawingml/2006/main"/>
+          <a:lstStyle xmlns:a="http://schemas.openxmlformats.org/drawingml/2006/main"/>
+          <a:p xmlns:a="http://schemas.openxmlformats.org/drawingml/2006/main">
+            <a:pPr>
+              <a:defRPr sz="1800">
+                <a:solidFill>
+                  <a:srgbClr val="182235"/>
+                </a:solidFill>
+              </a:defRPr>
+            </a:pPr>
+            <a:r>
+              <a:rPr sz="1800">
+                <a:solidFill>
+                  <a:srgbClr val="182235"/>
+                </a:solidFill>
+              </a:rPr>
+              <a:t>교육자료 두 개를 JSON으로 반환하는 GET API를 만들어줘.</a:t>
+            </a:r>
+          </a:p>
+        </p:txBody>
+      </p:sp>
+      <p:sp>
+        <p:nvSpPr>
+          <p:cNvPr id="10" name="">
+            <a:extLst xmlns:a="http://schemas.openxmlformats.org/drawingml/2006/main">
+              <a:ext uri="{FF2B5EF4-FFF2-40B4-BE49-F238E27FC236}">
+                <a16:creationId xmlns:a16="http://schemas.microsoft.com/office/drawing/2014/main" id="{2EB16359-E5D2-4B9C-A2D4-6EBAE2FB67FD}"/>
+              </a:ext>
+            </a:extLst>
+          </p:cNvPr>
+          <p:cNvSpPr>
+            <a:spLocks xmlns:a="http://schemas.openxmlformats.org/drawingml/2006/main" noGrp="1"/>
+          </p:cNvSpPr>
+          <p:nvPr/>
+        </p:nvSpPr>
+        <p:spPr>
+          <a:xfrm xmlns:a="http://schemas.openxmlformats.org/drawingml/2006/main">
+            <a:off x="742950" y="3324225"/>
+            <a:ext cx="514350" cy="514350"/>
+          </a:xfrm>
+          <a:prstGeom xmlns:a="http://schemas.openxmlformats.org/drawingml/2006/main" prst="roundRect">
+            <a:avLst>
+              <a:gd name="adj" fmla="val 22222"/>
+            </a:avLst>
+          </a:prstGeom>
+          <a:solidFill xmlns:a="http://schemas.openxmlformats.org/drawingml/2006/main">
+            <a:srgbClr val="EEEAFE"/>
+          </a:solidFill>
+          <a:ln xmlns:a="http://schemas.openxmlformats.org/drawingml/2006/main" w="0">
+            <a:noFill/>
+            <a:prstDash val="solid"/>
+          </a:ln>
+        </p:spPr>
+      </p:sp>
+      <p:sp>
+        <p:nvSpPr>
+          <p:cNvPr id="11" name="">
+            <a:extLst xmlns:a="http://schemas.openxmlformats.org/drawingml/2006/main">
+              <a:ext uri="{FF2B5EF4-FFF2-40B4-BE49-F238E27FC236}">
+                <a16:creationId xmlns:a16="http://schemas.microsoft.com/office/drawing/2014/main" id="{063284B9-AA5B-4E2F-8812-5736DD7FBED9}"/>
+              </a:ext>
+            </a:extLst>
+          </p:cNvPr>
+          <p:cNvSpPr>
+            <a:spLocks xmlns:a="http://schemas.openxmlformats.org/drawingml/2006/main" noGrp="1"/>
+          </p:cNvSpPr>
+          <p:nvPr/>
+        </p:nvSpPr>
+        <p:spPr>
+          <a:xfrm xmlns:a="http://schemas.openxmlformats.org/drawingml/2006/main">
+            <a:off x="742950" y="3419475"/>
+            <a:ext cx="514350" cy="304800"/>
+          </a:xfrm>
+          <a:prstGeom xmlns:a="http://schemas.openxmlformats.org/drawingml/2006/main" prst="rect">
+            <a:avLst/>
+          </a:prstGeom>
+          <a:noFill xmlns:a="http://schemas.openxmlformats.org/drawingml/2006/main"/>
+          <a:ln xmlns:a="http://schemas.openxmlformats.org/drawingml/2006/main" w="0">
+            <a:noFill/>
+            <a:prstDash val="solid"/>
+          </a:ln>
+        </p:spPr>
+        <p:txBody>
+          <a:bodyPr xmlns:a="http://schemas.openxmlformats.org/drawingml/2006/main"/>
+          <a:lstStyle xmlns:a="http://schemas.openxmlformats.org/drawingml/2006/main"/>
+          <a:p xmlns:a="http://schemas.openxmlformats.org/drawingml/2006/main">
+            <a:pPr algn="ctr">
+              <a:defRPr sz="1500" b="1">
+                <a:solidFill>
+                  <a:srgbClr val="6657E8"/>
+                </a:solidFill>
+              </a:defRPr>
+            </a:pPr>
+            <a:r>
+              <a:rPr sz="1500" b="1">
+                <a:solidFill>
+                  <a:srgbClr val="6657E8"/>
+                </a:solidFill>
+              </a:rPr>
+              <a:t>3</a:t>
+            </a:r>
+          </a:p>
+        </p:txBody>
+      </p:sp>
+      <p:sp>
+        <p:nvSpPr>
+          <p:cNvPr id="12" name="">
+            <a:extLst xmlns:a="http://schemas.openxmlformats.org/drawingml/2006/main">
+              <a:ext uri="{FF2B5EF4-FFF2-40B4-BE49-F238E27FC236}">
+                <a16:creationId xmlns:a16="http://schemas.microsoft.com/office/drawing/2014/main" id="{6C334A61-599D-49E4-AE9A-A765658E9C0A}"/>
+              </a:ext>
+            </a:extLst>
+          </p:cNvPr>
+          <p:cNvSpPr>
+            <a:spLocks xmlns:a="http://schemas.openxmlformats.org/drawingml/2006/main" noGrp="1"/>
+          </p:cNvSpPr>
+          <p:nvPr/>
+        </p:nvSpPr>
+        <p:spPr>
+          <a:xfrm xmlns:a="http://schemas.openxmlformats.org/drawingml/2006/main">
+            <a:off x="1485900" y="3362325"/>
+            <a:ext cx="9239250" cy="619125"/>
+          </a:xfrm>
+          <a:prstGeom xmlns:a="http://schemas.openxmlformats.org/drawingml/2006/main" prst="rect">
+            <a:avLst/>
+          </a:prstGeom>
+          <a:noFill xmlns:a="http://schemas.openxmlformats.org/drawingml/2006/main"/>
+          <a:ln xmlns:a="http://schemas.openxmlformats.org/drawingml/2006/main" w="0">
+            <a:noFill/>
+            <a:prstDash val="solid"/>
+          </a:ln>
+        </p:spPr>
+        <p:txBody>
+          <a:bodyPr xmlns:a="http://schemas.openxmlformats.org/drawingml/2006/main"/>
+          <a:lstStyle xmlns:a="http://schemas.openxmlformats.org/drawingml/2006/main"/>
+          <a:p xmlns:a="http://schemas.openxmlformats.org/drawingml/2006/main">
+            <a:pPr>
+              <a:defRPr sz="1800">
+                <a:solidFill>
+                  <a:srgbClr val="182235"/>
+                </a:solidFill>
+              </a:defRPr>
+            </a:pPr>
+            <a:r>
+              <a:rPr sz="1800">
+                <a:solidFill>
+                  <a:srgbClr val="182235"/>
+                </a:solidFill>
+              </a:rPr>
+              <a:t>현재 API에 쉬운 오류 안내와 실행 방법을 추가해줘.</a:t>
+            </a:r>
+          </a:p>
+        </p:txBody>
+      </p:sp>
+    </p:spTree>
+    <p:extLst>
+      <p:ext uri="{BB962C8B-B14F-4D97-AF65-F5344CB8AC3E}">
+        <p14:creationId xmlns:p14="http://schemas.microsoft.com/office/powerpoint/2010/main" val="920870643"/>
+      </p:ext>
+    </p:extLst>
+  </p:cSld>
+</p:sld>
+</file>
+
+<file path=ppt/slides/slide14.xml><?xml version="1.0" encoding="utf-8"?>
+<p:sld xmlns:p="http://schemas.openxmlformats.org/presentationml/2006/main">
+  <p:cSld>
+    <p:bg>
+      <p:bgPr>
+        <a:solidFill xmlns:a="http://schemas.openxmlformats.org/drawingml/2006/main">
+          <a:srgbClr val="FFFCF8"/>
+        </a:solidFill>
+      </p:bgPr>
+    </p:bg>
+    <p:spTree>
+      <p:nvGrpSpPr>
+        <p:cNvPr id="1" name=""/>
+        <p:cNvGrpSpPr/>
+        <p:nvPr/>
+      </p:nvGrpSpPr>
+      <p:grpSpPr>
+        <a:xfrm xmlns:a="http://schemas.openxmlformats.org/drawingml/2006/main"/>
+      </p:grpSpPr>
+      <p:sp>
+        <p:nvSpPr>
+          <p:cNvPr id="7" name="">
+            <a:extLst xmlns:a="http://schemas.openxmlformats.org/drawingml/2006/main">
+              <a:ext uri="{FF2B5EF4-FFF2-40B4-BE49-F238E27FC236}">
+                <a16:creationId xmlns:a16="http://schemas.microsoft.com/office/drawing/2014/main" id="{47B30418-CBA0-4A3D-A06F-9512AD78F646}"/>
+              </a:ext>
+            </a:extLst>
+          </p:cNvPr>
+          <p:cNvSpPr>
+            <a:spLocks xmlns:a="http://schemas.openxmlformats.org/drawingml/2006/main" noGrp="1"/>
+          </p:cNvSpPr>
+          <p:nvPr/>
+        </p:nvSpPr>
+        <p:spPr>
+          <a:xfrm xmlns:a="http://schemas.openxmlformats.org/drawingml/2006/main">
+            <a:off x="0" y="0"/>
+            <a:ext cx="171450" cy="6858000"/>
+          </a:xfrm>
+          <a:prstGeom xmlns:a="http://schemas.openxmlformats.org/drawingml/2006/main" prst="rect">
+            <a:avLst/>
+          </a:prstGeom>
+          <a:solidFill xmlns:a="http://schemas.openxmlformats.org/drawingml/2006/main">
+            <a:srgbClr val="6657E8"/>
+          </a:solidFill>
+          <a:ln xmlns:a="http://schemas.openxmlformats.org/drawingml/2006/main" w="0">
+            <a:noFill/>
+            <a:prstDash val="solid"/>
+          </a:ln>
+        </p:spPr>
+      </p:sp>
+      <p:sp>
+        <p:nvSpPr>
+          <p:cNvPr id="2" name="">
+            <a:extLst xmlns:a="http://schemas.openxmlformats.org/drawingml/2006/main">
+              <a:ext uri="{FF2B5EF4-FFF2-40B4-BE49-F238E27FC236}">
+                <a16:creationId xmlns:a16="http://schemas.microsoft.com/office/drawing/2014/main" id="{E0DE2283-A4CA-4763-BF9C-08DC37766F7E}"/>
+              </a:ext>
+            </a:extLst>
+          </p:cNvPr>
+          <p:cNvSpPr>
+            <a:spLocks xmlns:a="http://schemas.openxmlformats.org/drawingml/2006/main" noGrp="1"/>
+          </p:cNvSpPr>
+          <p:nvPr/>
+        </p:nvSpPr>
+        <p:spPr>
+          <a:xfrm xmlns:a="http://schemas.openxmlformats.org/drawingml/2006/main">
+            <a:off x="647700" y="457200"/>
+            <a:ext cx="10096500" cy="552450"/>
+          </a:xfrm>
+          <a:prstGeom xmlns:a="http://schemas.openxmlformats.org/drawingml/2006/main" prst="rect">
+            <a:avLst/>
+          </a:prstGeom>
+          <a:noFill xmlns:a="http://schemas.openxmlformats.org/drawingml/2006/main"/>
+          <a:ln xmlns:a="http://schemas.openxmlformats.org/drawingml/2006/main" w="0">
+            <a:noFill/>
+            <a:prstDash val="solid"/>
+          </a:ln>
+        </p:spPr>
+        <p:txBody>
+          <a:bodyPr xmlns:a="http://schemas.openxmlformats.org/drawingml/2006/main"/>
+          <a:lstStyle xmlns:a="http://schemas.openxmlformats.org/drawingml/2006/main"/>
+          <a:p xmlns:a="http://schemas.openxmlformats.org/drawingml/2006/main">
+            <a:pPr>
+              <a:defRPr sz="2700" b="1">
+                <a:solidFill>
+                  <a:srgbClr val="182235"/>
+                </a:solidFill>
+              </a:defRPr>
+            </a:pPr>
+            <a:r>
+              <a:rPr sz="2700" b="1">
+                <a:solidFill>
+                  <a:srgbClr val="182235"/>
+                </a:solidFill>
+              </a:rPr>
+              <a:t>작은 응용이 내 실력으로 바뀌는 순간입니다</a:t>
+            </a:r>
+          </a:p>
+        </p:txBody>
+      </p:sp>
+      <p:sp>
+        <p:nvSpPr>
+          <p:cNvPr id="3" name="">
+            <a:extLst xmlns:a="http://schemas.openxmlformats.org/drawingml/2006/main">
+              <a:ext uri="{FF2B5EF4-FFF2-40B4-BE49-F238E27FC236}">
+                <a16:creationId xmlns:a16="http://schemas.microsoft.com/office/drawing/2014/main" id="{AFC501B6-3D11-4335-9BAF-5182F540612C}"/>
+              </a:ext>
+            </a:extLst>
+          </p:cNvPr>
+          <p:cNvSpPr>
+            <a:spLocks xmlns:a="http://schemas.openxmlformats.org/drawingml/2006/main" noGrp="1"/>
+          </p:cNvSpPr>
+          <p:nvPr/>
+        </p:nvSpPr>
+        <p:spPr>
+          <a:xfrm xmlns:a="http://schemas.openxmlformats.org/drawingml/2006/main">
+            <a:off x="666750" y="6419850"/>
+            <a:ext cx="10096500" cy="209550"/>
+          </a:xfrm>
+          <a:prstGeom xmlns:a="http://schemas.openxmlformats.org/drawingml/2006/main" prst="rect">
+            <a:avLst/>
+          </a:prstGeom>
+          <a:noFill xmlns:a="http://schemas.openxmlformats.org/drawingml/2006/main"/>
+          <a:ln xmlns:a="http://schemas.openxmlformats.org/drawingml/2006/main" w="0">
+            <a:noFill/>
+            <a:prstDash val="solid"/>
+          </a:ln>
+        </p:spPr>
+        <p:txBody>
+          <a:bodyPr xmlns:a="http://schemas.openxmlformats.org/drawingml/2006/main"/>
+          <a:lstStyle xmlns:a="http://schemas.openxmlformats.org/drawingml/2006/main"/>
+          <a:p xmlns:a="http://schemas.openxmlformats.org/drawingml/2006/main">
+            <a:pPr>
+              <a:defRPr sz="975">
+                <a:solidFill>
+                  <a:srgbClr val="657083"/>
+                </a:solidFill>
+              </a:defRPr>
+            </a:pPr>
+            <a:r>
+              <a:rPr sz="975">
+                <a:solidFill>
+                  <a:srgbClr val="657083"/>
+                </a:solidFill>
+              </a:rPr>
+              <a:t>EDU 웹개발 교육 플랫폼  ·  14</a:t>
+            </a:r>
+          </a:p>
+        </p:txBody>
+      </p:sp>
+      <p:sp>
+        <p:nvSpPr>
+          <p:cNvPr id="4" name="">
+            <a:extLst xmlns:a="http://schemas.openxmlformats.org/drawingml/2006/main">
+              <a:ext uri="{FF2B5EF4-FFF2-40B4-BE49-F238E27FC236}">
+                <a16:creationId xmlns:a16="http://schemas.microsoft.com/office/drawing/2014/main" id="{3B94C1EF-4493-46C2-88AF-D59415C1C4CC}"/>
+              </a:ext>
+            </a:extLst>
+          </p:cNvPr>
+          <p:cNvSpPr>
+            <a:spLocks xmlns:a="http://schemas.openxmlformats.org/drawingml/2006/main" noGrp="1"/>
+          </p:cNvSpPr>
+          <p:nvPr/>
+        </p:nvSpPr>
+        <p:spPr>
+          <a:xfrm xmlns:a="http://schemas.openxmlformats.org/drawingml/2006/main">
+            <a:off x="685800" y="1524000"/>
+            <a:ext cx="10820400" cy="2381250"/>
+          </a:xfrm>
+          <a:prstGeom xmlns:a="http://schemas.openxmlformats.org/drawingml/2006/main" prst="roundRect">
+            <a:avLst>
+              <a:gd name="adj" fmla="val 4800"/>
+            </a:avLst>
+          </a:prstGeom>
+          <a:solidFill xmlns:a="http://schemas.openxmlformats.org/drawingml/2006/main">
+            <a:srgbClr val="EAF8F3"/>
+          </a:solidFill>
+          <a:ln xmlns:a="http://schemas.openxmlformats.org/drawingml/2006/main" w="0">
+            <a:noFill/>
+            <a:prstDash val="solid"/>
+          </a:ln>
+        </p:spPr>
+      </p:sp>
+      <p:sp>
+        <p:nvSpPr>
+          <p:cNvPr id="5" name="">
+            <a:extLst xmlns:a="http://schemas.openxmlformats.org/drawingml/2006/main">
+              <a:ext uri="{FF2B5EF4-FFF2-40B4-BE49-F238E27FC236}">
+                <a16:creationId xmlns:a16="http://schemas.microsoft.com/office/drawing/2014/main" id="{78259F17-FB52-4A08-A336-40E97B2074C8}"/>
+              </a:ext>
+            </a:extLst>
+          </p:cNvPr>
+          <p:cNvSpPr>
+            <a:spLocks xmlns:a="http://schemas.openxmlformats.org/drawingml/2006/main" noGrp="1"/>
+          </p:cNvSpPr>
+          <p:nvPr/>
+        </p:nvSpPr>
+        <p:spPr>
+          <a:xfrm xmlns:a="http://schemas.openxmlformats.org/drawingml/2006/main">
+            <a:off x="1123950" y="2076450"/>
+            <a:ext cx="9944100" cy="1238250"/>
+          </a:xfrm>
+          <a:prstGeom xmlns:a="http://schemas.openxmlformats.org/drawingml/2006/main" prst="rect">
+            <a:avLst/>
+          </a:prstGeom>
+          <a:noFill xmlns:a="http://schemas.openxmlformats.org/drawingml/2006/main"/>
+          <a:ln xmlns:a="http://schemas.openxmlformats.org/drawingml/2006/main" w="0">
+            <a:noFill/>
+            <a:prstDash val="solid"/>
+          </a:ln>
+        </p:spPr>
+        <p:txBody>
+          <a:bodyPr xmlns:a="http://schemas.openxmlformats.org/drawingml/2006/main"/>
+          <a:lstStyle xmlns:a="http://schemas.openxmlformats.org/drawingml/2006/main"/>
+          <a:p xmlns:a="http://schemas.openxmlformats.org/drawingml/2006/main">
+            <a:pPr>
+              <a:defRPr sz="2175" b="1">
+                <a:solidFill>
+                  <a:srgbClr val="182235"/>
+                </a:solidFill>
+              </a:defRPr>
+            </a:pPr>
+            <a:r>
+              <a:rPr sz="2175" b="1">
+                <a:solidFill>
+                  <a:srgbClr val="182235"/>
+                </a:solidFill>
+              </a:rPr>
+              <a:t>각 자료에 duration 값을 추가하고 새 자료 한 건을 더 넣어 보세요.</a:t>
+            </a:r>
+          </a:p>
+        </p:txBody>
+      </p:sp>
+      <p:sp>
+        <p:nvSpPr>
+          <p:cNvPr id="6" name="">
+            <a:extLst xmlns:a="http://schemas.openxmlformats.org/drawingml/2006/main">
+              <a:ext uri="{FF2B5EF4-FFF2-40B4-BE49-F238E27FC236}">
+                <a16:creationId xmlns:a16="http://schemas.microsoft.com/office/drawing/2014/main" id="{FE5B88D6-EAA2-4318-92C6-AEE0F76FC8D9}"/>
+              </a:ext>
+            </a:extLst>
+          </p:cNvPr>
+          <p:cNvSpPr>
+            <a:spLocks xmlns:a="http://schemas.openxmlformats.org/drawingml/2006/main" noGrp="1"/>
+          </p:cNvSpPr>
+          <p:nvPr/>
+        </p:nvSpPr>
+        <p:spPr>
+          <a:xfrm xmlns:a="http://schemas.openxmlformats.org/drawingml/2006/main">
+            <a:off x="1143000" y="4524375"/>
+            <a:ext cx="9525000" cy="571500"/>
+          </a:xfrm>
+          <a:prstGeom xmlns:a="http://schemas.openxmlformats.org/drawingml/2006/main" prst="rect">
+            <a:avLst/>
+          </a:prstGeom>
+          <a:noFill xmlns:a="http://schemas.openxmlformats.org/drawingml/2006/main"/>
+          <a:ln xmlns:a="http://schemas.openxmlformats.org/drawingml/2006/main" w="0">
+            <a:noFill/>
+            <a:prstDash val="solid"/>
+          </a:ln>
+        </p:spPr>
+        <p:txBody>
+          <a:bodyPr xmlns:a="http://schemas.openxmlformats.org/drawingml/2006/main"/>
+          <a:lstStyle xmlns:a="http://schemas.openxmlformats.org/drawingml/2006/main"/>
+          <a:p xmlns:a="http://schemas.openxmlformats.org/drawingml/2006/main">
+            <a:pPr>
+              <a:defRPr sz="1650">
+                <a:solidFill>
+                  <a:srgbClr val="657083"/>
+                </a:solidFill>
+              </a:defRPr>
+            </a:pPr>
+            <a:r>
+              <a:rPr sz="1650">
+                <a:solidFill>
+                  <a:srgbClr val="657083"/>
+                </a:solidFill>
+              </a:rPr>
+              <a:t>완성한 뒤 원래 결과와 무엇이 달라졌는지 한 문장으로 설명해 보세요.</a:t>
+            </a:r>
+          </a:p>
+        </p:txBody>
+      </p:sp>
+    </p:spTree>
+    <p:extLst>
+      <p:ext uri="{BB962C8B-B14F-4D97-AF65-F5344CB8AC3E}">
+        <p14:creationId xmlns:p14="http://schemas.microsoft.com/office/powerpoint/2010/main" val="931307077"/>
+      </p:ext>
+    </p:extLst>
+  </p:cSld>
+</p:sld>
+</file>
+
+<file path=ppt/slides/slide15.xml><?xml version="1.0" encoding="utf-8"?>
+<p:sld xmlns:p="http://schemas.openxmlformats.org/presentationml/2006/main">
+  <p:cSld>
+    <p:bg>
+      <p:bgPr>
+        <a:solidFill xmlns:a="http://schemas.openxmlformats.org/drawingml/2006/main">
+          <a:srgbClr val="FFFCF8"/>
+        </a:solidFill>
+      </p:bgPr>
+    </p:bg>
+    <p:spTree>
+      <p:nvGrpSpPr>
+        <p:cNvPr id="1" name=""/>
+        <p:cNvGrpSpPr/>
+        <p:nvPr/>
+      </p:nvGrpSpPr>
+      <p:grpSpPr>
+        <a:xfrm xmlns:a="http://schemas.openxmlformats.org/drawingml/2006/main"/>
+      </p:grpSpPr>
+      <p:sp>
+        <p:nvSpPr>
+          <p:cNvPr id="10" name="">
+            <a:extLst xmlns:a="http://schemas.openxmlformats.org/drawingml/2006/main">
+              <a:ext uri="{FF2B5EF4-FFF2-40B4-BE49-F238E27FC236}">
+                <a16:creationId xmlns:a16="http://schemas.microsoft.com/office/drawing/2014/main" id="{D46E66F8-3BB6-4C6D-B43D-09414843074E}"/>
+              </a:ext>
+            </a:extLst>
+          </p:cNvPr>
+          <p:cNvSpPr>
+            <a:spLocks xmlns:a="http://schemas.openxmlformats.org/drawingml/2006/main" noGrp="1"/>
+          </p:cNvSpPr>
+          <p:nvPr/>
+        </p:nvSpPr>
+        <p:spPr>
+          <a:xfrm xmlns:a="http://schemas.openxmlformats.org/drawingml/2006/main">
+            <a:off x="0" y="0"/>
+            <a:ext cx="171450" cy="6858000"/>
+          </a:xfrm>
+          <a:prstGeom xmlns:a="http://schemas.openxmlformats.org/drawingml/2006/main" prst="rect">
+            <a:avLst/>
+          </a:prstGeom>
+          <a:solidFill xmlns:a="http://schemas.openxmlformats.org/drawingml/2006/main">
+            <a:srgbClr val="6657E8"/>
+          </a:solidFill>
+          <a:ln xmlns:a="http://schemas.openxmlformats.org/drawingml/2006/main" w="0">
+            <a:noFill/>
+            <a:prstDash val="solid"/>
+          </a:ln>
+        </p:spPr>
+      </p:sp>
+      <p:sp>
+        <p:nvSpPr>
+          <p:cNvPr id="2" name="">
+            <a:extLst xmlns:a="http://schemas.openxmlformats.org/drawingml/2006/main">
+              <a:ext uri="{FF2B5EF4-FFF2-40B4-BE49-F238E27FC236}">
+                <a16:creationId xmlns:a16="http://schemas.microsoft.com/office/drawing/2014/main" id="{16E71C4B-0BAA-4B2D-8EDA-D14FA2DD95FB}"/>
+              </a:ext>
+            </a:extLst>
+          </p:cNvPr>
+          <p:cNvSpPr>
+            <a:spLocks xmlns:a="http://schemas.openxmlformats.org/drawingml/2006/main" noGrp="1"/>
+          </p:cNvSpPr>
+          <p:nvPr/>
+        </p:nvSpPr>
+        <p:spPr>
+          <a:xfrm xmlns:a="http://schemas.openxmlformats.org/drawingml/2006/main">
+            <a:off x="647700" y="457200"/>
+            <a:ext cx="10096500" cy="552450"/>
+          </a:xfrm>
+          <a:prstGeom xmlns:a="http://schemas.openxmlformats.org/drawingml/2006/main" prst="rect">
+            <a:avLst/>
+          </a:prstGeom>
+          <a:noFill xmlns:a="http://schemas.openxmlformats.org/drawingml/2006/main"/>
+          <a:ln xmlns:a="http://schemas.openxmlformats.org/drawingml/2006/main" w="0">
+            <a:noFill/>
+            <a:prstDash val="solid"/>
+          </a:ln>
+        </p:spPr>
+        <p:txBody>
+          <a:bodyPr xmlns:a="http://schemas.openxmlformats.org/drawingml/2006/main"/>
+          <a:lstStyle xmlns:a="http://schemas.openxmlformats.org/drawingml/2006/main"/>
+          <a:p xmlns:a="http://schemas.openxmlformats.org/drawingml/2006/main">
+            <a:pPr>
+              <a:defRPr sz="2700" b="1">
+                <a:solidFill>
+                  <a:srgbClr val="182235"/>
+                </a:solidFill>
+              </a:defRPr>
+            </a:pPr>
+            <a:r>
+              <a:rPr sz="2700" b="1">
+                <a:solidFill>
+                  <a:srgbClr val="182235"/>
+                </a:solidFill>
+              </a:rPr>
+              <a:t>다섯 문제로 오늘 배운 내용을 확인하세요</a:t>
+            </a:r>
+          </a:p>
+        </p:txBody>
+      </p:sp>
+      <p:sp>
+        <p:nvSpPr>
+          <p:cNvPr id="3" name="">
+            <a:extLst xmlns:a="http://schemas.openxmlformats.org/drawingml/2006/main">
+              <a:ext uri="{FF2B5EF4-FFF2-40B4-BE49-F238E27FC236}">
+                <a16:creationId xmlns:a16="http://schemas.microsoft.com/office/drawing/2014/main" id="{4FD731FE-6499-4E92-9CC7-A4DC3F7026F5}"/>
+              </a:ext>
+            </a:extLst>
+          </p:cNvPr>
+          <p:cNvSpPr>
+            <a:spLocks xmlns:a="http://schemas.openxmlformats.org/drawingml/2006/main" noGrp="1"/>
+          </p:cNvSpPr>
+          <p:nvPr/>
+        </p:nvSpPr>
+        <p:spPr>
+          <a:xfrm xmlns:a="http://schemas.openxmlformats.org/drawingml/2006/main">
+            <a:off x="666750" y="6419850"/>
+            <a:ext cx="10096500" cy="209550"/>
+          </a:xfrm>
+          <a:prstGeom xmlns:a="http://schemas.openxmlformats.org/drawingml/2006/main" prst="rect">
+            <a:avLst/>
+          </a:prstGeom>
+          <a:noFill xmlns:a="http://schemas.openxmlformats.org/drawingml/2006/main"/>
+          <a:ln xmlns:a="http://schemas.openxmlformats.org/drawingml/2006/main" w="0">
+            <a:noFill/>
+            <a:prstDash val="solid"/>
+          </a:ln>
+        </p:spPr>
+        <p:txBody>
+          <a:bodyPr xmlns:a="http://schemas.openxmlformats.org/drawingml/2006/main"/>
+          <a:lstStyle xmlns:a="http://schemas.openxmlformats.org/drawingml/2006/main"/>
+          <a:p xmlns:a="http://schemas.openxmlformats.org/drawingml/2006/main">
+            <a:pPr>
+              <a:defRPr sz="975">
+                <a:solidFill>
+                  <a:srgbClr val="657083"/>
+                </a:solidFill>
+              </a:defRPr>
+            </a:pPr>
+            <a:r>
+              <a:rPr sz="975">
+                <a:solidFill>
+                  <a:srgbClr val="657083"/>
+                </a:solidFill>
+              </a:rPr>
+              <a:t>EDU 웹개발 교육 플랫폼  ·  15</a:t>
+            </a:r>
+          </a:p>
+        </p:txBody>
+      </p:sp>
+      <p:sp>
+        <p:nvSpPr>
+          <p:cNvPr id="4" name="">
+            <a:extLst xmlns:a="http://schemas.openxmlformats.org/drawingml/2006/main">
+              <a:ext uri="{FF2B5EF4-FFF2-40B4-BE49-F238E27FC236}">
+                <a16:creationId xmlns:a16="http://schemas.microsoft.com/office/drawing/2014/main" id="{A0CE39A8-7672-4C6C-BFB5-F5B3EC48A056}"/>
+              </a:ext>
+            </a:extLst>
+          </p:cNvPr>
+          <p:cNvSpPr>
+            <a:spLocks xmlns:a="http://schemas.openxmlformats.org/drawingml/2006/main" noGrp="1"/>
+          </p:cNvSpPr>
+          <p:nvPr/>
+        </p:nvSpPr>
+        <p:spPr>
+          <a:xfrm xmlns:a="http://schemas.openxmlformats.org/drawingml/2006/main">
+            <a:off x="857250" y="1285875"/>
+            <a:ext cx="10287000" cy="552450"/>
+          </a:xfrm>
+          <a:prstGeom xmlns:a="http://schemas.openxmlformats.org/drawingml/2006/main" prst="rect">
+            <a:avLst/>
+          </a:prstGeom>
+          <a:noFill xmlns:a="http://schemas.openxmlformats.org/drawingml/2006/main"/>
+          <a:ln xmlns:a="http://schemas.openxmlformats.org/drawingml/2006/main" w="0">
+            <a:noFill/>
+            <a:prstDash val="solid"/>
+          </a:ln>
+        </p:spPr>
+        <p:txBody>
+          <a:bodyPr xmlns:a="http://schemas.openxmlformats.org/drawingml/2006/main"/>
+          <a:lstStyle xmlns:a="http://schemas.openxmlformats.org/drawingml/2006/main"/>
+          <a:p xmlns:a="http://schemas.openxmlformats.org/drawingml/2006/main">
+            <a:pPr>
+              <a:defRPr sz="1650" b="0">
+                <a:solidFill>
+                  <a:srgbClr val="182235"/>
+                </a:solidFill>
+              </a:defRPr>
+            </a:pPr>
+            <a:r>
+              <a:rPr sz="1650" b="0">
+                <a:solidFill>
+                  <a:srgbClr val="182235"/>
+                </a:solidFill>
+              </a:rPr>
+              <a:t>1. API는 무엇인가요?</a:t>
+            </a:r>
+          </a:p>
+        </p:txBody>
+      </p:sp>
+      <p:sp>
+        <p:nvSpPr>
+          <p:cNvPr id="5" name="">
+            <a:extLst xmlns:a="http://schemas.openxmlformats.org/drawingml/2006/main">
+              <a:ext uri="{FF2B5EF4-FFF2-40B4-BE49-F238E27FC236}">
+                <a16:creationId xmlns:a16="http://schemas.microsoft.com/office/drawing/2014/main" id="{2A6483A3-4144-4278-8573-6F87F8BB6D1D}"/>
+              </a:ext>
+            </a:extLst>
+          </p:cNvPr>
+          <p:cNvSpPr>
+            <a:spLocks xmlns:a="http://schemas.openxmlformats.org/drawingml/2006/main" noGrp="1"/>
+          </p:cNvSpPr>
+          <p:nvPr/>
+        </p:nvSpPr>
+        <p:spPr>
+          <a:xfrm xmlns:a="http://schemas.openxmlformats.org/drawingml/2006/main">
+            <a:off x="857250" y="2162175"/>
+            <a:ext cx="10287000" cy="552450"/>
+          </a:xfrm>
+          <a:prstGeom xmlns:a="http://schemas.openxmlformats.org/drawingml/2006/main" prst="rect">
+            <a:avLst/>
+          </a:prstGeom>
+          <a:noFill xmlns:a="http://schemas.openxmlformats.org/drawingml/2006/main"/>
+          <a:ln xmlns:a="http://schemas.openxmlformats.org/drawingml/2006/main" w="0">
+            <a:noFill/>
+            <a:prstDash val="solid"/>
+          </a:ln>
+        </p:spPr>
+        <p:txBody>
+          <a:bodyPr xmlns:a="http://schemas.openxmlformats.org/drawingml/2006/main"/>
+          <a:lstStyle xmlns:a="http://schemas.openxmlformats.org/drawingml/2006/main"/>
+          <a:p xmlns:a="http://schemas.openxmlformats.org/drawingml/2006/main">
+            <a:pPr>
+              <a:defRPr sz="1650" b="0">
+                <a:solidFill>
+                  <a:srgbClr val="182235"/>
+                </a:solidFill>
+              </a:defRPr>
+            </a:pPr>
+            <a:r>
+              <a:rPr sz="1650" b="0">
+                <a:solidFill>
+                  <a:srgbClr val="182235"/>
+                </a:solidFill>
+              </a:rPr>
+              <a:t>2. JSON은 무엇인가요?</a:t>
+            </a:r>
+          </a:p>
+        </p:txBody>
+      </p:sp>
+      <p:sp>
+        <p:nvSpPr>
+          <p:cNvPr id="6" name="">
+            <a:extLst xmlns:a="http://schemas.openxmlformats.org/drawingml/2006/main">
+              <a:ext uri="{FF2B5EF4-FFF2-40B4-BE49-F238E27FC236}">
+                <a16:creationId xmlns:a16="http://schemas.microsoft.com/office/drawing/2014/main" id="{370AE64D-57EA-4271-83F9-DB24954565F4}"/>
+              </a:ext>
+            </a:extLst>
+          </p:cNvPr>
+          <p:cNvSpPr>
+            <a:spLocks xmlns:a="http://schemas.openxmlformats.org/drawingml/2006/main" noGrp="1"/>
+          </p:cNvSpPr>
+          <p:nvPr/>
+        </p:nvSpPr>
+        <p:spPr>
+          <a:xfrm xmlns:a="http://schemas.openxmlformats.org/drawingml/2006/main">
+            <a:off x="857250" y="3038475"/>
+            <a:ext cx="10287000" cy="552450"/>
+          </a:xfrm>
+          <a:prstGeom xmlns:a="http://schemas.openxmlformats.org/drawingml/2006/main" prst="rect">
+            <a:avLst/>
+          </a:prstGeom>
+          <a:noFill xmlns:a="http://schemas.openxmlformats.org/drawingml/2006/main"/>
+          <a:ln xmlns:a="http://schemas.openxmlformats.org/drawingml/2006/main" w="0">
+            <a:noFill/>
+            <a:prstDash val="solid"/>
+          </a:ln>
+        </p:spPr>
+        <p:txBody>
+          <a:bodyPr xmlns:a="http://schemas.openxmlformats.org/drawingml/2006/main"/>
+          <a:lstStyle xmlns:a="http://schemas.openxmlformats.org/drawingml/2006/main"/>
+          <a:p xmlns:a="http://schemas.openxmlformats.org/drawingml/2006/main">
+            <a:pPr>
+              <a:defRPr sz="1650" b="0">
+                <a:solidFill>
+                  <a:srgbClr val="182235"/>
+                </a:solidFill>
+              </a:defRPr>
+            </a:pPr>
+            <a:r>
+              <a:rPr sz="1650" b="0">
+                <a:solidFill>
+                  <a:srgbClr val="182235"/>
+                </a:solidFill>
+              </a:rPr>
+              <a:t>3. GET은 언제 사용하나요?</a:t>
+            </a:r>
+          </a:p>
+        </p:txBody>
+      </p:sp>
+      <p:sp>
+        <p:nvSpPr>
+          <p:cNvPr id="7" name="">
+            <a:extLst xmlns:a="http://schemas.openxmlformats.org/drawingml/2006/main">
+              <a:ext uri="{FF2B5EF4-FFF2-40B4-BE49-F238E27FC236}">
+                <a16:creationId xmlns:a16="http://schemas.microsoft.com/office/drawing/2014/main" id="{28350D60-38FA-48AB-9FF7-42306B80DAE9}"/>
+              </a:ext>
+            </a:extLst>
+          </p:cNvPr>
+          <p:cNvSpPr>
+            <a:spLocks xmlns:a="http://schemas.openxmlformats.org/drawingml/2006/main" noGrp="1"/>
+          </p:cNvSpPr>
+          <p:nvPr/>
+        </p:nvSpPr>
+        <p:spPr>
+          <a:xfrm xmlns:a="http://schemas.openxmlformats.org/drawingml/2006/main">
+            <a:off x="857250" y="3914775"/>
+            <a:ext cx="10287000" cy="552450"/>
+          </a:xfrm>
+          <a:prstGeom xmlns:a="http://schemas.openxmlformats.org/drawingml/2006/main" prst="rect">
+            <a:avLst/>
+          </a:prstGeom>
+          <a:noFill xmlns:a="http://schemas.openxmlformats.org/drawingml/2006/main"/>
+          <a:ln xmlns:a="http://schemas.openxmlformats.org/drawingml/2006/main" w="0">
+            <a:noFill/>
+            <a:prstDash val="solid"/>
+          </a:ln>
+        </p:spPr>
+        <p:txBody>
+          <a:bodyPr xmlns:a="http://schemas.openxmlformats.org/drawingml/2006/main"/>
+          <a:lstStyle xmlns:a="http://schemas.openxmlformats.org/drawingml/2006/main"/>
+          <a:p xmlns:a="http://schemas.openxmlformats.org/drawingml/2006/main">
+            <a:pPr>
+              <a:defRPr sz="1650" b="0">
+                <a:solidFill>
+                  <a:srgbClr val="182235"/>
+                </a:solidFill>
+              </a:defRPr>
+            </a:pPr>
+            <a:r>
+              <a:rPr sz="1650" b="0">
+                <a:solidFill>
+                  <a:srgbClr val="182235"/>
+                </a:solidFill>
+              </a:rPr>
+              <a:t>4. res.json의 역할은?</a:t>
+            </a:r>
+          </a:p>
+        </p:txBody>
+      </p:sp>
+      <p:sp>
+        <p:nvSpPr>
+          <p:cNvPr id="8" name="">
+            <a:extLst xmlns:a="http://schemas.openxmlformats.org/drawingml/2006/main">
+              <a:ext uri="{FF2B5EF4-FFF2-40B4-BE49-F238E27FC236}">
+                <a16:creationId xmlns:a16="http://schemas.microsoft.com/office/drawing/2014/main" id="{251083A2-F514-436F-8228-D52A9F05F834}"/>
+              </a:ext>
+            </a:extLst>
+          </p:cNvPr>
+          <p:cNvSpPr>
+            <a:spLocks xmlns:a="http://schemas.openxmlformats.org/drawingml/2006/main" noGrp="1"/>
+          </p:cNvSpPr>
+          <p:nvPr/>
+        </p:nvSpPr>
+        <p:spPr>
+          <a:xfrm xmlns:a="http://schemas.openxmlformats.org/drawingml/2006/main">
+            <a:off x="857250" y="4791075"/>
+            <a:ext cx="10287000" cy="552450"/>
+          </a:xfrm>
+          <a:prstGeom xmlns:a="http://schemas.openxmlformats.org/drawingml/2006/main" prst="rect">
+            <a:avLst/>
+          </a:prstGeom>
+          <a:noFill xmlns:a="http://schemas.openxmlformats.org/drawingml/2006/main"/>
+          <a:ln xmlns:a="http://schemas.openxmlformats.org/drawingml/2006/main" w="0">
+            <a:noFill/>
+            <a:prstDash val="solid"/>
+          </a:ln>
+        </p:spPr>
+        <p:txBody>
+          <a:bodyPr xmlns:a="http://schemas.openxmlformats.org/drawingml/2006/main"/>
+          <a:lstStyle xmlns:a="http://schemas.openxmlformats.org/drawingml/2006/main"/>
+          <a:p xmlns:a="http://schemas.openxmlformats.org/drawingml/2006/main">
+            <a:pPr>
+              <a:defRPr sz="1650" b="1">
+                <a:solidFill>
+                  <a:srgbClr val="182235"/>
+                </a:solidFill>
+              </a:defRPr>
+            </a:pPr>
+            <a:r>
+              <a:rPr sz="1650" b="1">
+                <a:solidFill>
+                  <a:srgbClr val="182235"/>
+                </a:solidFill>
+              </a:rPr>
+              <a:t>5. 완료 기준은?</a:t>
+            </a:r>
+          </a:p>
+        </p:txBody>
+      </p:sp>
+      <p:sp>
+        <p:nvSpPr>
+          <p:cNvPr id="9" name="">
+            <a:extLst xmlns:a="http://schemas.openxmlformats.org/drawingml/2006/main">
+              <a:ext uri="{FF2B5EF4-FFF2-40B4-BE49-F238E27FC236}">
+                <a16:creationId xmlns:a16="http://schemas.microsoft.com/office/drawing/2014/main" id="{FE3540C2-E6B3-4BEF-98B7-B31F835D606A}"/>
+              </a:ext>
+            </a:extLst>
+          </p:cNvPr>
+          <p:cNvSpPr>
+            <a:spLocks xmlns:a="http://schemas.openxmlformats.org/drawingml/2006/main" noGrp="1"/>
+          </p:cNvSpPr>
+          <p:nvPr/>
+        </p:nvSpPr>
+        <p:spPr>
+          <a:xfrm xmlns:a="http://schemas.openxmlformats.org/drawingml/2006/main">
+            <a:off x="857250" y="5857875"/>
+            <a:ext cx="10001250" cy="304800"/>
+          </a:xfrm>
+          <a:prstGeom xmlns:a="http://schemas.openxmlformats.org/drawingml/2006/main" prst="rect">
+            <a:avLst/>
+          </a:prstGeom>
+          <a:noFill xmlns:a="http://schemas.openxmlformats.org/drawingml/2006/main"/>
+          <a:ln xmlns:a="http://schemas.openxmlformats.org/drawingml/2006/main" w="0">
+            <a:noFill/>
+            <a:prstDash val="solid"/>
+          </a:ln>
+        </p:spPr>
+        <p:txBody>
+          <a:bodyPr xmlns:a="http://schemas.openxmlformats.org/drawingml/2006/main"/>
+          <a:lstStyle xmlns:a="http://schemas.openxmlformats.org/drawingml/2006/main"/>
+          <a:p xmlns:a="http://schemas.openxmlformats.org/drawingml/2006/main">
+            <a:pPr>
+              <a:defRPr sz="1350" b="1">
+                <a:solidFill>
+                  <a:srgbClr val="6657E8"/>
+                </a:solidFill>
+              </a:defRPr>
+            </a:pPr>
+            <a:r>
+              <a:rPr sz="1350" b="1">
+                <a:solidFill>
+                  <a:srgbClr val="6657E8"/>
+                </a:solidFill>
+              </a:rPr>
+              <a:t>정답과 해설은 EDU 홈페이지 상세 자료에서 확인할 수 있습니다.</a:t>
+            </a:r>
+          </a:p>
+        </p:txBody>
+      </p:sp>
+    </p:spTree>
+    <p:extLst>
+      <p:ext uri="{BB962C8B-B14F-4D97-AF65-F5344CB8AC3E}">
+        <p14:creationId xmlns:p14="http://schemas.microsoft.com/office/powerpoint/2010/main" val="709512278"/>
       </p:ext>
     </p:extLst>
   </p:cSld>
@@ -1896,7 +5388,7 @@
           <p:cNvPr id="12" name="">
             <a:extLst xmlns:a="http://schemas.openxmlformats.org/drawingml/2006/main">
               <a:ext uri="{FF2B5EF4-FFF2-40B4-BE49-F238E27FC236}">
-                <a16:creationId xmlns:a16="http://schemas.microsoft.com/office/drawing/2014/main" id="{57276375-7288-4944-A4C9-1201C5A8ACC4}"/>
+                <a16:creationId xmlns:a16="http://schemas.microsoft.com/office/drawing/2014/main" id="{4DAF561A-E1DC-4A7A-A246-B89E64E6E992}"/>
               </a:ext>
             </a:extLst>
           </p:cNvPr>
@@ -1927,7 +5419,7 @@
           <p:cNvPr id="2" name="">
             <a:extLst xmlns:a="http://schemas.openxmlformats.org/drawingml/2006/main">
               <a:ext uri="{FF2B5EF4-FFF2-40B4-BE49-F238E27FC236}">
-                <a16:creationId xmlns:a16="http://schemas.microsoft.com/office/drawing/2014/main" id="{349C8F50-137C-4291-A5BF-EA5B8AD4D018}"/>
+                <a16:creationId xmlns:a16="http://schemas.microsoft.com/office/drawing/2014/main" id="{FA6FC63B-BFDB-43B0-A68B-A717C767DBF5}"/>
               </a:ext>
             </a:extLst>
           </p:cNvPr>
@@ -1977,7 +5469,7 @@
           <p:cNvPr id="3" name="">
             <a:extLst xmlns:a="http://schemas.openxmlformats.org/drawingml/2006/main">
               <a:ext uri="{FF2B5EF4-FFF2-40B4-BE49-F238E27FC236}">
-                <a16:creationId xmlns:a16="http://schemas.microsoft.com/office/drawing/2014/main" id="{93863724-5BBC-4129-89CB-687C32C8570A}"/>
+                <a16:creationId xmlns:a16="http://schemas.microsoft.com/office/drawing/2014/main" id="{355BEDC1-FFB0-4345-802E-A7ADC7A229F8}"/>
               </a:ext>
             </a:extLst>
           </p:cNvPr>
@@ -2027,7 +5519,7 @@
           <p:cNvPr id="4" name="">
             <a:extLst xmlns:a="http://schemas.openxmlformats.org/drawingml/2006/main">
               <a:ext uri="{FF2B5EF4-FFF2-40B4-BE49-F238E27FC236}">
-                <a16:creationId xmlns:a16="http://schemas.microsoft.com/office/drawing/2014/main" id="{F3E0655C-9116-4F9D-A4CD-B3ACDB9138DA}"/>
+                <a16:creationId xmlns:a16="http://schemas.microsoft.com/office/drawing/2014/main" id="{11634267-286E-4974-B324-3174E890E4E1}"/>
               </a:ext>
             </a:extLst>
           </p:cNvPr>
@@ -2060,7 +5552,7 @@
           <p:cNvPr id="5" name="">
             <a:extLst xmlns:a="http://schemas.openxmlformats.org/drawingml/2006/main">
               <a:ext uri="{FF2B5EF4-FFF2-40B4-BE49-F238E27FC236}">
-                <a16:creationId xmlns:a16="http://schemas.microsoft.com/office/drawing/2014/main" id="{7805A8DF-A9B5-4667-965F-AACF4AA6A458}"/>
+                <a16:creationId xmlns:a16="http://schemas.microsoft.com/office/drawing/2014/main" id="{977DF0D1-72AF-4526-A68C-A0D3B433DF87}"/>
               </a:ext>
             </a:extLst>
           </p:cNvPr>
@@ -2110,7 +5602,7 @@
           <p:cNvPr id="6" name="">
             <a:extLst xmlns:a="http://schemas.openxmlformats.org/drawingml/2006/main">
               <a:ext uri="{FF2B5EF4-FFF2-40B4-BE49-F238E27FC236}">
-                <a16:creationId xmlns:a16="http://schemas.microsoft.com/office/drawing/2014/main" id="{A0B4B664-22CE-4A4B-A114-A14244854A9C}"/>
+                <a16:creationId xmlns:a16="http://schemas.microsoft.com/office/drawing/2014/main" id="{65FC1D10-443B-4C55-ACD2-B3713DCC9198}"/>
               </a:ext>
             </a:extLst>
           </p:cNvPr>
@@ -2160,7 +5652,7 @@
           <p:cNvPr id="7" name="">
             <a:extLst xmlns:a="http://schemas.openxmlformats.org/drawingml/2006/main">
               <a:ext uri="{FF2B5EF4-FFF2-40B4-BE49-F238E27FC236}">
-                <a16:creationId xmlns:a16="http://schemas.microsoft.com/office/drawing/2014/main" id="{4D830778-04C5-4F7F-930E-DA1DA91CB0C9}"/>
+                <a16:creationId xmlns:a16="http://schemas.microsoft.com/office/drawing/2014/main" id="{C689CF49-7CB9-458F-AE20-49D2FA3028B7}"/>
               </a:ext>
             </a:extLst>
           </p:cNvPr>
@@ -2193,7 +5685,7 @@
           <p:cNvPr id="8" name="">
             <a:extLst xmlns:a="http://schemas.openxmlformats.org/drawingml/2006/main">
               <a:ext uri="{FF2B5EF4-FFF2-40B4-BE49-F238E27FC236}">
-                <a16:creationId xmlns:a16="http://schemas.microsoft.com/office/drawing/2014/main" id="{1C8F49C8-3D25-4727-B661-60ACBC021FCD}"/>
+                <a16:creationId xmlns:a16="http://schemas.microsoft.com/office/drawing/2014/main" id="{DEB0A6C9-3F3A-42A9-BEAD-E4F123E496D9}"/>
               </a:ext>
             </a:extLst>
           </p:cNvPr>
@@ -2243,7 +5735,7 @@
           <p:cNvPr id="9" name="">
             <a:extLst xmlns:a="http://schemas.openxmlformats.org/drawingml/2006/main">
               <a:ext uri="{FF2B5EF4-FFF2-40B4-BE49-F238E27FC236}">
-                <a16:creationId xmlns:a16="http://schemas.microsoft.com/office/drawing/2014/main" id="{E85B34FF-0D4A-4281-95E1-14098BC7811A}"/>
+                <a16:creationId xmlns:a16="http://schemas.microsoft.com/office/drawing/2014/main" id="{79C78EC4-4BDD-4DCC-947A-03D613113E89}"/>
               </a:ext>
             </a:extLst>
           </p:cNvPr>
@@ -2293,7 +5785,7 @@
           <p:cNvPr id="10" name="">
             <a:extLst xmlns:a="http://schemas.openxmlformats.org/drawingml/2006/main">
               <a:ext uri="{FF2B5EF4-FFF2-40B4-BE49-F238E27FC236}">
-                <a16:creationId xmlns:a16="http://schemas.microsoft.com/office/drawing/2014/main" id="{4BB3B368-C5F2-4933-80D2-DFCC9DD843EB}"/>
+                <a16:creationId xmlns:a16="http://schemas.microsoft.com/office/drawing/2014/main" id="{DC8AE0D4-5DCD-43F8-95D9-A169FB140113}"/>
               </a:ext>
             </a:extLst>
           </p:cNvPr>
@@ -2326,7 +5818,7 @@
           <p:cNvPr id="11" name="">
             <a:extLst xmlns:a="http://schemas.openxmlformats.org/drawingml/2006/main">
               <a:ext uri="{FF2B5EF4-FFF2-40B4-BE49-F238E27FC236}">
-                <a16:creationId xmlns:a16="http://schemas.microsoft.com/office/drawing/2014/main" id="{707F3C01-C306-47DF-80C0-D26B72307268}"/>
+                <a16:creationId xmlns:a16="http://schemas.microsoft.com/office/drawing/2014/main" id="{7AD70E4F-C916-4794-B9CE-0ACA2BF84844}"/>
               </a:ext>
             </a:extLst>
           </p:cNvPr>
@@ -2391,7 +5883,7 @@
     </p:spTree>
     <p:extLst>
       <p:ext uri="{BB962C8B-B14F-4D97-AF65-F5344CB8AC3E}">
-        <p14:creationId xmlns:p14="http://schemas.microsoft.com/office/powerpoint/2010/main" val="1629984273"/>
+        <p14:creationId xmlns:p14="http://schemas.microsoft.com/office/powerpoint/2010/main" val="609730515"/>
       </p:ext>
     </p:extLst>
   </p:cSld>
@@ -2422,7 +5914,7 @@
           <p:cNvPr id="8" name="">
             <a:extLst xmlns:a="http://schemas.openxmlformats.org/drawingml/2006/main">
               <a:ext uri="{FF2B5EF4-FFF2-40B4-BE49-F238E27FC236}">
-                <a16:creationId xmlns:a16="http://schemas.microsoft.com/office/drawing/2014/main" id="{36159B6F-C92D-4293-924D-D25C85E099BD}"/>
+                <a16:creationId xmlns:a16="http://schemas.microsoft.com/office/drawing/2014/main" id="{2ACE1782-123B-4455-AC9C-5908504ABBA8}"/>
               </a:ext>
             </a:extLst>
           </p:cNvPr>
@@ -2453,7 +5945,7 @@
           <p:cNvPr id="2" name="">
             <a:extLst xmlns:a="http://schemas.openxmlformats.org/drawingml/2006/main">
               <a:ext uri="{FF2B5EF4-FFF2-40B4-BE49-F238E27FC236}">
-                <a16:creationId xmlns:a16="http://schemas.microsoft.com/office/drawing/2014/main" id="{7F187D13-3D17-4244-BEAB-D89DC693F015}"/>
+                <a16:creationId xmlns:a16="http://schemas.microsoft.com/office/drawing/2014/main" id="{64DF3968-FA68-4A04-9CF4-17B0EC2412AF}"/>
               </a:ext>
             </a:extLst>
           </p:cNvPr>
@@ -2503,7 +5995,7 @@
           <p:cNvPr id="3" name="">
             <a:extLst xmlns:a="http://schemas.openxmlformats.org/drawingml/2006/main">
               <a:ext uri="{FF2B5EF4-FFF2-40B4-BE49-F238E27FC236}">
-                <a16:creationId xmlns:a16="http://schemas.microsoft.com/office/drawing/2014/main" id="{0EB26303-CC37-4BBE-A5E0-5539B5B8A5F9}"/>
+                <a16:creationId xmlns:a16="http://schemas.microsoft.com/office/drawing/2014/main" id="{7684DADE-0660-4B3A-998A-7B0BCF8A3F5E}"/>
               </a:ext>
             </a:extLst>
           </p:cNvPr>
@@ -2553,7 +6045,7 @@
           <p:cNvPr id="4" name="">
             <a:extLst xmlns:a="http://schemas.openxmlformats.org/drawingml/2006/main">
               <a:ext uri="{FF2B5EF4-FFF2-40B4-BE49-F238E27FC236}">
-                <a16:creationId xmlns:a16="http://schemas.microsoft.com/office/drawing/2014/main" id="{C6DBE365-B1EF-44A2-B16E-15AEA35AA943}"/>
+                <a16:creationId xmlns:a16="http://schemas.microsoft.com/office/drawing/2014/main" id="{9404F8E5-91D9-4433-A1A1-1CDF1C36FAE1}"/>
               </a:ext>
             </a:extLst>
           </p:cNvPr>
@@ -2586,7 +6078,7 @@
           <p:cNvPr id="5" name="">
             <a:extLst xmlns:a="http://schemas.openxmlformats.org/drawingml/2006/main">
               <a:ext uri="{FF2B5EF4-FFF2-40B4-BE49-F238E27FC236}">
-                <a16:creationId xmlns:a16="http://schemas.microsoft.com/office/drawing/2014/main" id="{F1EBCFDD-31EA-4DA7-91CF-14262BDE7CBC}"/>
+                <a16:creationId xmlns:a16="http://schemas.microsoft.com/office/drawing/2014/main" id="{C484F8AD-C6B7-454A-8D19-51F5AF2F9C83}"/>
               </a:ext>
             </a:extLst>
           </p:cNvPr>
@@ -2636,7 +6128,7 @@
           <p:cNvPr id="6" name="">
             <a:extLst xmlns:a="http://schemas.openxmlformats.org/drawingml/2006/main">
               <a:ext uri="{FF2B5EF4-FFF2-40B4-BE49-F238E27FC236}">
-                <a16:creationId xmlns:a16="http://schemas.microsoft.com/office/drawing/2014/main" id="{EF431C87-2273-46BB-AF37-6B31E3C765FD}"/>
+                <a16:creationId xmlns:a16="http://schemas.microsoft.com/office/drawing/2014/main" id="{6E49529E-4493-46C1-9FAD-4AE077FD2CAA}"/>
               </a:ext>
             </a:extLst>
           </p:cNvPr>
@@ -2686,7 +6178,7 @@
           <p:cNvPr id="7" name="">
             <a:extLst xmlns:a="http://schemas.openxmlformats.org/drawingml/2006/main">
               <a:ext uri="{FF2B5EF4-FFF2-40B4-BE49-F238E27FC236}">
-                <a16:creationId xmlns:a16="http://schemas.microsoft.com/office/drawing/2014/main" id="{75A6D951-0684-4A5E-89CC-709DF134FDFA}"/>
+                <a16:creationId xmlns:a16="http://schemas.microsoft.com/office/drawing/2014/main" id="{C245472E-C581-4D0F-9279-65068555D72C}"/>
               </a:ext>
             </a:extLst>
           </p:cNvPr>
@@ -2734,7 +6226,7 @@
     </p:spTree>
     <p:extLst>
       <p:ext uri="{BB962C8B-B14F-4D97-AF65-F5344CB8AC3E}">
-        <p14:creationId xmlns:p14="http://schemas.microsoft.com/office/powerpoint/2010/main" val="110174674"/>
+        <p14:creationId xmlns:p14="http://schemas.microsoft.com/office/powerpoint/2010/main" val="1647067182"/>
       </p:ext>
     </p:extLst>
   </p:cSld>
@@ -2765,7 +6257,7 @@
           <p:cNvPr id="16" name="">
             <a:extLst xmlns:a="http://schemas.openxmlformats.org/drawingml/2006/main">
               <a:ext uri="{FF2B5EF4-FFF2-40B4-BE49-F238E27FC236}">
-                <a16:creationId xmlns:a16="http://schemas.microsoft.com/office/drawing/2014/main" id="{4CF69248-DC63-49F6-B5FD-AA7CA43E939A}"/>
+                <a16:creationId xmlns:a16="http://schemas.microsoft.com/office/drawing/2014/main" id="{57AD7502-2A60-401B-B75B-DD7D81AC32B4}"/>
               </a:ext>
             </a:extLst>
           </p:cNvPr>
@@ -2796,7 +6288,7 @@
           <p:cNvPr id="2" name="">
             <a:extLst xmlns:a="http://schemas.openxmlformats.org/drawingml/2006/main">
               <a:ext uri="{FF2B5EF4-FFF2-40B4-BE49-F238E27FC236}">
-                <a16:creationId xmlns:a16="http://schemas.microsoft.com/office/drawing/2014/main" id="{1D014053-760E-4E94-BAF0-8C672314CDD4}"/>
+                <a16:creationId xmlns:a16="http://schemas.microsoft.com/office/drawing/2014/main" id="{397F94ED-F7B1-43CA-9917-3C98576EDEDB}"/>
               </a:ext>
             </a:extLst>
           </p:cNvPr>
@@ -2846,7 +6338,7 @@
           <p:cNvPr id="3" name="">
             <a:extLst xmlns:a="http://schemas.openxmlformats.org/drawingml/2006/main">
               <a:ext uri="{FF2B5EF4-FFF2-40B4-BE49-F238E27FC236}">
-                <a16:creationId xmlns:a16="http://schemas.microsoft.com/office/drawing/2014/main" id="{97DDC6B4-364F-4921-B9EE-1CC96998EA6A}"/>
+                <a16:creationId xmlns:a16="http://schemas.microsoft.com/office/drawing/2014/main" id="{121C95A8-8B57-4897-A772-E23AD74489DE}"/>
               </a:ext>
             </a:extLst>
           </p:cNvPr>
@@ -2896,7 +6388,7 @@
           <p:cNvPr id="4" name="">
             <a:extLst xmlns:a="http://schemas.openxmlformats.org/drawingml/2006/main">
               <a:ext uri="{FF2B5EF4-FFF2-40B4-BE49-F238E27FC236}">
-                <a16:creationId xmlns:a16="http://schemas.microsoft.com/office/drawing/2014/main" id="{6ED705FF-1793-487B-98CF-AB8447372C16}"/>
+                <a16:creationId xmlns:a16="http://schemas.microsoft.com/office/drawing/2014/main" id="{0200D8A6-5E20-4463-B96C-12DB529389A5}"/>
               </a:ext>
             </a:extLst>
           </p:cNvPr>
@@ -2929,7 +6421,7 @@
           <p:cNvPr id="5" name="">
             <a:extLst xmlns:a="http://schemas.openxmlformats.org/drawingml/2006/main">
               <a:ext uri="{FF2B5EF4-FFF2-40B4-BE49-F238E27FC236}">
-                <a16:creationId xmlns:a16="http://schemas.microsoft.com/office/drawing/2014/main" id="{06EAE264-E65D-4A5C-B789-01214F4DE1D0}"/>
+                <a16:creationId xmlns:a16="http://schemas.microsoft.com/office/drawing/2014/main" id="{B407AC45-5955-460A-8A79-0D34EF42B30E}"/>
               </a:ext>
             </a:extLst>
           </p:cNvPr>
@@ -2979,7 +6471,7 @@
           <p:cNvPr id="6" name="">
             <a:extLst xmlns:a="http://schemas.openxmlformats.org/drawingml/2006/main">
               <a:ext uri="{FF2B5EF4-FFF2-40B4-BE49-F238E27FC236}">
-                <a16:creationId xmlns:a16="http://schemas.microsoft.com/office/drawing/2014/main" id="{5A35FA4E-EB43-4361-8FA8-71A56FF6E8EE}"/>
+                <a16:creationId xmlns:a16="http://schemas.microsoft.com/office/drawing/2014/main" id="{440E57D6-3E7D-49FC-931F-0E37C4A1370E}"/>
               </a:ext>
             </a:extLst>
           </p:cNvPr>
@@ -3029,7 +6521,7 @@
           <p:cNvPr id="7" name="">
             <a:extLst xmlns:a="http://schemas.openxmlformats.org/drawingml/2006/main">
               <a:ext uri="{FF2B5EF4-FFF2-40B4-BE49-F238E27FC236}">
-                <a16:creationId xmlns:a16="http://schemas.microsoft.com/office/drawing/2014/main" id="{EFB8EE9F-F90D-46A1-BBC6-A243162BBC31}"/>
+                <a16:creationId xmlns:a16="http://schemas.microsoft.com/office/drawing/2014/main" id="{C8DC7482-C314-4725-A10F-87F73346C86C}"/>
               </a:ext>
             </a:extLst>
           </p:cNvPr>
@@ -3062,7 +6554,7 @@
           <p:cNvPr id="8" name="">
             <a:extLst xmlns:a="http://schemas.openxmlformats.org/drawingml/2006/main">
               <a:ext uri="{FF2B5EF4-FFF2-40B4-BE49-F238E27FC236}">
-                <a16:creationId xmlns:a16="http://schemas.microsoft.com/office/drawing/2014/main" id="{779A7C9B-8769-4107-88C6-05467EA525F8}"/>
+                <a16:creationId xmlns:a16="http://schemas.microsoft.com/office/drawing/2014/main" id="{B97C4E1C-5EB9-48EC-A0E9-C558F19956E2}"/>
               </a:ext>
             </a:extLst>
           </p:cNvPr>
@@ -3112,7 +6604,7 @@
           <p:cNvPr id="9" name="">
             <a:extLst xmlns:a="http://schemas.openxmlformats.org/drawingml/2006/main">
               <a:ext uri="{FF2B5EF4-FFF2-40B4-BE49-F238E27FC236}">
-                <a16:creationId xmlns:a16="http://schemas.microsoft.com/office/drawing/2014/main" id="{466F3B7E-001D-4973-95C4-CBA9DD6A8CA2}"/>
+                <a16:creationId xmlns:a16="http://schemas.microsoft.com/office/drawing/2014/main" id="{F0D6C317-124C-4E5A-A7A0-B0A0BBCB2946}"/>
               </a:ext>
             </a:extLst>
           </p:cNvPr>
@@ -3162,7 +6654,7 @@
           <p:cNvPr id="10" name="">
             <a:extLst xmlns:a="http://schemas.openxmlformats.org/drawingml/2006/main">
               <a:ext uri="{FF2B5EF4-FFF2-40B4-BE49-F238E27FC236}">
-                <a16:creationId xmlns:a16="http://schemas.microsoft.com/office/drawing/2014/main" id="{21C7FFAC-4755-49E2-BECD-F35604594D81}"/>
+                <a16:creationId xmlns:a16="http://schemas.microsoft.com/office/drawing/2014/main" id="{DE205FEE-16EE-4AD6-A8A2-A5FDD46A8AEF}"/>
               </a:ext>
             </a:extLst>
           </p:cNvPr>
@@ -3195,7 +6687,7 @@
           <p:cNvPr id="11" name="">
             <a:extLst xmlns:a="http://schemas.openxmlformats.org/drawingml/2006/main">
               <a:ext uri="{FF2B5EF4-FFF2-40B4-BE49-F238E27FC236}">
-                <a16:creationId xmlns:a16="http://schemas.microsoft.com/office/drawing/2014/main" id="{E21A926B-FE03-4C55-B4FB-F17CC5A43537}"/>
+                <a16:creationId xmlns:a16="http://schemas.microsoft.com/office/drawing/2014/main" id="{E8067F99-E62F-40A8-B6F0-CF73420E5328}"/>
               </a:ext>
             </a:extLst>
           </p:cNvPr>
@@ -3245,7 +6737,7 @@
           <p:cNvPr id="12" name="">
             <a:extLst xmlns:a="http://schemas.openxmlformats.org/drawingml/2006/main">
               <a:ext uri="{FF2B5EF4-FFF2-40B4-BE49-F238E27FC236}">
-                <a16:creationId xmlns:a16="http://schemas.microsoft.com/office/drawing/2014/main" id="{0AB7B3C8-ECC2-4781-BA3B-AA653164F5B7}"/>
+                <a16:creationId xmlns:a16="http://schemas.microsoft.com/office/drawing/2014/main" id="{45750FAC-3265-4255-9EE1-4682319BA755}"/>
               </a:ext>
             </a:extLst>
           </p:cNvPr>
@@ -3295,7 +6787,7 @@
           <p:cNvPr id="13" name="">
             <a:extLst xmlns:a="http://schemas.openxmlformats.org/drawingml/2006/main">
               <a:ext uri="{FF2B5EF4-FFF2-40B4-BE49-F238E27FC236}">
-                <a16:creationId xmlns:a16="http://schemas.microsoft.com/office/drawing/2014/main" id="{D3BEE3FF-144B-4515-9FA1-DF0A96278E9E}"/>
+                <a16:creationId xmlns:a16="http://schemas.microsoft.com/office/drawing/2014/main" id="{B17F68CF-2C26-4F95-80A1-C15AF8D0FEF3}"/>
               </a:ext>
             </a:extLst>
           </p:cNvPr>
@@ -3328,7 +6820,7 @@
           <p:cNvPr id="14" name="">
             <a:extLst xmlns:a="http://schemas.openxmlformats.org/drawingml/2006/main">
               <a:ext uri="{FF2B5EF4-FFF2-40B4-BE49-F238E27FC236}">
-                <a16:creationId xmlns:a16="http://schemas.microsoft.com/office/drawing/2014/main" id="{B6C6A6FF-8564-4F2E-92E1-03CDB7C81C7E}"/>
+                <a16:creationId xmlns:a16="http://schemas.microsoft.com/office/drawing/2014/main" id="{77B96197-35B4-403F-845F-809657BD7A54}"/>
               </a:ext>
             </a:extLst>
           </p:cNvPr>
@@ -3378,7 +6870,7 @@
           <p:cNvPr id="15" name="">
             <a:extLst xmlns:a="http://schemas.openxmlformats.org/drawingml/2006/main">
               <a:ext uri="{FF2B5EF4-FFF2-40B4-BE49-F238E27FC236}">
-                <a16:creationId xmlns:a16="http://schemas.microsoft.com/office/drawing/2014/main" id="{E2F9CEFA-8186-4ACF-A769-FA32D0A807C2}"/>
+                <a16:creationId xmlns:a16="http://schemas.microsoft.com/office/drawing/2014/main" id="{33FF6745-99A1-46FC-9809-3A5AE2DBF076}"/>
               </a:ext>
             </a:extLst>
           </p:cNvPr>
@@ -3426,7 +6918,7 @@
     </p:spTree>
     <p:extLst>
       <p:ext uri="{BB962C8B-B14F-4D97-AF65-F5344CB8AC3E}">
-        <p14:creationId xmlns:p14="http://schemas.microsoft.com/office/powerpoint/2010/main" val="62143687"/>
+        <p14:creationId xmlns:p14="http://schemas.microsoft.com/office/powerpoint/2010/main" val="953847292"/>
       </p:ext>
     </p:extLst>
   </p:cSld>
@@ -3457,7 +6949,7 @@
           <p:cNvPr id="8" name="">
             <a:extLst xmlns:a="http://schemas.openxmlformats.org/drawingml/2006/main">
               <a:ext uri="{FF2B5EF4-FFF2-40B4-BE49-F238E27FC236}">
-                <a16:creationId xmlns:a16="http://schemas.microsoft.com/office/drawing/2014/main" id="{6B27787D-14E7-4049-90A0-8CDA2CD41DF8}"/>
+                <a16:creationId xmlns:a16="http://schemas.microsoft.com/office/drawing/2014/main" id="{DF9DD749-27F2-4BB1-9C8E-9EF5736AB454}"/>
               </a:ext>
             </a:extLst>
           </p:cNvPr>
@@ -3488,7 +6980,7 @@
           <p:cNvPr id="2" name="">
             <a:extLst xmlns:a="http://schemas.openxmlformats.org/drawingml/2006/main">
               <a:ext uri="{FF2B5EF4-FFF2-40B4-BE49-F238E27FC236}">
-                <a16:creationId xmlns:a16="http://schemas.microsoft.com/office/drawing/2014/main" id="{F1B23EBF-C200-4F91-B894-6B69FF64C3A4}"/>
+                <a16:creationId xmlns:a16="http://schemas.microsoft.com/office/drawing/2014/main" id="{04C3F36E-46C3-4524-A1F8-16D1CFF01BC8}"/>
               </a:ext>
             </a:extLst>
           </p:cNvPr>
@@ -3538,7 +7030,7 @@
           <p:cNvPr id="3" name="">
             <a:extLst xmlns:a="http://schemas.openxmlformats.org/drawingml/2006/main">
               <a:ext uri="{FF2B5EF4-FFF2-40B4-BE49-F238E27FC236}">
-                <a16:creationId xmlns:a16="http://schemas.microsoft.com/office/drawing/2014/main" id="{8567C8B6-13A7-4229-9A06-B00F15387EF9}"/>
+                <a16:creationId xmlns:a16="http://schemas.microsoft.com/office/drawing/2014/main" id="{0CB92D84-A2C9-41FF-AC98-0EFECD096A0B}"/>
               </a:ext>
             </a:extLst>
           </p:cNvPr>
@@ -3588,7 +7080,7 @@
           <p:cNvPr id="4" name="">
             <a:extLst xmlns:a="http://schemas.openxmlformats.org/drawingml/2006/main">
               <a:ext uri="{FF2B5EF4-FFF2-40B4-BE49-F238E27FC236}">
-                <a16:creationId xmlns:a16="http://schemas.microsoft.com/office/drawing/2014/main" id="{BEB6E60A-5CB3-44D3-B5CF-A99E932B6BD6}"/>
+                <a16:creationId xmlns:a16="http://schemas.microsoft.com/office/drawing/2014/main" id="{471152D5-819E-4A04-8F51-31786A10D96E}"/>
               </a:ext>
             </a:extLst>
           </p:cNvPr>
@@ -3623,7 +7115,7 @@
           <p:cNvPr id="5" name="">
             <a:extLst xmlns:a="http://schemas.openxmlformats.org/drawingml/2006/main">
               <a:ext uri="{FF2B5EF4-FFF2-40B4-BE49-F238E27FC236}">
-                <a16:creationId xmlns:a16="http://schemas.microsoft.com/office/drawing/2014/main" id="{331F078D-FF0E-4597-880F-98EF06A0E2E1}"/>
+                <a16:creationId xmlns:a16="http://schemas.microsoft.com/office/drawing/2014/main" id="{6108525C-E46D-4940-8FAC-C635D87FA4CC}"/>
               </a:ext>
             </a:extLst>
           </p:cNvPr>
@@ -3673,7 +7165,7 @@
           <p:cNvPr id="6" name="">
             <a:extLst xmlns:a="http://schemas.openxmlformats.org/drawingml/2006/main">
               <a:ext uri="{FF2B5EF4-FFF2-40B4-BE49-F238E27FC236}">
-                <a16:creationId xmlns:a16="http://schemas.microsoft.com/office/drawing/2014/main" id="{4CAE2EF2-3F1F-49DB-964D-8B21CBA8B846}"/>
+                <a16:creationId xmlns:a16="http://schemas.microsoft.com/office/drawing/2014/main" id="{ED9A1BCB-560B-4C35-90D5-110B79E44FFE}"/>
               </a:ext>
             </a:extLst>
           </p:cNvPr>
@@ -3757,7 +7249,7 @@
           <p:cNvPr id="7" name="">
             <a:extLst xmlns:a="http://schemas.openxmlformats.org/drawingml/2006/main">
               <a:ext uri="{FF2B5EF4-FFF2-40B4-BE49-F238E27FC236}">
-                <a16:creationId xmlns:a16="http://schemas.microsoft.com/office/drawing/2014/main" id="{8FB0C430-B8CA-4780-BF5F-A8A53C8A4C62}"/>
+                <a16:creationId xmlns:a16="http://schemas.microsoft.com/office/drawing/2014/main" id="{82157B3E-E05B-40B5-B582-047FABF7F0D4}"/>
               </a:ext>
             </a:extLst>
           </p:cNvPr>
@@ -3805,7 +7297,7 @@
     </p:spTree>
     <p:extLst>
       <p:ext uri="{BB962C8B-B14F-4D97-AF65-F5344CB8AC3E}">
-        <p14:creationId xmlns:p14="http://schemas.microsoft.com/office/powerpoint/2010/main" val="1418141602"/>
+        <p14:creationId xmlns:p14="http://schemas.microsoft.com/office/powerpoint/2010/main" val="825110743"/>
       </p:ext>
     </p:extLst>
   </p:cSld>
@@ -3836,7 +7328,7 @@
           <p:cNvPr id="18" name="">
             <a:extLst xmlns:a="http://schemas.openxmlformats.org/drawingml/2006/main">
               <a:ext uri="{FF2B5EF4-FFF2-40B4-BE49-F238E27FC236}">
-                <a16:creationId xmlns:a16="http://schemas.microsoft.com/office/drawing/2014/main" id="{77EAFE92-2635-4603-B145-8930E64DF8B3}"/>
+                <a16:creationId xmlns:a16="http://schemas.microsoft.com/office/drawing/2014/main" id="{C8501319-A143-4070-B7C9-C73AB90737C4}"/>
               </a:ext>
             </a:extLst>
           </p:cNvPr>
@@ -3867,7 +7359,7 @@
           <p:cNvPr id="2" name="">
             <a:extLst xmlns:a="http://schemas.openxmlformats.org/drawingml/2006/main">
               <a:ext uri="{FF2B5EF4-FFF2-40B4-BE49-F238E27FC236}">
-                <a16:creationId xmlns:a16="http://schemas.microsoft.com/office/drawing/2014/main" id="{4C41FEA8-5DE8-4038-BAC2-10783683983D}"/>
+                <a16:creationId xmlns:a16="http://schemas.microsoft.com/office/drawing/2014/main" id="{A1E589B5-9C53-4C1C-8D14-9C9F8EEB0A6C}"/>
               </a:ext>
             </a:extLst>
           </p:cNvPr>
@@ -3917,7 +7409,7 @@
           <p:cNvPr id="3" name="">
             <a:extLst xmlns:a="http://schemas.openxmlformats.org/drawingml/2006/main">
               <a:ext uri="{FF2B5EF4-FFF2-40B4-BE49-F238E27FC236}">
-                <a16:creationId xmlns:a16="http://schemas.microsoft.com/office/drawing/2014/main" id="{A985C604-7D5C-4FEA-AA9C-DC7F78D57951}"/>
+                <a16:creationId xmlns:a16="http://schemas.microsoft.com/office/drawing/2014/main" id="{01FA1768-A1C7-4CF4-9A5B-D156F0159D98}"/>
               </a:ext>
             </a:extLst>
           </p:cNvPr>
@@ -3967,7 +7459,7 @@
           <p:cNvPr id="4" name="">
             <a:extLst xmlns:a="http://schemas.openxmlformats.org/drawingml/2006/main">
               <a:ext uri="{FF2B5EF4-FFF2-40B4-BE49-F238E27FC236}">
-                <a16:creationId xmlns:a16="http://schemas.microsoft.com/office/drawing/2014/main" id="{4491F9D9-E23A-456B-9818-2157674FC06B}"/>
+                <a16:creationId xmlns:a16="http://schemas.microsoft.com/office/drawing/2014/main" id="{2E2F028A-A931-4639-829D-5091F4858DDB}"/>
               </a:ext>
             </a:extLst>
           </p:cNvPr>
@@ -4000,7 +7492,7 @@
           <p:cNvPr id="5" name="">
             <a:extLst xmlns:a="http://schemas.openxmlformats.org/drawingml/2006/main">
               <a:ext uri="{FF2B5EF4-FFF2-40B4-BE49-F238E27FC236}">
-                <a16:creationId xmlns:a16="http://schemas.microsoft.com/office/drawing/2014/main" id="{C3208669-822D-4152-A8B9-43471A60910A}"/>
+                <a16:creationId xmlns:a16="http://schemas.microsoft.com/office/drawing/2014/main" id="{C4E932CB-C870-4B2F-BBEC-AB23FF593B17}"/>
               </a:ext>
             </a:extLst>
           </p:cNvPr>
@@ -4050,7 +7542,7 @@
           <p:cNvPr id="6" name="">
             <a:extLst xmlns:a="http://schemas.openxmlformats.org/drawingml/2006/main">
               <a:ext uri="{FF2B5EF4-FFF2-40B4-BE49-F238E27FC236}">
-                <a16:creationId xmlns:a16="http://schemas.microsoft.com/office/drawing/2014/main" id="{76C39F38-EC77-4BE9-945C-39BD01F7F050}"/>
+                <a16:creationId xmlns:a16="http://schemas.microsoft.com/office/drawing/2014/main" id="{5B396E17-6ACD-4687-A9E3-B6B6323CC495}"/>
               </a:ext>
             </a:extLst>
           </p:cNvPr>
@@ -4100,7 +7592,7 @@
           <p:cNvPr id="7" name="">
             <a:extLst xmlns:a="http://schemas.openxmlformats.org/drawingml/2006/main">
               <a:ext uri="{FF2B5EF4-FFF2-40B4-BE49-F238E27FC236}">
-                <a16:creationId xmlns:a16="http://schemas.microsoft.com/office/drawing/2014/main" id="{E3346909-B97D-4F52-99DD-E40F6DC70DC9}"/>
+                <a16:creationId xmlns:a16="http://schemas.microsoft.com/office/drawing/2014/main" id="{659E3DC7-7E39-47C8-84B4-F9F344C96024}"/>
               </a:ext>
             </a:extLst>
           </p:cNvPr>
@@ -4133,7 +7625,7 @@
           <p:cNvPr id="8" name="">
             <a:extLst xmlns:a="http://schemas.openxmlformats.org/drawingml/2006/main">
               <a:ext uri="{FF2B5EF4-FFF2-40B4-BE49-F238E27FC236}">
-                <a16:creationId xmlns:a16="http://schemas.microsoft.com/office/drawing/2014/main" id="{EC97B4B4-4CAA-42BB-8B83-9FBC871F7ADE}"/>
+                <a16:creationId xmlns:a16="http://schemas.microsoft.com/office/drawing/2014/main" id="{D1F7B3AF-F97D-4366-9258-0492F24C5E08}"/>
               </a:ext>
             </a:extLst>
           </p:cNvPr>
@@ -4183,7 +7675,7 @@
           <p:cNvPr id="9" name="">
             <a:extLst xmlns:a="http://schemas.openxmlformats.org/drawingml/2006/main">
               <a:ext uri="{FF2B5EF4-FFF2-40B4-BE49-F238E27FC236}">
-                <a16:creationId xmlns:a16="http://schemas.microsoft.com/office/drawing/2014/main" id="{CA4EDC99-1DE5-4CD9-8288-06017F3DDF17}"/>
+                <a16:creationId xmlns:a16="http://schemas.microsoft.com/office/drawing/2014/main" id="{E97F93A3-9E47-42BB-A89C-20784D76AEBA}"/>
               </a:ext>
             </a:extLst>
           </p:cNvPr>
@@ -4233,7 +7725,7 @@
           <p:cNvPr id="10" name="">
             <a:extLst xmlns:a="http://schemas.openxmlformats.org/drawingml/2006/main">
               <a:ext uri="{FF2B5EF4-FFF2-40B4-BE49-F238E27FC236}">
-                <a16:creationId xmlns:a16="http://schemas.microsoft.com/office/drawing/2014/main" id="{C7E587DC-8210-456C-A51C-0E9232A41FF7}"/>
+                <a16:creationId xmlns:a16="http://schemas.microsoft.com/office/drawing/2014/main" id="{CC8925AF-552D-4703-A83E-CC9AA9414827}"/>
               </a:ext>
             </a:extLst>
           </p:cNvPr>
@@ -4266,7 +7758,7 @@
           <p:cNvPr id="11" name="">
             <a:extLst xmlns:a="http://schemas.openxmlformats.org/drawingml/2006/main">
               <a:ext uri="{FF2B5EF4-FFF2-40B4-BE49-F238E27FC236}">
-                <a16:creationId xmlns:a16="http://schemas.microsoft.com/office/drawing/2014/main" id="{4A93DF21-75E2-4512-9230-30B25897AF8B}"/>
+                <a16:creationId xmlns:a16="http://schemas.microsoft.com/office/drawing/2014/main" id="{21E4624D-BED9-4A5F-AED1-8E80E2E355BF}"/>
               </a:ext>
             </a:extLst>
           </p:cNvPr>
@@ -4316,7 +7808,7 @@
           <p:cNvPr id="12" name="">
             <a:extLst xmlns:a="http://schemas.openxmlformats.org/drawingml/2006/main">
               <a:ext uri="{FF2B5EF4-FFF2-40B4-BE49-F238E27FC236}">
-                <a16:creationId xmlns:a16="http://schemas.microsoft.com/office/drawing/2014/main" id="{59D59B92-CE58-4B20-BA31-DE7201B15D5D}"/>
+                <a16:creationId xmlns:a16="http://schemas.microsoft.com/office/drawing/2014/main" id="{85827B39-A4DE-41E7-84EE-9A37047FD0FB}"/>
               </a:ext>
             </a:extLst>
           </p:cNvPr>
@@ -4366,7 +7858,7 @@
           <p:cNvPr id="13" name="">
             <a:extLst xmlns:a="http://schemas.openxmlformats.org/drawingml/2006/main">
               <a:ext uri="{FF2B5EF4-FFF2-40B4-BE49-F238E27FC236}">
-                <a16:creationId xmlns:a16="http://schemas.microsoft.com/office/drawing/2014/main" id="{B371EE8E-C949-4E8B-A788-F93350DBD555}"/>
+                <a16:creationId xmlns:a16="http://schemas.microsoft.com/office/drawing/2014/main" id="{82752AAD-137A-4BE6-A6C3-CC590655F1AB}"/>
               </a:ext>
             </a:extLst>
           </p:cNvPr>
@@ -4399,7 +7891,7 @@
           <p:cNvPr id="14" name="">
             <a:extLst xmlns:a="http://schemas.openxmlformats.org/drawingml/2006/main">
               <a:ext uri="{FF2B5EF4-FFF2-40B4-BE49-F238E27FC236}">
-                <a16:creationId xmlns:a16="http://schemas.microsoft.com/office/drawing/2014/main" id="{5D4AFD3C-20D5-499D-9D84-672098862BA1}"/>
+                <a16:creationId xmlns:a16="http://schemas.microsoft.com/office/drawing/2014/main" id="{9F627E21-FC86-486F-9277-9CE7322CD8D8}"/>
               </a:ext>
             </a:extLst>
           </p:cNvPr>
@@ -4449,7 +7941,7 @@
           <p:cNvPr id="15" name="">
             <a:extLst xmlns:a="http://schemas.openxmlformats.org/drawingml/2006/main">
               <a:ext uri="{FF2B5EF4-FFF2-40B4-BE49-F238E27FC236}">
-                <a16:creationId xmlns:a16="http://schemas.microsoft.com/office/drawing/2014/main" id="{81E7E5EA-2248-4A88-8B0B-71A8A36B7595}"/>
+                <a16:creationId xmlns:a16="http://schemas.microsoft.com/office/drawing/2014/main" id="{F7222F1B-82B7-4BF6-8FE3-B98E55B06EF4}"/>
               </a:ext>
             </a:extLst>
           </p:cNvPr>
@@ -4499,7 +7991,7 @@
           <p:cNvPr id="16" name="">
             <a:extLst xmlns:a="http://schemas.openxmlformats.org/drawingml/2006/main">
               <a:ext uri="{FF2B5EF4-FFF2-40B4-BE49-F238E27FC236}">
-                <a16:creationId xmlns:a16="http://schemas.microsoft.com/office/drawing/2014/main" id="{C47D0A5B-5302-48C7-A5C7-F2FE225A04C9}"/>
+                <a16:creationId xmlns:a16="http://schemas.microsoft.com/office/drawing/2014/main" id="{7128351E-233C-4421-B2B9-182BE39ADAE1}"/>
               </a:ext>
             </a:extLst>
           </p:cNvPr>
@@ -4532,7 +8024,7 @@
           <p:cNvPr id="17" name="">
             <a:extLst xmlns:a="http://schemas.openxmlformats.org/drawingml/2006/main">
               <a:ext uri="{FF2B5EF4-FFF2-40B4-BE49-F238E27FC236}">
-                <a16:creationId xmlns:a16="http://schemas.microsoft.com/office/drawing/2014/main" id="{EDDAA012-FA77-40B7-BF3F-2CA1F5433B2D}"/>
+                <a16:creationId xmlns:a16="http://schemas.microsoft.com/office/drawing/2014/main" id="{3079EC41-CAD9-4E36-A8BF-96BEFCA846AF}"/>
               </a:ext>
             </a:extLst>
           </p:cNvPr>
@@ -4580,7 +8072,7 @@
     </p:spTree>
     <p:extLst>
       <p:ext uri="{BB962C8B-B14F-4D97-AF65-F5344CB8AC3E}">
-        <p14:creationId xmlns:p14="http://schemas.microsoft.com/office/powerpoint/2010/main" val="1588136466"/>
+        <p14:creationId xmlns:p14="http://schemas.microsoft.com/office/powerpoint/2010/main" val="1544202667"/>
       </p:ext>
     </p:extLst>
   </p:cSld>
@@ -4611,7 +8103,7 @@
           <p:cNvPr id="8" name="">
             <a:extLst xmlns:a="http://schemas.openxmlformats.org/drawingml/2006/main">
               <a:ext uri="{FF2B5EF4-FFF2-40B4-BE49-F238E27FC236}">
-                <a16:creationId xmlns:a16="http://schemas.microsoft.com/office/drawing/2014/main" id="{B90B6247-D4E5-46E9-A404-0B85E1110309}"/>
+                <a16:creationId xmlns:a16="http://schemas.microsoft.com/office/drawing/2014/main" id="{0AC3FBFE-2BEA-4D17-BC50-DBB4D57FBABF}"/>
               </a:ext>
             </a:extLst>
           </p:cNvPr>
@@ -4642,7 +8134,7 @@
           <p:cNvPr id="2" name="">
             <a:extLst xmlns:a="http://schemas.openxmlformats.org/drawingml/2006/main">
               <a:ext uri="{FF2B5EF4-FFF2-40B4-BE49-F238E27FC236}">
-                <a16:creationId xmlns:a16="http://schemas.microsoft.com/office/drawing/2014/main" id="{6A1FC85A-47EC-4E70-B226-3651E96199A7}"/>
+                <a16:creationId xmlns:a16="http://schemas.microsoft.com/office/drawing/2014/main" id="{DAC536D6-402B-44BD-A1E6-E7E5DDEB5313}"/>
               </a:ext>
             </a:extLst>
           </p:cNvPr>
@@ -4692,7 +8184,7 @@
           <p:cNvPr id="3" name="">
             <a:extLst xmlns:a="http://schemas.openxmlformats.org/drawingml/2006/main">
               <a:ext uri="{FF2B5EF4-FFF2-40B4-BE49-F238E27FC236}">
-                <a16:creationId xmlns:a16="http://schemas.microsoft.com/office/drawing/2014/main" id="{44FDAF60-5A54-4619-B181-5A55D03323E9}"/>
+                <a16:creationId xmlns:a16="http://schemas.microsoft.com/office/drawing/2014/main" id="{14F6F648-8749-4DB7-8870-699568BB4CE4}"/>
               </a:ext>
             </a:extLst>
           </p:cNvPr>
@@ -4742,7 +8234,7 @@
           <p:cNvPr id="4" name="">
             <a:extLst xmlns:a="http://schemas.openxmlformats.org/drawingml/2006/main">
               <a:ext uri="{FF2B5EF4-FFF2-40B4-BE49-F238E27FC236}">
-                <a16:creationId xmlns:a16="http://schemas.microsoft.com/office/drawing/2014/main" id="{74C29B65-18AB-436B-BE18-973069DE8215}"/>
+                <a16:creationId xmlns:a16="http://schemas.microsoft.com/office/drawing/2014/main" id="{D5BC62E8-43A9-453E-87B3-07BE2E76CD28}"/>
               </a:ext>
             </a:extLst>
           </p:cNvPr>
@@ -4775,7 +8267,7 @@
           <p:cNvPr id="5" name="">
             <a:extLst xmlns:a="http://schemas.openxmlformats.org/drawingml/2006/main">
               <a:ext uri="{FF2B5EF4-FFF2-40B4-BE49-F238E27FC236}">
-                <a16:creationId xmlns:a16="http://schemas.microsoft.com/office/drawing/2014/main" id="{0D657DA2-C601-418F-8760-72F456A5DF09}"/>
+                <a16:creationId xmlns:a16="http://schemas.microsoft.com/office/drawing/2014/main" id="{6D8C3B85-C17F-49D2-B36A-3CE24B76281B}"/>
               </a:ext>
             </a:extLst>
           </p:cNvPr>
@@ -4825,7 +8317,7 @@
           <p:cNvPr id="6" name="">
             <a:extLst xmlns:a="http://schemas.openxmlformats.org/drawingml/2006/main">
               <a:ext uri="{FF2B5EF4-FFF2-40B4-BE49-F238E27FC236}">
-                <a16:creationId xmlns:a16="http://schemas.microsoft.com/office/drawing/2014/main" id="{29C12E24-53AB-4EBB-B24A-224931E68BD2}"/>
+                <a16:creationId xmlns:a16="http://schemas.microsoft.com/office/drawing/2014/main" id="{54DE49C6-150E-4771-B1A3-BA3B8609C9DA}"/>
               </a:ext>
             </a:extLst>
           </p:cNvPr>
@@ -4875,7 +8367,7 @@
           <p:cNvPr id="7" name="">
             <a:extLst xmlns:a="http://schemas.openxmlformats.org/drawingml/2006/main">
               <a:ext uri="{FF2B5EF4-FFF2-40B4-BE49-F238E27FC236}">
-                <a16:creationId xmlns:a16="http://schemas.microsoft.com/office/drawing/2014/main" id="{8FFA7E77-A352-47ED-8988-7F15749093BD}"/>
+                <a16:creationId xmlns:a16="http://schemas.microsoft.com/office/drawing/2014/main" id="{82EB45DC-B8D2-4A40-8FE9-BB598DB6A65E}"/>
               </a:ext>
             </a:extLst>
           </p:cNvPr>
@@ -4923,7 +8415,7 @@
     </p:spTree>
     <p:extLst>
       <p:ext uri="{BB962C8B-B14F-4D97-AF65-F5344CB8AC3E}">
-        <p14:creationId xmlns:p14="http://schemas.microsoft.com/office/powerpoint/2010/main" val="110436121"/>
+        <p14:creationId xmlns:p14="http://schemas.microsoft.com/office/powerpoint/2010/main" val="724911243"/>
       </p:ext>
     </p:extLst>
   </p:cSld>
@@ -4954,7 +8446,7 @@
           <p:cNvPr id="14" name="">
             <a:extLst xmlns:a="http://schemas.openxmlformats.org/drawingml/2006/main">
               <a:ext uri="{FF2B5EF4-FFF2-40B4-BE49-F238E27FC236}">
-                <a16:creationId xmlns:a16="http://schemas.microsoft.com/office/drawing/2014/main" id="{85011730-87A8-4FF8-908F-F1B9BDB18721}"/>
+                <a16:creationId xmlns:a16="http://schemas.microsoft.com/office/drawing/2014/main" id="{1826BE6B-397D-4B34-9543-8F1600899B87}"/>
               </a:ext>
             </a:extLst>
           </p:cNvPr>
@@ -4985,7 +8477,7 @@
           <p:cNvPr id="2" name="">
             <a:extLst xmlns:a="http://schemas.openxmlformats.org/drawingml/2006/main">
               <a:ext uri="{FF2B5EF4-FFF2-40B4-BE49-F238E27FC236}">
-                <a16:creationId xmlns:a16="http://schemas.microsoft.com/office/drawing/2014/main" id="{852BBB2D-7435-4BD5-B5A6-35589DB13A55}"/>
+                <a16:creationId xmlns:a16="http://schemas.microsoft.com/office/drawing/2014/main" id="{F8E8B1CD-F7C2-4AF0-BA30-CC8435F71582}"/>
               </a:ext>
             </a:extLst>
           </p:cNvPr>
@@ -5035,7 +8527,7 @@
           <p:cNvPr id="3" name="">
             <a:extLst xmlns:a="http://schemas.openxmlformats.org/drawingml/2006/main">
               <a:ext uri="{FF2B5EF4-FFF2-40B4-BE49-F238E27FC236}">
-                <a16:creationId xmlns:a16="http://schemas.microsoft.com/office/drawing/2014/main" id="{241475A0-92F0-4792-8D8F-28D4F2898482}"/>
+                <a16:creationId xmlns:a16="http://schemas.microsoft.com/office/drawing/2014/main" id="{09859C3D-4CAD-452C-9CF6-8DD4C1986279}"/>
               </a:ext>
             </a:extLst>
           </p:cNvPr>
@@ -5085,7 +8577,7 @@
           <p:cNvPr id="4" name="">
             <a:extLst xmlns:a="http://schemas.openxmlformats.org/drawingml/2006/main">
               <a:ext uri="{FF2B5EF4-FFF2-40B4-BE49-F238E27FC236}">
-                <a16:creationId xmlns:a16="http://schemas.microsoft.com/office/drawing/2014/main" id="{2AA823F9-AA68-4794-82F7-5F8A494CCC3B}"/>
+                <a16:creationId xmlns:a16="http://schemas.microsoft.com/office/drawing/2014/main" id="{4D8E95C9-AB36-46C1-8ED2-8BD617843421}"/>
               </a:ext>
             </a:extLst>
           </p:cNvPr>
@@ -5118,7 +8610,7 @@
           <p:cNvPr id="5" name="">
             <a:extLst xmlns:a="http://schemas.openxmlformats.org/drawingml/2006/main">
               <a:ext uri="{FF2B5EF4-FFF2-40B4-BE49-F238E27FC236}">
-                <a16:creationId xmlns:a16="http://schemas.microsoft.com/office/drawing/2014/main" id="{1D26E675-191F-4B71-978A-8F8A9A74E516}"/>
+                <a16:creationId xmlns:a16="http://schemas.microsoft.com/office/drawing/2014/main" id="{B4A9BB41-0448-4021-A24D-2049E8870CB6}"/>
               </a:ext>
             </a:extLst>
           </p:cNvPr>
@@ -5168,7 +8660,7 @@
           <p:cNvPr id="6" name="">
             <a:extLst xmlns:a="http://schemas.openxmlformats.org/drawingml/2006/main">
               <a:ext uri="{FF2B5EF4-FFF2-40B4-BE49-F238E27FC236}">
-                <a16:creationId xmlns:a16="http://schemas.microsoft.com/office/drawing/2014/main" id="{D9D0D1A0-01B7-47F6-8594-67891D2C2691}"/>
+                <a16:creationId xmlns:a16="http://schemas.microsoft.com/office/drawing/2014/main" id="{8B903907-13E2-4C7D-B2BB-37A38685F422}"/>
               </a:ext>
             </a:extLst>
           </p:cNvPr>
@@ -5218,7 +8710,7 @@
           <p:cNvPr id="7" name="">
             <a:extLst xmlns:a="http://schemas.openxmlformats.org/drawingml/2006/main">
               <a:ext uri="{FF2B5EF4-FFF2-40B4-BE49-F238E27FC236}">
-                <a16:creationId xmlns:a16="http://schemas.microsoft.com/office/drawing/2014/main" id="{52C1290E-E431-443D-B73C-8E4F1E8B1E63}"/>
+                <a16:creationId xmlns:a16="http://schemas.microsoft.com/office/drawing/2014/main" id="{FA536C11-7C44-4DDC-9380-7B426D9CF06C}"/>
               </a:ext>
             </a:extLst>
           </p:cNvPr>
@@ -5251,7 +8743,7 @@
           <p:cNvPr id="8" name="">
             <a:extLst xmlns:a="http://schemas.openxmlformats.org/drawingml/2006/main">
               <a:ext uri="{FF2B5EF4-FFF2-40B4-BE49-F238E27FC236}">
-                <a16:creationId xmlns:a16="http://schemas.microsoft.com/office/drawing/2014/main" id="{AC72B053-91DA-4517-87C0-8D48024BD943}"/>
+                <a16:creationId xmlns:a16="http://schemas.microsoft.com/office/drawing/2014/main" id="{D700EA12-6C86-4507-8D13-53FA3A89A8DA}"/>
               </a:ext>
             </a:extLst>
           </p:cNvPr>
@@ -5301,7 +8793,7 @@
           <p:cNvPr id="9" name="">
             <a:extLst xmlns:a="http://schemas.openxmlformats.org/drawingml/2006/main">
               <a:ext uri="{FF2B5EF4-FFF2-40B4-BE49-F238E27FC236}">
-                <a16:creationId xmlns:a16="http://schemas.microsoft.com/office/drawing/2014/main" id="{C1D6DDDC-FF21-48C7-8FBD-AB6CF90B7BF9}"/>
+                <a16:creationId xmlns:a16="http://schemas.microsoft.com/office/drawing/2014/main" id="{35DF31CE-2DAA-402F-AF2F-8F827CA642D9}"/>
               </a:ext>
             </a:extLst>
           </p:cNvPr>
@@ -5351,7 +8843,7 @@
           <p:cNvPr id="10" name="">
             <a:extLst xmlns:a="http://schemas.openxmlformats.org/drawingml/2006/main">
               <a:ext uri="{FF2B5EF4-FFF2-40B4-BE49-F238E27FC236}">
-                <a16:creationId xmlns:a16="http://schemas.microsoft.com/office/drawing/2014/main" id="{F806E570-E1C6-4899-B425-0FAB50EC253D}"/>
+                <a16:creationId xmlns:a16="http://schemas.microsoft.com/office/drawing/2014/main" id="{3EE383FE-6C60-4769-8540-E73EA8AFF4FC}"/>
               </a:ext>
             </a:extLst>
           </p:cNvPr>
@@ -5384,7 +8876,7 @@
           <p:cNvPr id="11" name="">
             <a:extLst xmlns:a="http://schemas.openxmlformats.org/drawingml/2006/main">
               <a:ext uri="{FF2B5EF4-FFF2-40B4-BE49-F238E27FC236}">
-                <a16:creationId xmlns:a16="http://schemas.microsoft.com/office/drawing/2014/main" id="{3C5F59C7-7ED9-430E-AC54-15914858CE01}"/>
+                <a16:creationId xmlns:a16="http://schemas.microsoft.com/office/drawing/2014/main" id="{E1449446-F37D-434A-8855-9AF8E006F38A}"/>
               </a:ext>
             </a:extLst>
           </p:cNvPr>
@@ -5434,7 +8926,7 @@
           <p:cNvPr id="12" name="">
             <a:extLst xmlns:a="http://schemas.openxmlformats.org/drawingml/2006/main">
               <a:ext uri="{FF2B5EF4-FFF2-40B4-BE49-F238E27FC236}">
-                <a16:creationId xmlns:a16="http://schemas.microsoft.com/office/drawing/2014/main" id="{8DE85C40-3F3D-4113-9DD1-1DE1E600FA13}"/>
+                <a16:creationId xmlns:a16="http://schemas.microsoft.com/office/drawing/2014/main" id="{7C8C46BD-A92A-4A0D-9BD3-D72877B2BF46}"/>
               </a:ext>
             </a:extLst>
           </p:cNvPr>
@@ -5484,7 +8976,7 @@
           <p:cNvPr id="13" name="">
             <a:extLst xmlns:a="http://schemas.openxmlformats.org/drawingml/2006/main">
               <a:ext uri="{FF2B5EF4-FFF2-40B4-BE49-F238E27FC236}">
-                <a16:creationId xmlns:a16="http://schemas.microsoft.com/office/drawing/2014/main" id="{4F0DFC8F-2A2D-40C2-9A77-7D7DF51EEBF6}"/>
+                <a16:creationId xmlns:a16="http://schemas.microsoft.com/office/drawing/2014/main" id="{BD789EC2-B97D-4B3A-91F4-27D78604A145}"/>
               </a:ext>
             </a:extLst>
           </p:cNvPr>
@@ -5532,7 +9024,350 @@
     </p:spTree>
     <p:extLst>
       <p:ext uri="{BB962C8B-B14F-4D97-AF65-F5344CB8AC3E}">
-        <p14:creationId xmlns:p14="http://schemas.microsoft.com/office/powerpoint/2010/main" val="848704212"/>
+        <p14:creationId xmlns:p14="http://schemas.microsoft.com/office/powerpoint/2010/main" val="951019934"/>
+      </p:ext>
+    </p:extLst>
+  </p:cSld>
+</p:sld>
+</file>
+
+<file path=ppt/slides/slide9.xml><?xml version="1.0" encoding="utf-8"?>
+<p:sld xmlns:p="http://schemas.openxmlformats.org/presentationml/2006/main">
+  <p:cSld>
+    <p:bg>
+      <p:bgPr>
+        <a:solidFill xmlns:a="http://schemas.openxmlformats.org/drawingml/2006/main">
+          <a:srgbClr val="FFFCF8"/>
+        </a:solidFill>
+      </p:bgPr>
+    </p:bg>
+    <p:spTree>
+      <p:nvGrpSpPr>
+        <p:cNvPr id="1" name=""/>
+        <p:cNvGrpSpPr/>
+        <p:nvPr/>
+      </p:nvGrpSpPr>
+      <p:grpSpPr>
+        <a:xfrm xmlns:a="http://schemas.openxmlformats.org/drawingml/2006/main"/>
+      </p:grpSpPr>
+      <p:sp>
+        <p:nvSpPr>
+          <p:cNvPr id="8" name="">
+            <a:extLst xmlns:a="http://schemas.openxmlformats.org/drawingml/2006/main">
+              <a:ext uri="{FF2B5EF4-FFF2-40B4-BE49-F238E27FC236}">
+                <a16:creationId xmlns:a16="http://schemas.microsoft.com/office/drawing/2014/main" id="{617D155E-F6EA-4D2C-B34C-8296D8741790}"/>
+              </a:ext>
+            </a:extLst>
+          </p:cNvPr>
+          <p:cNvSpPr>
+            <a:spLocks xmlns:a="http://schemas.openxmlformats.org/drawingml/2006/main" noGrp="1"/>
+          </p:cNvSpPr>
+          <p:nvPr/>
+        </p:nvSpPr>
+        <p:spPr>
+          <a:xfrm xmlns:a="http://schemas.openxmlformats.org/drawingml/2006/main">
+            <a:off x="0" y="0"/>
+            <a:ext cx="171450" cy="6858000"/>
+          </a:xfrm>
+          <a:prstGeom xmlns:a="http://schemas.openxmlformats.org/drawingml/2006/main" prst="rect">
+            <a:avLst/>
+          </a:prstGeom>
+          <a:solidFill xmlns:a="http://schemas.openxmlformats.org/drawingml/2006/main">
+            <a:srgbClr val="6657E8"/>
+          </a:solidFill>
+          <a:ln xmlns:a="http://schemas.openxmlformats.org/drawingml/2006/main" w="0">
+            <a:noFill/>
+            <a:prstDash val="solid"/>
+          </a:ln>
+        </p:spPr>
+      </p:sp>
+      <p:sp>
+        <p:nvSpPr>
+          <p:cNvPr id="2" name="">
+            <a:extLst xmlns:a="http://schemas.openxmlformats.org/drawingml/2006/main">
+              <a:ext uri="{FF2B5EF4-FFF2-40B4-BE49-F238E27FC236}">
+                <a16:creationId xmlns:a16="http://schemas.microsoft.com/office/drawing/2014/main" id="{5FD4440B-AD6D-4B29-A836-E2B272F8C820}"/>
+              </a:ext>
+            </a:extLst>
+          </p:cNvPr>
+          <p:cNvSpPr>
+            <a:spLocks xmlns:a="http://schemas.openxmlformats.org/drawingml/2006/main" noGrp="1"/>
+          </p:cNvSpPr>
+          <p:nvPr/>
+        </p:nvSpPr>
+        <p:spPr>
+          <a:xfrm xmlns:a="http://schemas.openxmlformats.org/drawingml/2006/main">
+            <a:off x="647700" y="457200"/>
+            <a:ext cx="10096500" cy="552450"/>
+          </a:xfrm>
+          <a:prstGeom xmlns:a="http://schemas.openxmlformats.org/drawingml/2006/main" prst="rect">
+            <a:avLst/>
+          </a:prstGeom>
+          <a:noFill xmlns:a="http://schemas.openxmlformats.org/drawingml/2006/main"/>
+          <a:ln xmlns:a="http://schemas.openxmlformats.org/drawingml/2006/main" w="0">
+            <a:noFill/>
+            <a:prstDash val="solid"/>
+          </a:ln>
+        </p:spPr>
+        <p:txBody>
+          <a:bodyPr xmlns:a="http://schemas.openxmlformats.org/drawingml/2006/main"/>
+          <a:lstStyle xmlns:a="http://schemas.openxmlformats.org/drawingml/2006/main"/>
+          <a:p xmlns:a="http://schemas.openxmlformats.org/drawingml/2006/main">
+            <a:pPr>
+              <a:defRPr sz="2700" b="1">
+                <a:solidFill>
+                  <a:srgbClr val="182235"/>
+                </a:solidFill>
+              </a:defRPr>
+            </a:pPr>
+            <a:r>
+              <a:rPr sz="2700" b="1">
+                <a:solidFill>
+                  <a:srgbClr val="182235"/>
+                </a:solidFill>
+              </a:rPr>
+              <a:t>왜 배우는지 알면 실습 방향이 보입니다</a:t>
+            </a:r>
+          </a:p>
+        </p:txBody>
+      </p:sp>
+      <p:sp>
+        <p:nvSpPr>
+          <p:cNvPr id="3" name="">
+            <a:extLst xmlns:a="http://schemas.openxmlformats.org/drawingml/2006/main">
+              <a:ext uri="{FF2B5EF4-FFF2-40B4-BE49-F238E27FC236}">
+                <a16:creationId xmlns:a16="http://schemas.microsoft.com/office/drawing/2014/main" id="{ACEB154F-4C8C-4EA4-9F8C-DB1F5DB3BA87}"/>
+              </a:ext>
+            </a:extLst>
+          </p:cNvPr>
+          <p:cNvSpPr>
+            <a:spLocks xmlns:a="http://schemas.openxmlformats.org/drawingml/2006/main" noGrp="1"/>
+          </p:cNvSpPr>
+          <p:nvPr/>
+        </p:nvSpPr>
+        <p:spPr>
+          <a:xfrm xmlns:a="http://schemas.openxmlformats.org/drawingml/2006/main">
+            <a:off x="666750" y="6419850"/>
+            <a:ext cx="10096500" cy="209550"/>
+          </a:xfrm>
+          <a:prstGeom xmlns:a="http://schemas.openxmlformats.org/drawingml/2006/main" prst="rect">
+            <a:avLst/>
+          </a:prstGeom>
+          <a:noFill xmlns:a="http://schemas.openxmlformats.org/drawingml/2006/main"/>
+          <a:ln xmlns:a="http://schemas.openxmlformats.org/drawingml/2006/main" w="0">
+            <a:noFill/>
+            <a:prstDash val="solid"/>
+          </a:ln>
+        </p:spPr>
+        <p:txBody>
+          <a:bodyPr xmlns:a="http://schemas.openxmlformats.org/drawingml/2006/main"/>
+          <a:lstStyle xmlns:a="http://schemas.openxmlformats.org/drawingml/2006/main"/>
+          <a:p xmlns:a="http://schemas.openxmlformats.org/drawingml/2006/main">
+            <a:pPr>
+              <a:defRPr sz="975">
+                <a:solidFill>
+                  <a:srgbClr val="657083"/>
+                </a:solidFill>
+              </a:defRPr>
+            </a:pPr>
+            <a:r>
+              <a:rPr sz="975">
+                <a:solidFill>
+                  <a:srgbClr val="657083"/>
+                </a:solidFill>
+              </a:rPr>
+              <a:t>EDU 웹개발 교육 플랫폼  ·  09</a:t>
+            </a:r>
+          </a:p>
+        </p:txBody>
+      </p:sp>
+      <p:sp>
+        <p:nvSpPr>
+          <p:cNvPr id="4" name="">
+            <a:extLst xmlns:a="http://schemas.openxmlformats.org/drawingml/2006/main">
+              <a:ext uri="{FF2B5EF4-FFF2-40B4-BE49-F238E27FC236}">
+                <a16:creationId xmlns:a16="http://schemas.microsoft.com/office/drawing/2014/main" id="{7C307380-A234-4AD8-B170-0E19371FF8AF}"/>
+              </a:ext>
+            </a:extLst>
+          </p:cNvPr>
+          <p:cNvSpPr>
+            <a:spLocks xmlns:a="http://schemas.openxmlformats.org/drawingml/2006/main" noGrp="1"/>
+          </p:cNvSpPr>
+          <p:nvPr/>
+        </p:nvSpPr>
+        <p:spPr>
+          <a:xfrm xmlns:a="http://schemas.openxmlformats.org/drawingml/2006/main">
+            <a:off x="685800" y="1381125"/>
+            <a:ext cx="10820400" cy="1809750"/>
+          </a:xfrm>
+          <a:prstGeom xmlns:a="http://schemas.openxmlformats.org/drawingml/2006/main" prst="roundRect">
+            <a:avLst>
+              <a:gd name="adj" fmla="val 6316"/>
+            </a:avLst>
+          </a:prstGeom>
+          <a:solidFill xmlns:a="http://schemas.openxmlformats.org/drawingml/2006/main">
+            <a:srgbClr val="EEEAFE"/>
+          </a:solidFill>
+          <a:ln xmlns:a="http://schemas.openxmlformats.org/drawingml/2006/main" w="0">
+            <a:noFill/>
+            <a:prstDash val="solid"/>
+          </a:ln>
+        </p:spPr>
+      </p:sp>
+      <p:sp>
+        <p:nvSpPr>
+          <p:cNvPr id="5" name="">
+            <a:extLst xmlns:a="http://schemas.openxmlformats.org/drawingml/2006/main">
+              <a:ext uri="{FF2B5EF4-FFF2-40B4-BE49-F238E27FC236}">
+                <a16:creationId xmlns:a16="http://schemas.microsoft.com/office/drawing/2014/main" id="{99655896-4714-465F-82F2-CC60E435B1F2}"/>
+              </a:ext>
+            </a:extLst>
+          </p:cNvPr>
+          <p:cNvSpPr>
+            <a:spLocks xmlns:a="http://schemas.openxmlformats.org/drawingml/2006/main" noGrp="1"/>
+          </p:cNvSpPr>
+          <p:nvPr/>
+        </p:nvSpPr>
+        <p:spPr>
+          <a:xfrm xmlns:a="http://schemas.openxmlformats.org/drawingml/2006/main">
+            <a:off x="1066800" y="1762125"/>
+            <a:ext cx="10058400" cy="1143000"/>
+          </a:xfrm>
+          <a:prstGeom xmlns:a="http://schemas.openxmlformats.org/drawingml/2006/main" prst="rect">
+            <a:avLst/>
+          </a:prstGeom>
+          <a:noFill xmlns:a="http://schemas.openxmlformats.org/drawingml/2006/main"/>
+          <a:ln xmlns:a="http://schemas.openxmlformats.org/drawingml/2006/main" w="0">
+            <a:noFill/>
+            <a:prstDash val="solid"/>
+          </a:ln>
+        </p:spPr>
+        <p:txBody>
+          <a:bodyPr xmlns:a="http://schemas.openxmlformats.org/drawingml/2006/main"/>
+          <a:lstStyle xmlns:a="http://schemas.openxmlformats.org/drawingml/2006/main"/>
+          <a:p xmlns:a="http://schemas.openxmlformats.org/drawingml/2006/main">
+            <a:pPr>
+              <a:defRPr sz="1875">
+                <a:solidFill>
+                  <a:srgbClr val="182235"/>
+                </a:solidFill>
+              </a:defRPr>
+            </a:pPr>
+            <a:r>
+              <a:rPr sz="1875">
+                <a:solidFill>
+                  <a:srgbClr val="182235"/>
+                </a:solidFill>
+              </a:rPr>
+              <a:t>프런트엔드가 공지나 교육자료를 받으려면 서버가 약속된 주소와 형식으로 데이터를 보내야 합니다.</a:t>
+            </a:r>
+          </a:p>
+        </p:txBody>
+      </p:sp>
+      <p:sp>
+        <p:nvSpPr>
+          <p:cNvPr id="6" name="">
+            <a:extLst xmlns:a="http://schemas.openxmlformats.org/drawingml/2006/main">
+              <a:ext uri="{FF2B5EF4-FFF2-40B4-BE49-F238E27FC236}">
+                <a16:creationId xmlns:a16="http://schemas.microsoft.com/office/drawing/2014/main" id="{6C1FDF26-8873-4B86-97FD-03A8EE067AA5}"/>
+              </a:ext>
+            </a:extLst>
+          </p:cNvPr>
+          <p:cNvSpPr>
+            <a:spLocks xmlns:a="http://schemas.openxmlformats.org/drawingml/2006/main" noGrp="1"/>
+          </p:cNvSpPr>
+          <p:nvPr/>
+        </p:nvSpPr>
+        <p:spPr>
+          <a:xfrm xmlns:a="http://schemas.openxmlformats.org/drawingml/2006/main">
+            <a:off x="838200" y="3714750"/>
+            <a:ext cx="2476500" cy="323850"/>
+          </a:xfrm>
+          <a:prstGeom xmlns:a="http://schemas.openxmlformats.org/drawingml/2006/main" prst="rect">
+            <a:avLst/>
+          </a:prstGeom>
+          <a:noFill xmlns:a="http://schemas.openxmlformats.org/drawingml/2006/main"/>
+          <a:ln xmlns:a="http://schemas.openxmlformats.org/drawingml/2006/main" w="0">
+            <a:noFill/>
+            <a:prstDash val="solid"/>
+          </a:ln>
+        </p:spPr>
+        <p:txBody>
+          <a:bodyPr xmlns:a="http://schemas.openxmlformats.org/drawingml/2006/main"/>
+          <a:lstStyle xmlns:a="http://schemas.openxmlformats.org/drawingml/2006/main"/>
+          <a:p xmlns:a="http://schemas.openxmlformats.org/drawingml/2006/main">
+            <a:pPr>
+              <a:defRPr sz="1575" b="1">
+                <a:solidFill>
+                  <a:srgbClr val="6657E8"/>
+                </a:solidFill>
+              </a:defRPr>
+            </a:pPr>
+            <a:r>
+              <a:rPr sz="1575" b="1">
+                <a:solidFill>
+                  <a:srgbClr val="6657E8"/>
+                </a:solidFill>
+              </a:rPr>
+              <a:t>오늘 완성할 결과</a:t>
+            </a:r>
+          </a:p>
+        </p:txBody>
+      </p:sp>
+      <p:sp>
+        <p:nvSpPr>
+          <p:cNvPr id="7" name="">
+            <a:extLst xmlns:a="http://schemas.openxmlformats.org/drawingml/2006/main">
+              <a:ext uri="{FF2B5EF4-FFF2-40B4-BE49-F238E27FC236}">
+                <a16:creationId xmlns:a16="http://schemas.microsoft.com/office/drawing/2014/main" id="{68D92799-183B-4DAB-84FE-F853BC9A773C}"/>
+              </a:ext>
+            </a:extLst>
+          </p:cNvPr>
+          <p:cNvSpPr>
+            <a:spLocks xmlns:a="http://schemas.openxmlformats.org/drawingml/2006/main" noGrp="1"/>
+          </p:cNvSpPr>
+          <p:nvPr/>
+        </p:nvSpPr>
+        <p:spPr>
+          <a:xfrm xmlns:a="http://schemas.openxmlformats.org/drawingml/2006/main">
+            <a:off x="838200" y="4191000"/>
+            <a:ext cx="10096500" cy="857250"/>
+          </a:xfrm>
+          <a:prstGeom xmlns:a="http://schemas.openxmlformats.org/drawingml/2006/main" prst="rect">
+            <a:avLst/>
+          </a:prstGeom>
+          <a:noFill xmlns:a="http://schemas.openxmlformats.org/drawingml/2006/main"/>
+          <a:ln xmlns:a="http://schemas.openxmlformats.org/drawingml/2006/main" w="0">
+            <a:noFill/>
+            <a:prstDash val="solid"/>
+          </a:ln>
+        </p:spPr>
+        <p:txBody>
+          <a:bodyPr xmlns:a="http://schemas.openxmlformats.org/drawingml/2006/main"/>
+          <a:lstStyle xmlns:a="http://schemas.openxmlformats.org/drawingml/2006/main"/>
+          <a:p xmlns:a="http://schemas.openxmlformats.org/drawingml/2006/main">
+            <a:pPr>
+              <a:defRPr sz="2025" b="1">
+                <a:solidFill>
+                  <a:srgbClr val="182235"/>
+                </a:solidFill>
+              </a:defRPr>
+            </a:pPr>
+            <a:r>
+              <a:rPr sz="2025" b="1">
+                <a:solidFill>
+                  <a:srgbClr val="182235"/>
+                </a:solidFill>
+              </a:rPr>
+              <a:t>/api/lessons 주소에서 교육자료 목록 두 개를 JSON으로 확인합니다.</a:t>
+            </a:r>
+          </a:p>
+        </p:txBody>
+      </p:sp>
+    </p:spTree>
+    <p:extLst>
+      <p:ext uri="{BB962C8B-B14F-4D97-AF65-F5344CB8AC3E}">
+        <p14:creationId xmlns:p14="http://schemas.microsoft.com/office/powerpoint/2010/main" val="1231497653"/>
       </p:ext>
     </p:extLst>
   </p:cSld>
